--- a/03-soubory/prezentace-knihanavstev.pptx
+++ b/03-soubory/prezentace-knihanavstev.pptx
@@ -2,30 +2,25 @@
 <file path=ppt/presentation.xml><?xml version="1.0" encoding="utf-8"?>
 <p:presentation xmlns:a="http://schemas.openxmlformats.org/drawingml/2006/main" xmlns:r="http://schemas.openxmlformats.org/officeDocument/2006/relationships" xmlns:p="http://schemas.openxmlformats.org/presentationml/2006/main" saveSubsetFonts="1">
   <p:sldMasterIdLst>
-    <p:sldMasterId id="2147483648" r:id="rId1"/>
+    <p:sldMasterId id="2147483648" r:id="rId4"/>
   </p:sldMasterIdLst>
   <p:sldIdLst>
-    <p:sldId id="256" r:id="rId2"/>
-    <p:sldId id="257" r:id="rId3"/>
-    <p:sldId id="258" r:id="rId4"/>
-    <p:sldId id="259" r:id="rId5"/>
-    <p:sldId id="260" r:id="rId6"/>
-    <p:sldId id="261" r:id="rId7"/>
-    <p:sldId id="277" r:id="rId8"/>
-    <p:sldId id="262" r:id="rId9"/>
-    <p:sldId id="263" r:id="rId10"/>
-    <p:sldId id="264" r:id="rId11"/>
-    <p:sldId id="265" r:id="rId12"/>
-    <p:sldId id="266" r:id="rId13"/>
-    <p:sldId id="267" r:id="rId14"/>
-    <p:sldId id="268" r:id="rId15"/>
-    <p:sldId id="269" r:id="rId16"/>
-    <p:sldId id="270" r:id="rId17"/>
-    <p:sldId id="271" r:id="rId18"/>
-    <p:sldId id="276" r:id="rId19"/>
-    <p:sldId id="273" r:id="rId20"/>
-    <p:sldId id="274" r:id="rId21"/>
-    <p:sldId id="275" r:id="rId22"/>
+    <p:sldId id="256" r:id="rId5"/>
+    <p:sldId id="257" r:id="rId6"/>
+    <p:sldId id="258" r:id="rId7"/>
+    <p:sldId id="259" r:id="rId8"/>
+    <p:sldId id="260" r:id="rId9"/>
+    <p:sldId id="261" r:id="rId10"/>
+    <p:sldId id="262" r:id="rId11"/>
+    <p:sldId id="263" r:id="rId12"/>
+    <p:sldId id="264" r:id="rId13"/>
+    <p:sldId id="265" r:id="rId14"/>
+    <p:sldId id="266" r:id="rId15"/>
+    <p:sldId id="267" r:id="rId16"/>
+    <p:sldId id="268" r:id="rId17"/>
+    <p:sldId id="269" r:id="rId18"/>
+    <p:sldId id="270" r:id="rId19"/>
+    <p:sldId id="271" r:id="rId20"/>
   </p:sldIdLst>
   <p:sldSz cx="12192000" cy="6858000"/>
   <p:notesSz cx="6858000" cy="9144000"/>
@@ -124,6 +119,11 @@
       </a:defRPr>
     </a:lvl9pPr>
   </p:defaultTextStyle>
+  <p:extLst>
+    <p:ext uri="{EFAFB233-063F-42B5-8137-9DF3F51BA10A}">
+      <p15:sldGuideLst xmlns:p15="http://schemas.microsoft.com/office/powerpoint/2012/main"/>
+    </p:ext>
+  </p:extLst>
 </p:presentation>
 </file>
 
@@ -149,7 +149,7 @@
           <p:cNvPr id="2" name="Nadpis 1">
             <a:extLst>
               <a:ext uri="{FF2B5EF4-FFF2-40B4-BE49-F238E27FC236}">
-                <a16:creationId xmlns:a16="http://schemas.microsoft.com/office/drawing/2014/main" id="{F7C67EB5-2E25-4270-8418-3052BFF6F240}"/>
+                <a16:creationId xmlns:a16="http://schemas.microsoft.com/office/drawing/2014/main" id="{367A0029-8090-0738-EED1-9D058AB81447}"/>
               </a:ext>
             </a:extLst>
           </p:cNvPr>
@@ -186,7 +186,7 @@
           <p:cNvPr id="3" name="Podnadpis 2">
             <a:extLst>
               <a:ext uri="{FF2B5EF4-FFF2-40B4-BE49-F238E27FC236}">
-                <a16:creationId xmlns:a16="http://schemas.microsoft.com/office/drawing/2014/main" id="{9AADC2AF-C157-40B6-ADB0-B125C4BC58EA}"/>
+                <a16:creationId xmlns:a16="http://schemas.microsoft.com/office/drawing/2014/main" id="{8D94F626-7737-9CCF-B3F4-D6A9B3749374}"/>
               </a:ext>
             </a:extLst>
           </p:cNvPr>
@@ -256,7 +256,7 @@
           <p:cNvPr id="4" name="Zástupný symbol pro datum 3">
             <a:extLst>
               <a:ext uri="{FF2B5EF4-FFF2-40B4-BE49-F238E27FC236}">
-                <a16:creationId xmlns:a16="http://schemas.microsoft.com/office/drawing/2014/main" id="{D12F96F5-28B2-4F4A-A705-25385596748F}"/>
+                <a16:creationId xmlns:a16="http://schemas.microsoft.com/office/drawing/2014/main" id="{EB502BB7-C6DE-2D23-597F-DEEBE1C28C4D}"/>
               </a:ext>
             </a:extLst>
           </p:cNvPr>
@@ -272,9 +272,9 @@
           <a:bodyPr/>
           <a:lstStyle/>
           <a:p>
-            <a:fld id="{79A4DB11-F443-4527-A45B-9126C23EB236}" type="datetimeFigureOut">
+            <a:fld id="{9BF8D64F-D2B9-40D4-8E45-BFC79C8D0172}" type="datetimeFigureOut">
               <a:rPr lang="cs-CZ" smtClean="0"/>
-              <a:t>24.02.2022</a:t>
+              <a:t>05.03.2026</a:t>
             </a:fld>
             <a:endParaRPr lang="cs-CZ"/>
           </a:p>
@@ -285,7 +285,7 @@
           <p:cNvPr id="5" name="Zástupný symbol pro zápatí 4">
             <a:extLst>
               <a:ext uri="{FF2B5EF4-FFF2-40B4-BE49-F238E27FC236}">
-                <a16:creationId xmlns:a16="http://schemas.microsoft.com/office/drawing/2014/main" id="{64CB21C2-EE51-47E5-BE71-417FD74A413B}"/>
+                <a16:creationId xmlns:a16="http://schemas.microsoft.com/office/drawing/2014/main" id="{3BD64473-8FCD-33FC-5597-4BA9D30D5446}"/>
               </a:ext>
             </a:extLst>
           </p:cNvPr>
@@ -310,7 +310,7 @@
           <p:cNvPr id="6" name="Zástupný symbol pro číslo snímku 5">
             <a:extLst>
               <a:ext uri="{FF2B5EF4-FFF2-40B4-BE49-F238E27FC236}">
-                <a16:creationId xmlns:a16="http://schemas.microsoft.com/office/drawing/2014/main" id="{BE28BE55-8516-4CCE-9892-FA7E8C372031}"/>
+                <a16:creationId xmlns:a16="http://schemas.microsoft.com/office/drawing/2014/main" id="{E9ED640B-7FA4-5C17-1D0E-3F395CE4BCF9}"/>
               </a:ext>
             </a:extLst>
           </p:cNvPr>
@@ -326,7 +326,7 @@
           <a:bodyPr/>
           <a:lstStyle/>
           <a:p>
-            <a:fld id="{01198A35-75D0-4BEE-81D5-726ECD40A0B9}" type="slidenum">
+            <a:fld id="{303CEFD9-8525-4A63-B77B-9152A9490C89}" type="slidenum">
               <a:rPr lang="cs-CZ" smtClean="0"/>
               <a:t>‹#›</a:t>
             </a:fld>
@@ -337,7 +337,7 @@
     </p:spTree>
     <p:extLst>
       <p:ext uri="{BB962C8B-B14F-4D97-AF65-F5344CB8AC3E}">
-        <p14:creationId xmlns:p14="http://schemas.microsoft.com/office/powerpoint/2010/main" val="2317241167"/>
+        <p14:creationId xmlns:p14="http://schemas.microsoft.com/office/powerpoint/2010/main" val="4215558078"/>
       </p:ext>
     </p:extLst>
   </p:cSld>
@@ -369,7 +369,7 @@
           <p:cNvPr id="2" name="Nadpis 1">
             <a:extLst>
               <a:ext uri="{FF2B5EF4-FFF2-40B4-BE49-F238E27FC236}">
-                <a16:creationId xmlns:a16="http://schemas.microsoft.com/office/drawing/2014/main" id="{5742CAC3-A122-4D35-9164-226ED3E0289C}"/>
+                <a16:creationId xmlns:a16="http://schemas.microsoft.com/office/drawing/2014/main" id="{303C4299-F8D8-F986-E5BC-EBFD79162BE1}"/>
               </a:ext>
             </a:extLst>
           </p:cNvPr>
@@ -397,7 +397,7 @@
           <p:cNvPr id="3" name="Zástupný symbol pro svislý text 2">
             <a:extLst>
               <a:ext uri="{FF2B5EF4-FFF2-40B4-BE49-F238E27FC236}">
-                <a16:creationId xmlns:a16="http://schemas.microsoft.com/office/drawing/2014/main" id="{A3BBCB0B-9C65-4D1F-901A-5159D59C52EA}"/>
+                <a16:creationId xmlns:a16="http://schemas.microsoft.com/office/drawing/2014/main" id="{5288510C-67C8-9E1D-2C35-51508F79422F}"/>
               </a:ext>
             </a:extLst>
           </p:cNvPr>
@@ -454,7 +454,7 @@
           <p:cNvPr id="4" name="Zástupný symbol pro datum 3">
             <a:extLst>
               <a:ext uri="{FF2B5EF4-FFF2-40B4-BE49-F238E27FC236}">
-                <a16:creationId xmlns:a16="http://schemas.microsoft.com/office/drawing/2014/main" id="{DD691B09-DEBC-4A54-8B9E-368AD12CAC5A}"/>
+                <a16:creationId xmlns:a16="http://schemas.microsoft.com/office/drawing/2014/main" id="{FDDE5CA6-4B87-C119-A6BC-93A5CCE6CD80}"/>
               </a:ext>
             </a:extLst>
           </p:cNvPr>
@@ -470,9 +470,9 @@
           <a:bodyPr/>
           <a:lstStyle/>
           <a:p>
-            <a:fld id="{79A4DB11-F443-4527-A45B-9126C23EB236}" type="datetimeFigureOut">
+            <a:fld id="{9BF8D64F-D2B9-40D4-8E45-BFC79C8D0172}" type="datetimeFigureOut">
               <a:rPr lang="cs-CZ" smtClean="0"/>
-              <a:t>24.02.2022</a:t>
+              <a:t>05.03.2026</a:t>
             </a:fld>
             <a:endParaRPr lang="cs-CZ"/>
           </a:p>
@@ -483,7 +483,7 @@
           <p:cNvPr id="5" name="Zástupný symbol pro zápatí 4">
             <a:extLst>
               <a:ext uri="{FF2B5EF4-FFF2-40B4-BE49-F238E27FC236}">
-                <a16:creationId xmlns:a16="http://schemas.microsoft.com/office/drawing/2014/main" id="{1DFF7DCA-12F7-4772-B065-9E54DFB768A0}"/>
+                <a16:creationId xmlns:a16="http://schemas.microsoft.com/office/drawing/2014/main" id="{2D2B7E3B-54C3-5503-9785-D20E100E161F}"/>
               </a:ext>
             </a:extLst>
           </p:cNvPr>
@@ -508,7 +508,7 @@
           <p:cNvPr id="6" name="Zástupný symbol pro číslo snímku 5">
             <a:extLst>
               <a:ext uri="{FF2B5EF4-FFF2-40B4-BE49-F238E27FC236}">
-                <a16:creationId xmlns:a16="http://schemas.microsoft.com/office/drawing/2014/main" id="{BB41BAA4-BE6F-486C-8C6F-2EF942CDF5C9}"/>
+                <a16:creationId xmlns:a16="http://schemas.microsoft.com/office/drawing/2014/main" id="{DBDFE6DF-F5BA-4813-DA3D-5164F728632D}"/>
               </a:ext>
             </a:extLst>
           </p:cNvPr>
@@ -524,7 +524,7 @@
           <a:bodyPr/>
           <a:lstStyle/>
           <a:p>
-            <a:fld id="{01198A35-75D0-4BEE-81D5-726ECD40A0B9}" type="slidenum">
+            <a:fld id="{303CEFD9-8525-4A63-B77B-9152A9490C89}" type="slidenum">
               <a:rPr lang="cs-CZ" smtClean="0"/>
               <a:t>‹#›</a:t>
             </a:fld>
@@ -535,7 +535,7 @@
     </p:spTree>
     <p:extLst>
       <p:ext uri="{BB962C8B-B14F-4D97-AF65-F5344CB8AC3E}">
-        <p14:creationId xmlns:p14="http://schemas.microsoft.com/office/powerpoint/2010/main" val="2312777189"/>
+        <p14:creationId xmlns:p14="http://schemas.microsoft.com/office/powerpoint/2010/main" val="3320543735"/>
       </p:ext>
     </p:extLst>
   </p:cSld>
@@ -567,7 +567,7 @@
           <p:cNvPr id="2" name="Svislý nadpis 1">
             <a:extLst>
               <a:ext uri="{FF2B5EF4-FFF2-40B4-BE49-F238E27FC236}">
-                <a16:creationId xmlns:a16="http://schemas.microsoft.com/office/drawing/2014/main" id="{8A9CA2A2-4070-4DD2-A3E1-9C4E11633F12}"/>
+                <a16:creationId xmlns:a16="http://schemas.microsoft.com/office/drawing/2014/main" id="{03F401CB-CBCC-9354-4E31-901653E1AEEC}"/>
               </a:ext>
             </a:extLst>
           </p:cNvPr>
@@ -600,7 +600,7 @@
           <p:cNvPr id="3" name="Zástupný symbol pro svislý text 2">
             <a:extLst>
               <a:ext uri="{FF2B5EF4-FFF2-40B4-BE49-F238E27FC236}">
-                <a16:creationId xmlns:a16="http://schemas.microsoft.com/office/drawing/2014/main" id="{A5163406-3229-4841-861B-193DDB4B24B1}"/>
+                <a16:creationId xmlns:a16="http://schemas.microsoft.com/office/drawing/2014/main" id="{ABA4CE6A-1287-746A-2DD2-ECD1698D7F36}"/>
               </a:ext>
             </a:extLst>
           </p:cNvPr>
@@ -662,7 +662,7 @@
           <p:cNvPr id="4" name="Zástupný symbol pro datum 3">
             <a:extLst>
               <a:ext uri="{FF2B5EF4-FFF2-40B4-BE49-F238E27FC236}">
-                <a16:creationId xmlns:a16="http://schemas.microsoft.com/office/drawing/2014/main" id="{D511129A-9980-4725-BD55-0490FF97A20B}"/>
+                <a16:creationId xmlns:a16="http://schemas.microsoft.com/office/drawing/2014/main" id="{7247C407-6A21-2F1D-2851-FA66831B8237}"/>
               </a:ext>
             </a:extLst>
           </p:cNvPr>
@@ -678,9 +678,9 @@
           <a:bodyPr/>
           <a:lstStyle/>
           <a:p>
-            <a:fld id="{79A4DB11-F443-4527-A45B-9126C23EB236}" type="datetimeFigureOut">
+            <a:fld id="{9BF8D64F-D2B9-40D4-8E45-BFC79C8D0172}" type="datetimeFigureOut">
               <a:rPr lang="cs-CZ" smtClean="0"/>
-              <a:t>24.02.2022</a:t>
+              <a:t>05.03.2026</a:t>
             </a:fld>
             <a:endParaRPr lang="cs-CZ"/>
           </a:p>
@@ -691,7 +691,7 @@
           <p:cNvPr id="5" name="Zástupný symbol pro zápatí 4">
             <a:extLst>
               <a:ext uri="{FF2B5EF4-FFF2-40B4-BE49-F238E27FC236}">
-                <a16:creationId xmlns:a16="http://schemas.microsoft.com/office/drawing/2014/main" id="{B62DB88B-52B8-4FCE-A79A-10553EB3F6A4}"/>
+                <a16:creationId xmlns:a16="http://schemas.microsoft.com/office/drawing/2014/main" id="{45ECC2AD-8CC1-AAB0-61AB-EA0B9DC03273}"/>
               </a:ext>
             </a:extLst>
           </p:cNvPr>
@@ -716,7 +716,7 @@
           <p:cNvPr id="6" name="Zástupný symbol pro číslo snímku 5">
             <a:extLst>
               <a:ext uri="{FF2B5EF4-FFF2-40B4-BE49-F238E27FC236}">
-                <a16:creationId xmlns:a16="http://schemas.microsoft.com/office/drawing/2014/main" id="{BCDD5F1F-C717-4252-A54A-52D84AA8CFDA}"/>
+                <a16:creationId xmlns:a16="http://schemas.microsoft.com/office/drawing/2014/main" id="{0E893D8D-14D5-D2BC-1CE7-14A7DE88A961}"/>
               </a:ext>
             </a:extLst>
           </p:cNvPr>
@@ -732,7 +732,7 @@
           <a:bodyPr/>
           <a:lstStyle/>
           <a:p>
-            <a:fld id="{01198A35-75D0-4BEE-81D5-726ECD40A0B9}" type="slidenum">
+            <a:fld id="{303CEFD9-8525-4A63-B77B-9152A9490C89}" type="slidenum">
               <a:rPr lang="cs-CZ" smtClean="0"/>
               <a:t>‹#›</a:t>
             </a:fld>
@@ -743,7 +743,7 @@
     </p:spTree>
     <p:extLst>
       <p:ext uri="{BB962C8B-B14F-4D97-AF65-F5344CB8AC3E}">
-        <p14:creationId xmlns:p14="http://schemas.microsoft.com/office/powerpoint/2010/main" val="2608989974"/>
+        <p14:creationId xmlns:p14="http://schemas.microsoft.com/office/powerpoint/2010/main" val="2440194527"/>
       </p:ext>
     </p:extLst>
   </p:cSld>
@@ -775,7 +775,7 @@
           <p:cNvPr id="2" name="Nadpis 1">
             <a:extLst>
               <a:ext uri="{FF2B5EF4-FFF2-40B4-BE49-F238E27FC236}">
-                <a16:creationId xmlns:a16="http://schemas.microsoft.com/office/drawing/2014/main" id="{CD29E464-9B3F-4A42-9B46-2499FAEA99DF}"/>
+                <a16:creationId xmlns:a16="http://schemas.microsoft.com/office/drawing/2014/main" id="{3CA6E6F8-C772-9E5E-B29F-D3A292B7D4E8}"/>
               </a:ext>
             </a:extLst>
           </p:cNvPr>
@@ -803,7 +803,7 @@
           <p:cNvPr id="3" name="Zástupný obsah 2">
             <a:extLst>
               <a:ext uri="{FF2B5EF4-FFF2-40B4-BE49-F238E27FC236}">
-                <a16:creationId xmlns:a16="http://schemas.microsoft.com/office/drawing/2014/main" id="{DF3088D2-F7B3-491E-9CCA-4366600E6F05}"/>
+                <a16:creationId xmlns:a16="http://schemas.microsoft.com/office/drawing/2014/main" id="{8DCCFD0E-07DF-3FCF-A359-8E3EFF4B013E}"/>
               </a:ext>
             </a:extLst>
           </p:cNvPr>
@@ -860,7 +860,7 @@
           <p:cNvPr id="4" name="Zástupný symbol pro datum 3">
             <a:extLst>
               <a:ext uri="{FF2B5EF4-FFF2-40B4-BE49-F238E27FC236}">
-                <a16:creationId xmlns:a16="http://schemas.microsoft.com/office/drawing/2014/main" id="{8A353659-6822-4E35-81C7-54A26780A48D}"/>
+                <a16:creationId xmlns:a16="http://schemas.microsoft.com/office/drawing/2014/main" id="{A3D56A08-2EB6-D9D4-6DDF-B63D455A242C}"/>
               </a:ext>
             </a:extLst>
           </p:cNvPr>
@@ -876,9 +876,9 @@
           <a:bodyPr/>
           <a:lstStyle/>
           <a:p>
-            <a:fld id="{79A4DB11-F443-4527-A45B-9126C23EB236}" type="datetimeFigureOut">
+            <a:fld id="{9BF8D64F-D2B9-40D4-8E45-BFC79C8D0172}" type="datetimeFigureOut">
               <a:rPr lang="cs-CZ" smtClean="0"/>
-              <a:t>24.02.2022</a:t>
+              <a:t>05.03.2026</a:t>
             </a:fld>
             <a:endParaRPr lang="cs-CZ"/>
           </a:p>
@@ -889,7 +889,7 @@
           <p:cNvPr id="5" name="Zástupný symbol pro zápatí 4">
             <a:extLst>
               <a:ext uri="{FF2B5EF4-FFF2-40B4-BE49-F238E27FC236}">
-                <a16:creationId xmlns:a16="http://schemas.microsoft.com/office/drawing/2014/main" id="{75B1E398-FD8B-499A-B2A5-4A9804C45D65}"/>
+                <a16:creationId xmlns:a16="http://schemas.microsoft.com/office/drawing/2014/main" id="{BFDE5D6E-E508-1B3D-A868-6AA6E8F83E1B}"/>
               </a:ext>
             </a:extLst>
           </p:cNvPr>
@@ -914,7 +914,7 @@
           <p:cNvPr id="6" name="Zástupný symbol pro číslo snímku 5">
             <a:extLst>
               <a:ext uri="{FF2B5EF4-FFF2-40B4-BE49-F238E27FC236}">
-                <a16:creationId xmlns:a16="http://schemas.microsoft.com/office/drawing/2014/main" id="{414ED559-5BC7-406C-833B-4668C319B2ED}"/>
+                <a16:creationId xmlns:a16="http://schemas.microsoft.com/office/drawing/2014/main" id="{4D683874-6793-0F35-F74A-425540C73E1E}"/>
               </a:ext>
             </a:extLst>
           </p:cNvPr>
@@ -930,7 +930,7 @@
           <a:bodyPr/>
           <a:lstStyle/>
           <a:p>
-            <a:fld id="{01198A35-75D0-4BEE-81D5-726ECD40A0B9}" type="slidenum">
+            <a:fld id="{303CEFD9-8525-4A63-B77B-9152A9490C89}" type="slidenum">
               <a:rPr lang="cs-CZ" smtClean="0"/>
               <a:t>‹#›</a:t>
             </a:fld>
@@ -941,7 +941,7 @@
     </p:spTree>
     <p:extLst>
       <p:ext uri="{BB962C8B-B14F-4D97-AF65-F5344CB8AC3E}">
-        <p14:creationId xmlns:p14="http://schemas.microsoft.com/office/powerpoint/2010/main" val="1448156474"/>
+        <p14:creationId xmlns:p14="http://schemas.microsoft.com/office/powerpoint/2010/main" val="1937877696"/>
       </p:ext>
     </p:extLst>
   </p:cSld>
@@ -973,7 +973,7 @@
           <p:cNvPr id="2" name="Nadpis 1">
             <a:extLst>
               <a:ext uri="{FF2B5EF4-FFF2-40B4-BE49-F238E27FC236}">
-                <a16:creationId xmlns:a16="http://schemas.microsoft.com/office/drawing/2014/main" id="{F54732EA-4A0D-4727-9BB2-CD8B39725F4B}"/>
+                <a16:creationId xmlns:a16="http://schemas.microsoft.com/office/drawing/2014/main" id="{969470AD-3DDD-5C73-A551-96850ADCD4B0}"/>
               </a:ext>
             </a:extLst>
           </p:cNvPr>
@@ -1010,7 +1010,7 @@
           <p:cNvPr id="3" name="Zástupný text 2">
             <a:extLst>
               <a:ext uri="{FF2B5EF4-FFF2-40B4-BE49-F238E27FC236}">
-                <a16:creationId xmlns:a16="http://schemas.microsoft.com/office/drawing/2014/main" id="{E9A239CD-39B3-49E9-8D7E-6C89AB455829}"/>
+                <a16:creationId xmlns:a16="http://schemas.microsoft.com/office/drawing/2014/main" id="{8BFCE219-3245-804F-C88D-74D711E5001B}"/>
               </a:ext>
             </a:extLst>
           </p:cNvPr>
@@ -1035,7 +1035,7 @@
               <a:defRPr sz="2400">
                 <a:solidFill>
                   <a:schemeClr val="tx1">
-                    <a:tint val="75000"/>
+                    <a:tint val="82000"/>
                   </a:schemeClr>
                 </a:solidFill>
               </a:defRPr>
@@ -1045,7 +1045,7 @@
               <a:defRPr sz="2000">
                 <a:solidFill>
                   <a:schemeClr val="tx1">
-                    <a:tint val="75000"/>
+                    <a:tint val="82000"/>
                   </a:schemeClr>
                 </a:solidFill>
               </a:defRPr>
@@ -1055,7 +1055,7 @@
               <a:defRPr sz="1800">
                 <a:solidFill>
                   <a:schemeClr val="tx1">
-                    <a:tint val="75000"/>
+                    <a:tint val="82000"/>
                   </a:schemeClr>
                 </a:solidFill>
               </a:defRPr>
@@ -1065,7 +1065,7 @@
               <a:defRPr sz="1600">
                 <a:solidFill>
                   <a:schemeClr val="tx1">
-                    <a:tint val="75000"/>
+                    <a:tint val="82000"/>
                   </a:schemeClr>
                 </a:solidFill>
               </a:defRPr>
@@ -1075,7 +1075,7 @@
               <a:defRPr sz="1600">
                 <a:solidFill>
                   <a:schemeClr val="tx1">
-                    <a:tint val="75000"/>
+                    <a:tint val="82000"/>
                   </a:schemeClr>
                 </a:solidFill>
               </a:defRPr>
@@ -1085,7 +1085,7 @@
               <a:defRPr sz="1600">
                 <a:solidFill>
                   <a:schemeClr val="tx1">
-                    <a:tint val="75000"/>
+                    <a:tint val="82000"/>
                   </a:schemeClr>
                 </a:solidFill>
               </a:defRPr>
@@ -1095,7 +1095,7 @@
               <a:defRPr sz="1600">
                 <a:solidFill>
                   <a:schemeClr val="tx1">
-                    <a:tint val="75000"/>
+                    <a:tint val="82000"/>
                   </a:schemeClr>
                 </a:solidFill>
               </a:defRPr>
@@ -1105,7 +1105,7 @@
               <a:defRPr sz="1600">
                 <a:solidFill>
                   <a:schemeClr val="tx1">
-                    <a:tint val="75000"/>
+                    <a:tint val="82000"/>
                   </a:schemeClr>
                 </a:solidFill>
               </a:defRPr>
@@ -1115,7 +1115,7 @@
               <a:defRPr sz="1600">
                 <a:solidFill>
                   <a:schemeClr val="tx1">
-                    <a:tint val="75000"/>
+                    <a:tint val="82000"/>
                   </a:schemeClr>
                 </a:solidFill>
               </a:defRPr>
@@ -1135,7 +1135,7 @@
           <p:cNvPr id="4" name="Zástupný symbol pro datum 3">
             <a:extLst>
               <a:ext uri="{FF2B5EF4-FFF2-40B4-BE49-F238E27FC236}">
-                <a16:creationId xmlns:a16="http://schemas.microsoft.com/office/drawing/2014/main" id="{5A3EAE3E-0D89-4B3E-9CCD-E3A278525D0E}"/>
+                <a16:creationId xmlns:a16="http://schemas.microsoft.com/office/drawing/2014/main" id="{7930BE06-2310-EDCC-D839-10EEBD3E66D8}"/>
               </a:ext>
             </a:extLst>
           </p:cNvPr>
@@ -1151,9 +1151,9 @@
           <a:bodyPr/>
           <a:lstStyle/>
           <a:p>
-            <a:fld id="{79A4DB11-F443-4527-A45B-9126C23EB236}" type="datetimeFigureOut">
+            <a:fld id="{9BF8D64F-D2B9-40D4-8E45-BFC79C8D0172}" type="datetimeFigureOut">
               <a:rPr lang="cs-CZ" smtClean="0"/>
-              <a:t>24.02.2022</a:t>
+              <a:t>05.03.2026</a:t>
             </a:fld>
             <a:endParaRPr lang="cs-CZ"/>
           </a:p>
@@ -1164,7 +1164,7 @@
           <p:cNvPr id="5" name="Zástupný symbol pro zápatí 4">
             <a:extLst>
               <a:ext uri="{FF2B5EF4-FFF2-40B4-BE49-F238E27FC236}">
-                <a16:creationId xmlns:a16="http://schemas.microsoft.com/office/drawing/2014/main" id="{97CDAE06-82F6-48F2-B736-DB0E830F9549}"/>
+                <a16:creationId xmlns:a16="http://schemas.microsoft.com/office/drawing/2014/main" id="{3D62F192-667D-E84B-6F4F-BD5A7696D24D}"/>
               </a:ext>
             </a:extLst>
           </p:cNvPr>
@@ -1189,7 +1189,7 @@
           <p:cNvPr id="6" name="Zástupný symbol pro číslo snímku 5">
             <a:extLst>
               <a:ext uri="{FF2B5EF4-FFF2-40B4-BE49-F238E27FC236}">
-                <a16:creationId xmlns:a16="http://schemas.microsoft.com/office/drawing/2014/main" id="{BC939AE7-DF11-494C-9106-37676095CEB1}"/>
+                <a16:creationId xmlns:a16="http://schemas.microsoft.com/office/drawing/2014/main" id="{837F12EA-0DF2-9624-E2D9-3AA01AD1068F}"/>
               </a:ext>
             </a:extLst>
           </p:cNvPr>
@@ -1205,7 +1205,7 @@
           <a:bodyPr/>
           <a:lstStyle/>
           <a:p>
-            <a:fld id="{01198A35-75D0-4BEE-81D5-726ECD40A0B9}" type="slidenum">
+            <a:fld id="{303CEFD9-8525-4A63-B77B-9152A9490C89}" type="slidenum">
               <a:rPr lang="cs-CZ" smtClean="0"/>
               <a:t>‹#›</a:t>
             </a:fld>
@@ -1216,7 +1216,7 @@
     </p:spTree>
     <p:extLst>
       <p:ext uri="{BB962C8B-B14F-4D97-AF65-F5344CB8AC3E}">
-        <p14:creationId xmlns:p14="http://schemas.microsoft.com/office/powerpoint/2010/main" val="2092025998"/>
+        <p14:creationId xmlns:p14="http://schemas.microsoft.com/office/powerpoint/2010/main" val="2098170500"/>
       </p:ext>
     </p:extLst>
   </p:cSld>
@@ -1248,7 +1248,7 @@
           <p:cNvPr id="2" name="Nadpis 1">
             <a:extLst>
               <a:ext uri="{FF2B5EF4-FFF2-40B4-BE49-F238E27FC236}">
-                <a16:creationId xmlns:a16="http://schemas.microsoft.com/office/drawing/2014/main" id="{C116352C-0EF6-4EFE-B3E5-667330518461}"/>
+                <a16:creationId xmlns:a16="http://schemas.microsoft.com/office/drawing/2014/main" id="{DDAB2719-02A8-C9D9-803E-CAD9D5C3E546}"/>
               </a:ext>
             </a:extLst>
           </p:cNvPr>
@@ -1276,7 +1276,7 @@
           <p:cNvPr id="3" name="Zástupný obsah 2">
             <a:extLst>
               <a:ext uri="{FF2B5EF4-FFF2-40B4-BE49-F238E27FC236}">
-                <a16:creationId xmlns:a16="http://schemas.microsoft.com/office/drawing/2014/main" id="{EDD552ED-2218-4970-9A5E-AB67CC066D1F}"/>
+                <a16:creationId xmlns:a16="http://schemas.microsoft.com/office/drawing/2014/main" id="{9DC66DC0-1FE7-5950-0FDD-752EFE8DE2F2}"/>
               </a:ext>
             </a:extLst>
           </p:cNvPr>
@@ -1338,7 +1338,7 @@
           <p:cNvPr id="4" name="Zástupný obsah 3">
             <a:extLst>
               <a:ext uri="{FF2B5EF4-FFF2-40B4-BE49-F238E27FC236}">
-                <a16:creationId xmlns:a16="http://schemas.microsoft.com/office/drawing/2014/main" id="{0B6F775C-D81B-4ECC-BF06-BA57ABEA3E5E}"/>
+                <a16:creationId xmlns:a16="http://schemas.microsoft.com/office/drawing/2014/main" id="{247AA11B-AC40-9B7A-A21F-6E70858E0ACA}"/>
               </a:ext>
             </a:extLst>
           </p:cNvPr>
@@ -1400,7 +1400,7 @@
           <p:cNvPr id="5" name="Zástupný symbol pro datum 4">
             <a:extLst>
               <a:ext uri="{FF2B5EF4-FFF2-40B4-BE49-F238E27FC236}">
-                <a16:creationId xmlns:a16="http://schemas.microsoft.com/office/drawing/2014/main" id="{F7E0F9E8-6D88-4D01-9E17-E219C86DC9E2}"/>
+                <a16:creationId xmlns:a16="http://schemas.microsoft.com/office/drawing/2014/main" id="{0EF7190D-E909-E446-6CC7-23CEEFF0EBF5}"/>
               </a:ext>
             </a:extLst>
           </p:cNvPr>
@@ -1416,9 +1416,9 @@
           <a:bodyPr/>
           <a:lstStyle/>
           <a:p>
-            <a:fld id="{79A4DB11-F443-4527-A45B-9126C23EB236}" type="datetimeFigureOut">
+            <a:fld id="{9BF8D64F-D2B9-40D4-8E45-BFC79C8D0172}" type="datetimeFigureOut">
               <a:rPr lang="cs-CZ" smtClean="0"/>
-              <a:t>24.02.2022</a:t>
+              <a:t>05.03.2026</a:t>
             </a:fld>
             <a:endParaRPr lang="cs-CZ"/>
           </a:p>
@@ -1429,7 +1429,7 @@
           <p:cNvPr id="6" name="Zástupný symbol pro zápatí 5">
             <a:extLst>
               <a:ext uri="{FF2B5EF4-FFF2-40B4-BE49-F238E27FC236}">
-                <a16:creationId xmlns:a16="http://schemas.microsoft.com/office/drawing/2014/main" id="{3B088E11-B755-4EAF-A453-EC190AB9CC08}"/>
+                <a16:creationId xmlns:a16="http://schemas.microsoft.com/office/drawing/2014/main" id="{4607331A-CFDA-53C2-0B2A-82500E508D0B}"/>
               </a:ext>
             </a:extLst>
           </p:cNvPr>
@@ -1454,7 +1454,7 @@
           <p:cNvPr id="7" name="Zástupný symbol pro číslo snímku 6">
             <a:extLst>
               <a:ext uri="{FF2B5EF4-FFF2-40B4-BE49-F238E27FC236}">
-                <a16:creationId xmlns:a16="http://schemas.microsoft.com/office/drawing/2014/main" id="{B7B824AE-6A73-4537-9766-2D8A3E60F809}"/>
+                <a16:creationId xmlns:a16="http://schemas.microsoft.com/office/drawing/2014/main" id="{034F7DF3-F6EA-7DFE-520C-6BB1E4D149B9}"/>
               </a:ext>
             </a:extLst>
           </p:cNvPr>
@@ -1470,7 +1470,7 @@
           <a:bodyPr/>
           <a:lstStyle/>
           <a:p>
-            <a:fld id="{01198A35-75D0-4BEE-81D5-726ECD40A0B9}" type="slidenum">
+            <a:fld id="{303CEFD9-8525-4A63-B77B-9152A9490C89}" type="slidenum">
               <a:rPr lang="cs-CZ" smtClean="0"/>
               <a:t>‹#›</a:t>
             </a:fld>
@@ -1481,7 +1481,7 @@
     </p:spTree>
     <p:extLst>
       <p:ext uri="{BB962C8B-B14F-4D97-AF65-F5344CB8AC3E}">
-        <p14:creationId xmlns:p14="http://schemas.microsoft.com/office/powerpoint/2010/main" val="143135195"/>
+        <p14:creationId xmlns:p14="http://schemas.microsoft.com/office/powerpoint/2010/main" val="1601609478"/>
       </p:ext>
     </p:extLst>
   </p:cSld>
@@ -1513,7 +1513,7 @@
           <p:cNvPr id="2" name="Nadpis 1">
             <a:extLst>
               <a:ext uri="{FF2B5EF4-FFF2-40B4-BE49-F238E27FC236}">
-                <a16:creationId xmlns:a16="http://schemas.microsoft.com/office/drawing/2014/main" id="{0E21F10D-8C93-4074-9832-8A7B56DED8BA}"/>
+                <a16:creationId xmlns:a16="http://schemas.microsoft.com/office/drawing/2014/main" id="{4FD8E2DB-8650-DA63-CC7F-F51F490FE3C9}"/>
               </a:ext>
             </a:extLst>
           </p:cNvPr>
@@ -1546,7 +1546,7 @@
           <p:cNvPr id="3" name="Zástupný text 2">
             <a:extLst>
               <a:ext uri="{FF2B5EF4-FFF2-40B4-BE49-F238E27FC236}">
-                <a16:creationId xmlns:a16="http://schemas.microsoft.com/office/drawing/2014/main" id="{1ECF6326-809B-4866-9085-94268C0B662B}"/>
+                <a16:creationId xmlns:a16="http://schemas.microsoft.com/office/drawing/2014/main" id="{7AB45F16-13FE-E7E6-9AF2-871AF9643ABE}"/>
               </a:ext>
             </a:extLst>
           </p:cNvPr>
@@ -1617,7 +1617,7 @@
           <p:cNvPr id="4" name="Zástupný obsah 3">
             <a:extLst>
               <a:ext uri="{FF2B5EF4-FFF2-40B4-BE49-F238E27FC236}">
-                <a16:creationId xmlns:a16="http://schemas.microsoft.com/office/drawing/2014/main" id="{B5C6B026-DDB0-41A8-B65A-45044145E1D1}"/>
+                <a16:creationId xmlns:a16="http://schemas.microsoft.com/office/drawing/2014/main" id="{4C015693-4228-769D-D5E3-17F14702D1A1}"/>
               </a:ext>
             </a:extLst>
           </p:cNvPr>
@@ -1679,7 +1679,7 @@
           <p:cNvPr id="5" name="Zástupný text 4">
             <a:extLst>
               <a:ext uri="{FF2B5EF4-FFF2-40B4-BE49-F238E27FC236}">
-                <a16:creationId xmlns:a16="http://schemas.microsoft.com/office/drawing/2014/main" id="{4DFA853A-35E6-44CC-B9CD-9B2F71AFF6BD}"/>
+                <a16:creationId xmlns:a16="http://schemas.microsoft.com/office/drawing/2014/main" id="{FFE6119A-58BD-3024-39E6-496C43DBD462}"/>
               </a:ext>
             </a:extLst>
           </p:cNvPr>
@@ -1750,7 +1750,7 @@
           <p:cNvPr id="6" name="Zástupný obsah 5">
             <a:extLst>
               <a:ext uri="{FF2B5EF4-FFF2-40B4-BE49-F238E27FC236}">
-                <a16:creationId xmlns:a16="http://schemas.microsoft.com/office/drawing/2014/main" id="{F7CDED19-AACD-4FBA-8734-04DE7244BA51}"/>
+                <a16:creationId xmlns:a16="http://schemas.microsoft.com/office/drawing/2014/main" id="{008A83F2-8537-819B-96C0-659265177430}"/>
               </a:ext>
             </a:extLst>
           </p:cNvPr>
@@ -1812,7 +1812,7 @@
           <p:cNvPr id="7" name="Zástupný symbol pro datum 6">
             <a:extLst>
               <a:ext uri="{FF2B5EF4-FFF2-40B4-BE49-F238E27FC236}">
-                <a16:creationId xmlns:a16="http://schemas.microsoft.com/office/drawing/2014/main" id="{86BE5C35-F51B-4057-B339-26E9BF3670E4}"/>
+                <a16:creationId xmlns:a16="http://schemas.microsoft.com/office/drawing/2014/main" id="{7C0FA0AE-9393-1817-F42D-9B7DE503005B}"/>
               </a:ext>
             </a:extLst>
           </p:cNvPr>
@@ -1828,9 +1828,9 @@
           <a:bodyPr/>
           <a:lstStyle/>
           <a:p>
-            <a:fld id="{79A4DB11-F443-4527-A45B-9126C23EB236}" type="datetimeFigureOut">
+            <a:fld id="{9BF8D64F-D2B9-40D4-8E45-BFC79C8D0172}" type="datetimeFigureOut">
               <a:rPr lang="cs-CZ" smtClean="0"/>
-              <a:t>24.02.2022</a:t>
+              <a:t>05.03.2026</a:t>
             </a:fld>
             <a:endParaRPr lang="cs-CZ"/>
           </a:p>
@@ -1841,7 +1841,7 @@
           <p:cNvPr id="8" name="Zástupný symbol pro zápatí 7">
             <a:extLst>
               <a:ext uri="{FF2B5EF4-FFF2-40B4-BE49-F238E27FC236}">
-                <a16:creationId xmlns:a16="http://schemas.microsoft.com/office/drawing/2014/main" id="{0C923A6B-2466-49D7-8889-1F6F3EB3FBD4}"/>
+                <a16:creationId xmlns:a16="http://schemas.microsoft.com/office/drawing/2014/main" id="{4183A039-1623-F52D-4EF5-4C94CE62C3EE}"/>
               </a:ext>
             </a:extLst>
           </p:cNvPr>
@@ -1866,7 +1866,7 @@
           <p:cNvPr id="9" name="Zástupný symbol pro číslo snímku 8">
             <a:extLst>
               <a:ext uri="{FF2B5EF4-FFF2-40B4-BE49-F238E27FC236}">
-                <a16:creationId xmlns:a16="http://schemas.microsoft.com/office/drawing/2014/main" id="{6EAE6E72-73AF-4018-89C6-FC436BB404C4}"/>
+                <a16:creationId xmlns:a16="http://schemas.microsoft.com/office/drawing/2014/main" id="{2975CC93-A048-4578-96EA-2B5BDF19E054}"/>
               </a:ext>
             </a:extLst>
           </p:cNvPr>
@@ -1882,7 +1882,7 @@
           <a:bodyPr/>
           <a:lstStyle/>
           <a:p>
-            <a:fld id="{01198A35-75D0-4BEE-81D5-726ECD40A0B9}" type="slidenum">
+            <a:fld id="{303CEFD9-8525-4A63-B77B-9152A9490C89}" type="slidenum">
               <a:rPr lang="cs-CZ" smtClean="0"/>
               <a:t>‹#›</a:t>
             </a:fld>
@@ -1893,7 +1893,7 @@
     </p:spTree>
     <p:extLst>
       <p:ext uri="{BB962C8B-B14F-4D97-AF65-F5344CB8AC3E}">
-        <p14:creationId xmlns:p14="http://schemas.microsoft.com/office/powerpoint/2010/main" val="1536492750"/>
+        <p14:creationId xmlns:p14="http://schemas.microsoft.com/office/powerpoint/2010/main" val="3924755923"/>
       </p:ext>
     </p:extLst>
   </p:cSld>
@@ -1925,7 +1925,7 @@
           <p:cNvPr id="2" name="Nadpis 1">
             <a:extLst>
               <a:ext uri="{FF2B5EF4-FFF2-40B4-BE49-F238E27FC236}">
-                <a16:creationId xmlns:a16="http://schemas.microsoft.com/office/drawing/2014/main" id="{80DF3862-5F96-4D56-B923-092970E01EDE}"/>
+                <a16:creationId xmlns:a16="http://schemas.microsoft.com/office/drawing/2014/main" id="{7A9ED308-82CF-A9C0-4418-59B6AB596F5E}"/>
               </a:ext>
             </a:extLst>
           </p:cNvPr>
@@ -1953,7 +1953,7 @@
           <p:cNvPr id="3" name="Zástupný symbol pro datum 2">
             <a:extLst>
               <a:ext uri="{FF2B5EF4-FFF2-40B4-BE49-F238E27FC236}">
-                <a16:creationId xmlns:a16="http://schemas.microsoft.com/office/drawing/2014/main" id="{6EFB2F7E-7397-43A9-BE22-ED441915CE6A}"/>
+                <a16:creationId xmlns:a16="http://schemas.microsoft.com/office/drawing/2014/main" id="{CDE6559F-5B0B-9909-5ECB-8F23B9273D5C}"/>
               </a:ext>
             </a:extLst>
           </p:cNvPr>
@@ -1969,9 +1969,9 @@
           <a:bodyPr/>
           <a:lstStyle/>
           <a:p>
-            <a:fld id="{79A4DB11-F443-4527-A45B-9126C23EB236}" type="datetimeFigureOut">
+            <a:fld id="{9BF8D64F-D2B9-40D4-8E45-BFC79C8D0172}" type="datetimeFigureOut">
               <a:rPr lang="cs-CZ" smtClean="0"/>
-              <a:t>24.02.2022</a:t>
+              <a:t>05.03.2026</a:t>
             </a:fld>
             <a:endParaRPr lang="cs-CZ"/>
           </a:p>
@@ -1982,7 +1982,7 @@
           <p:cNvPr id="4" name="Zástupný symbol pro zápatí 3">
             <a:extLst>
               <a:ext uri="{FF2B5EF4-FFF2-40B4-BE49-F238E27FC236}">
-                <a16:creationId xmlns:a16="http://schemas.microsoft.com/office/drawing/2014/main" id="{7060221E-BAFB-40C8-9632-719E7F3B90E4}"/>
+                <a16:creationId xmlns:a16="http://schemas.microsoft.com/office/drawing/2014/main" id="{22C5084F-9608-317C-B871-3AF7FBB76C7C}"/>
               </a:ext>
             </a:extLst>
           </p:cNvPr>
@@ -2007,7 +2007,7 @@
           <p:cNvPr id="5" name="Zástupný symbol pro číslo snímku 4">
             <a:extLst>
               <a:ext uri="{FF2B5EF4-FFF2-40B4-BE49-F238E27FC236}">
-                <a16:creationId xmlns:a16="http://schemas.microsoft.com/office/drawing/2014/main" id="{ACEAE6BA-417A-4F8F-A0CB-68AE7760829E}"/>
+                <a16:creationId xmlns:a16="http://schemas.microsoft.com/office/drawing/2014/main" id="{CE90A14E-1B2A-364E-12AF-20AFAAAD62A3}"/>
               </a:ext>
             </a:extLst>
           </p:cNvPr>
@@ -2023,7 +2023,7 @@
           <a:bodyPr/>
           <a:lstStyle/>
           <a:p>
-            <a:fld id="{01198A35-75D0-4BEE-81D5-726ECD40A0B9}" type="slidenum">
+            <a:fld id="{303CEFD9-8525-4A63-B77B-9152A9490C89}" type="slidenum">
               <a:rPr lang="cs-CZ" smtClean="0"/>
               <a:t>‹#›</a:t>
             </a:fld>
@@ -2034,7 +2034,7 @@
     </p:spTree>
     <p:extLst>
       <p:ext uri="{BB962C8B-B14F-4D97-AF65-F5344CB8AC3E}">
-        <p14:creationId xmlns:p14="http://schemas.microsoft.com/office/powerpoint/2010/main" val="3061391491"/>
+        <p14:creationId xmlns:p14="http://schemas.microsoft.com/office/powerpoint/2010/main" val="3273184763"/>
       </p:ext>
     </p:extLst>
   </p:cSld>
@@ -2066,7 +2066,7 @@
           <p:cNvPr id="2" name="Zástupný symbol pro datum 1">
             <a:extLst>
               <a:ext uri="{FF2B5EF4-FFF2-40B4-BE49-F238E27FC236}">
-                <a16:creationId xmlns:a16="http://schemas.microsoft.com/office/drawing/2014/main" id="{2B3DFCEA-07CF-487E-A089-48DAE3E60018}"/>
+                <a16:creationId xmlns:a16="http://schemas.microsoft.com/office/drawing/2014/main" id="{038606C5-CFF2-C2F7-33D1-1A217464112D}"/>
               </a:ext>
             </a:extLst>
           </p:cNvPr>
@@ -2082,9 +2082,9 @@
           <a:bodyPr/>
           <a:lstStyle/>
           <a:p>
-            <a:fld id="{79A4DB11-F443-4527-A45B-9126C23EB236}" type="datetimeFigureOut">
+            <a:fld id="{9BF8D64F-D2B9-40D4-8E45-BFC79C8D0172}" type="datetimeFigureOut">
               <a:rPr lang="cs-CZ" smtClean="0"/>
-              <a:t>24.02.2022</a:t>
+              <a:t>05.03.2026</a:t>
             </a:fld>
             <a:endParaRPr lang="cs-CZ"/>
           </a:p>
@@ -2095,7 +2095,7 @@
           <p:cNvPr id="3" name="Zástupný symbol pro zápatí 2">
             <a:extLst>
               <a:ext uri="{FF2B5EF4-FFF2-40B4-BE49-F238E27FC236}">
-                <a16:creationId xmlns:a16="http://schemas.microsoft.com/office/drawing/2014/main" id="{2294250A-F146-4429-BB20-3527FF9B7DDF}"/>
+                <a16:creationId xmlns:a16="http://schemas.microsoft.com/office/drawing/2014/main" id="{8B678133-17FA-06D7-47E6-EF3D52F51079}"/>
               </a:ext>
             </a:extLst>
           </p:cNvPr>
@@ -2120,7 +2120,7 @@
           <p:cNvPr id="4" name="Zástupný symbol pro číslo snímku 3">
             <a:extLst>
               <a:ext uri="{FF2B5EF4-FFF2-40B4-BE49-F238E27FC236}">
-                <a16:creationId xmlns:a16="http://schemas.microsoft.com/office/drawing/2014/main" id="{BD12C1A1-96E4-4976-BA1A-0361C5608EF0}"/>
+                <a16:creationId xmlns:a16="http://schemas.microsoft.com/office/drawing/2014/main" id="{D2C4B217-78B7-3C10-ABAE-6E466A98457C}"/>
               </a:ext>
             </a:extLst>
           </p:cNvPr>
@@ -2136,7 +2136,7 @@
           <a:bodyPr/>
           <a:lstStyle/>
           <a:p>
-            <a:fld id="{01198A35-75D0-4BEE-81D5-726ECD40A0B9}" type="slidenum">
+            <a:fld id="{303CEFD9-8525-4A63-B77B-9152A9490C89}" type="slidenum">
               <a:rPr lang="cs-CZ" smtClean="0"/>
               <a:t>‹#›</a:t>
             </a:fld>
@@ -2147,7 +2147,7 @@
     </p:spTree>
     <p:extLst>
       <p:ext uri="{BB962C8B-B14F-4D97-AF65-F5344CB8AC3E}">
-        <p14:creationId xmlns:p14="http://schemas.microsoft.com/office/powerpoint/2010/main" val="2737828347"/>
+        <p14:creationId xmlns:p14="http://schemas.microsoft.com/office/powerpoint/2010/main" val="1948163552"/>
       </p:ext>
     </p:extLst>
   </p:cSld>
@@ -2179,7 +2179,7 @@
           <p:cNvPr id="2" name="Nadpis 1">
             <a:extLst>
               <a:ext uri="{FF2B5EF4-FFF2-40B4-BE49-F238E27FC236}">
-                <a16:creationId xmlns:a16="http://schemas.microsoft.com/office/drawing/2014/main" id="{F2604474-AAE0-4773-BEA3-641FE80B4B95}"/>
+                <a16:creationId xmlns:a16="http://schemas.microsoft.com/office/drawing/2014/main" id="{7E166FC9-1C2B-D937-D6B7-FCEDA616A00B}"/>
               </a:ext>
             </a:extLst>
           </p:cNvPr>
@@ -2216,7 +2216,7 @@
           <p:cNvPr id="3" name="Zástupný obsah 2">
             <a:extLst>
               <a:ext uri="{FF2B5EF4-FFF2-40B4-BE49-F238E27FC236}">
-                <a16:creationId xmlns:a16="http://schemas.microsoft.com/office/drawing/2014/main" id="{95C39BF9-7D67-41B3-B359-D60B82196BB3}"/>
+                <a16:creationId xmlns:a16="http://schemas.microsoft.com/office/drawing/2014/main" id="{DFEC7ED3-E417-5434-88AB-EFA0EC774E0E}"/>
               </a:ext>
             </a:extLst>
           </p:cNvPr>
@@ -2306,7 +2306,7 @@
           <p:cNvPr id="4" name="Zástupný text 3">
             <a:extLst>
               <a:ext uri="{FF2B5EF4-FFF2-40B4-BE49-F238E27FC236}">
-                <a16:creationId xmlns:a16="http://schemas.microsoft.com/office/drawing/2014/main" id="{5004F960-2B48-4945-881E-C3C2C88F33B1}"/>
+                <a16:creationId xmlns:a16="http://schemas.microsoft.com/office/drawing/2014/main" id="{17DCEC25-3464-BE4C-9D48-CB11900051CB}"/>
               </a:ext>
             </a:extLst>
           </p:cNvPr>
@@ -2377,7 +2377,7 @@
           <p:cNvPr id="5" name="Zástupný symbol pro datum 4">
             <a:extLst>
               <a:ext uri="{FF2B5EF4-FFF2-40B4-BE49-F238E27FC236}">
-                <a16:creationId xmlns:a16="http://schemas.microsoft.com/office/drawing/2014/main" id="{A483E0D4-80BB-4F95-BF94-AA905B5D4302}"/>
+                <a16:creationId xmlns:a16="http://schemas.microsoft.com/office/drawing/2014/main" id="{8064B3D6-E185-2594-9306-56E6188DD5DB}"/>
               </a:ext>
             </a:extLst>
           </p:cNvPr>
@@ -2393,9 +2393,9 @@
           <a:bodyPr/>
           <a:lstStyle/>
           <a:p>
-            <a:fld id="{79A4DB11-F443-4527-A45B-9126C23EB236}" type="datetimeFigureOut">
+            <a:fld id="{9BF8D64F-D2B9-40D4-8E45-BFC79C8D0172}" type="datetimeFigureOut">
               <a:rPr lang="cs-CZ" smtClean="0"/>
-              <a:t>24.02.2022</a:t>
+              <a:t>05.03.2026</a:t>
             </a:fld>
             <a:endParaRPr lang="cs-CZ"/>
           </a:p>
@@ -2406,7 +2406,7 @@
           <p:cNvPr id="6" name="Zástupný symbol pro zápatí 5">
             <a:extLst>
               <a:ext uri="{FF2B5EF4-FFF2-40B4-BE49-F238E27FC236}">
-                <a16:creationId xmlns:a16="http://schemas.microsoft.com/office/drawing/2014/main" id="{7094AECB-4525-4DDC-898C-650FDA31E7FC}"/>
+                <a16:creationId xmlns:a16="http://schemas.microsoft.com/office/drawing/2014/main" id="{E7209D08-49F2-BEFD-8F4D-90D70D8CDC2B}"/>
               </a:ext>
             </a:extLst>
           </p:cNvPr>
@@ -2431,7 +2431,7 @@
           <p:cNvPr id="7" name="Zástupný symbol pro číslo snímku 6">
             <a:extLst>
               <a:ext uri="{FF2B5EF4-FFF2-40B4-BE49-F238E27FC236}">
-                <a16:creationId xmlns:a16="http://schemas.microsoft.com/office/drawing/2014/main" id="{1C720291-4712-43C2-A2AB-1F83416E1D2E}"/>
+                <a16:creationId xmlns:a16="http://schemas.microsoft.com/office/drawing/2014/main" id="{D1C9C512-542A-F6A8-7437-058BA11DE878}"/>
               </a:ext>
             </a:extLst>
           </p:cNvPr>
@@ -2447,7 +2447,7 @@
           <a:bodyPr/>
           <a:lstStyle/>
           <a:p>
-            <a:fld id="{01198A35-75D0-4BEE-81D5-726ECD40A0B9}" type="slidenum">
+            <a:fld id="{303CEFD9-8525-4A63-B77B-9152A9490C89}" type="slidenum">
               <a:rPr lang="cs-CZ" smtClean="0"/>
               <a:t>‹#›</a:t>
             </a:fld>
@@ -2458,7 +2458,7 @@
     </p:spTree>
     <p:extLst>
       <p:ext uri="{BB962C8B-B14F-4D97-AF65-F5344CB8AC3E}">
-        <p14:creationId xmlns:p14="http://schemas.microsoft.com/office/powerpoint/2010/main" val="2229888624"/>
+        <p14:creationId xmlns:p14="http://schemas.microsoft.com/office/powerpoint/2010/main" val="429023071"/>
       </p:ext>
     </p:extLst>
   </p:cSld>
@@ -2490,7 +2490,7 @@
           <p:cNvPr id="2" name="Nadpis 1">
             <a:extLst>
               <a:ext uri="{FF2B5EF4-FFF2-40B4-BE49-F238E27FC236}">
-                <a16:creationId xmlns:a16="http://schemas.microsoft.com/office/drawing/2014/main" id="{A69AB3AA-FFC1-4F53-A1FD-44ADEEA7A084}"/>
+                <a16:creationId xmlns:a16="http://schemas.microsoft.com/office/drawing/2014/main" id="{44829EBA-1865-86B3-2521-94618440FACA}"/>
               </a:ext>
             </a:extLst>
           </p:cNvPr>
@@ -2527,7 +2527,7 @@
           <p:cNvPr id="3" name="Zástupný symbol obrázku 2">
             <a:extLst>
               <a:ext uri="{FF2B5EF4-FFF2-40B4-BE49-F238E27FC236}">
-                <a16:creationId xmlns:a16="http://schemas.microsoft.com/office/drawing/2014/main" id="{EA8FCF4B-1E6B-4D9D-A272-138A12FB1293}"/>
+                <a16:creationId xmlns:a16="http://schemas.microsoft.com/office/drawing/2014/main" id="{0EE2B8C3-6ED0-D577-F636-B48753579324}"/>
               </a:ext>
             </a:extLst>
           </p:cNvPr>
@@ -2594,7 +2594,7 @@
           <p:cNvPr id="4" name="Zástupný text 3">
             <a:extLst>
               <a:ext uri="{FF2B5EF4-FFF2-40B4-BE49-F238E27FC236}">
-                <a16:creationId xmlns:a16="http://schemas.microsoft.com/office/drawing/2014/main" id="{F5CBA896-473E-4DF6-B2A4-8A2CD2F62C79}"/>
+                <a16:creationId xmlns:a16="http://schemas.microsoft.com/office/drawing/2014/main" id="{980A49B3-3B16-36FF-60AA-810F63F85F0D}"/>
               </a:ext>
             </a:extLst>
           </p:cNvPr>
@@ -2665,7 +2665,7 @@
           <p:cNvPr id="5" name="Zástupný symbol pro datum 4">
             <a:extLst>
               <a:ext uri="{FF2B5EF4-FFF2-40B4-BE49-F238E27FC236}">
-                <a16:creationId xmlns:a16="http://schemas.microsoft.com/office/drawing/2014/main" id="{BA35DBF4-24CA-4900-8882-AC6CD5B80724}"/>
+                <a16:creationId xmlns:a16="http://schemas.microsoft.com/office/drawing/2014/main" id="{AA850FDE-6E00-237D-2F81-DC6C307C0D57}"/>
               </a:ext>
             </a:extLst>
           </p:cNvPr>
@@ -2681,9 +2681,9 @@
           <a:bodyPr/>
           <a:lstStyle/>
           <a:p>
-            <a:fld id="{79A4DB11-F443-4527-A45B-9126C23EB236}" type="datetimeFigureOut">
+            <a:fld id="{9BF8D64F-D2B9-40D4-8E45-BFC79C8D0172}" type="datetimeFigureOut">
               <a:rPr lang="cs-CZ" smtClean="0"/>
-              <a:t>24.02.2022</a:t>
+              <a:t>05.03.2026</a:t>
             </a:fld>
             <a:endParaRPr lang="cs-CZ"/>
           </a:p>
@@ -2694,7 +2694,7 @@
           <p:cNvPr id="6" name="Zástupný symbol pro zápatí 5">
             <a:extLst>
               <a:ext uri="{FF2B5EF4-FFF2-40B4-BE49-F238E27FC236}">
-                <a16:creationId xmlns:a16="http://schemas.microsoft.com/office/drawing/2014/main" id="{9CF89255-D6FF-4587-8D70-3CE6350F257F}"/>
+                <a16:creationId xmlns:a16="http://schemas.microsoft.com/office/drawing/2014/main" id="{1C58903C-9352-C386-A6CF-5951DA78AAE8}"/>
               </a:ext>
             </a:extLst>
           </p:cNvPr>
@@ -2719,7 +2719,7 @@
           <p:cNvPr id="7" name="Zástupný symbol pro číslo snímku 6">
             <a:extLst>
               <a:ext uri="{FF2B5EF4-FFF2-40B4-BE49-F238E27FC236}">
-                <a16:creationId xmlns:a16="http://schemas.microsoft.com/office/drawing/2014/main" id="{182AE19A-211C-4E33-9B32-519DE46A4539}"/>
+                <a16:creationId xmlns:a16="http://schemas.microsoft.com/office/drawing/2014/main" id="{4FCC0BE1-44AC-F05A-A5A9-4BED8A2BA75E}"/>
               </a:ext>
             </a:extLst>
           </p:cNvPr>
@@ -2735,7 +2735,7 @@
           <a:bodyPr/>
           <a:lstStyle/>
           <a:p>
-            <a:fld id="{01198A35-75D0-4BEE-81D5-726ECD40A0B9}" type="slidenum">
+            <a:fld id="{303CEFD9-8525-4A63-B77B-9152A9490C89}" type="slidenum">
               <a:rPr lang="cs-CZ" smtClean="0"/>
               <a:t>‹#›</a:t>
             </a:fld>
@@ -2746,7 +2746,7 @@
     </p:spTree>
     <p:extLst>
       <p:ext uri="{BB962C8B-B14F-4D97-AF65-F5344CB8AC3E}">
-        <p14:creationId xmlns:p14="http://schemas.microsoft.com/office/powerpoint/2010/main" val="2463102603"/>
+        <p14:creationId xmlns:p14="http://schemas.microsoft.com/office/powerpoint/2010/main" val="3058157262"/>
       </p:ext>
     </p:extLst>
   </p:cSld>
@@ -2783,7 +2783,7 @@
           <p:cNvPr id="2" name="Zástupný nadpis 1">
             <a:extLst>
               <a:ext uri="{FF2B5EF4-FFF2-40B4-BE49-F238E27FC236}">
-                <a16:creationId xmlns:a16="http://schemas.microsoft.com/office/drawing/2014/main" id="{4080E10A-E917-4272-9CAC-799D2D5983DB}"/>
+                <a16:creationId xmlns:a16="http://schemas.microsoft.com/office/drawing/2014/main" id="{1D69B376-16C7-B302-AAB3-AD3117A624E3}"/>
               </a:ext>
             </a:extLst>
           </p:cNvPr>
@@ -2821,7 +2821,7 @@
           <p:cNvPr id="3" name="Zástupný text 2">
             <a:extLst>
               <a:ext uri="{FF2B5EF4-FFF2-40B4-BE49-F238E27FC236}">
-                <a16:creationId xmlns:a16="http://schemas.microsoft.com/office/drawing/2014/main" id="{33F26679-DCF2-47D3-888E-BB398463C100}"/>
+                <a16:creationId xmlns:a16="http://schemas.microsoft.com/office/drawing/2014/main" id="{21241BEE-5430-6650-5DAE-81120AFAE082}"/>
               </a:ext>
             </a:extLst>
           </p:cNvPr>
@@ -2888,7 +2888,7 @@
           <p:cNvPr id="4" name="Zástupný symbol pro datum 3">
             <a:extLst>
               <a:ext uri="{FF2B5EF4-FFF2-40B4-BE49-F238E27FC236}">
-                <a16:creationId xmlns:a16="http://schemas.microsoft.com/office/drawing/2014/main" id="{3E2C1230-71EE-47ED-A8D5-59DE52C7DA44}"/>
+                <a16:creationId xmlns:a16="http://schemas.microsoft.com/office/drawing/2014/main" id="{4E56FDBD-7AB6-11E5-CF7E-C23188393AA6}"/>
               </a:ext>
             </a:extLst>
           </p:cNvPr>
@@ -2915,16 +2915,16 @@
               <a:defRPr sz="1200">
                 <a:solidFill>
                   <a:schemeClr val="tx1">
-                    <a:tint val="75000"/>
+                    <a:tint val="82000"/>
                   </a:schemeClr>
                 </a:solidFill>
               </a:defRPr>
             </a:lvl1pPr>
           </a:lstStyle>
           <a:p>
-            <a:fld id="{79A4DB11-F443-4527-A45B-9126C23EB236}" type="datetimeFigureOut">
+            <a:fld id="{9BF8D64F-D2B9-40D4-8E45-BFC79C8D0172}" type="datetimeFigureOut">
               <a:rPr lang="cs-CZ" smtClean="0"/>
-              <a:t>24.02.2022</a:t>
+              <a:t>05.03.2026</a:t>
             </a:fld>
             <a:endParaRPr lang="cs-CZ"/>
           </a:p>
@@ -2935,7 +2935,7 @@
           <p:cNvPr id="5" name="Zástupný symbol pro zápatí 4">
             <a:extLst>
               <a:ext uri="{FF2B5EF4-FFF2-40B4-BE49-F238E27FC236}">
-                <a16:creationId xmlns:a16="http://schemas.microsoft.com/office/drawing/2014/main" id="{87244DA8-CB24-4B53-B129-C5C5CBB16AF8}"/>
+                <a16:creationId xmlns:a16="http://schemas.microsoft.com/office/drawing/2014/main" id="{D0E09B78-C14A-EF5C-7253-F3BA48CADCB6}"/>
               </a:ext>
             </a:extLst>
           </p:cNvPr>
@@ -2962,7 +2962,7 @@
               <a:defRPr sz="1200">
                 <a:solidFill>
                   <a:schemeClr val="tx1">
-                    <a:tint val="75000"/>
+                    <a:tint val="82000"/>
                   </a:schemeClr>
                 </a:solidFill>
               </a:defRPr>
@@ -2978,7 +2978,7 @@
           <p:cNvPr id="6" name="Zástupný symbol pro číslo snímku 5">
             <a:extLst>
               <a:ext uri="{FF2B5EF4-FFF2-40B4-BE49-F238E27FC236}">
-                <a16:creationId xmlns:a16="http://schemas.microsoft.com/office/drawing/2014/main" id="{367D92C2-7F80-4111-AD62-60A96046EFE6}"/>
+                <a16:creationId xmlns:a16="http://schemas.microsoft.com/office/drawing/2014/main" id="{D947A977-68C5-BD23-6993-ABEF8AA266E4}"/>
               </a:ext>
             </a:extLst>
           </p:cNvPr>
@@ -3005,14 +3005,14 @@
               <a:defRPr sz="1200">
                 <a:solidFill>
                   <a:schemeClr val="tx1">
-                    <a:tint val="75000"/>
+                    <a:tint val="82000"/>
                   </a:schemeClr>
                 </a:solidFill>
               </a:defRPr>
             </a:lvl1pPr>
           </a:lstStyle>
           <a:p>
-            <a:fld id="{01198A35-75D0-4BEE-81D5-726ECD40A0B9}" type="slidenum">
+            <a:fld id="{303CEFD9-8525-4A63-B77B-9152A9490C89}" type="slidenum">
               <a:rPr lang="cs-CZ" smtClean="0"/>
               <a:t>‹#›</a:t>
             </a:fld>
@@ -3023,7 +3023,7 @@
     </p:spTree>
     <p:extLst>
       <p:ext uri="{BB962C8B-B14F-4D97-AF65-F5344CB8AC3E}">
-        <p14:creationId xmlns:p14="http://schemas.microsoft.com/office/powerpoint/2010/main" val="3364336917"/>
+        <p14:creationId xmlns:p14="http://schemas.microsoft.com/office/powerpoint/2010/main" val="1713939752"/>
       </p:ext>
     </p:extLst>
   </p:cSld>
@@ -3346,7 +3346,7 @@
           <p:cNvPr id="2" name="Nadpis 1">
             <a:extLst>
               <a:ext uri="{FF2B5EF4-FFF2-40B4-BE49-F238E27FC236}">
-                <a16:creationId xmlns:a16="http://schemas.microsoft.com/office/drawing/2014/main" id="{B70A6C47-3275-41E9-BD0E-CFE16AF7BC7A}"/>
+                <a16:creationId xmlns:a16="http://schemas.microsoft.com/office/drawing/2014/main" id="{722B53A3-5980-3ECF-113E-FDA310F05394}"/>
               </a:ext>
             </a:extLst>
           </p:cNvPr>
@@ -3364,65 +3364,39 @@
           <a:p>
             <a:r>
               <a:rPr lang="cs-CZ" dirty="0"/>
-              <a:t>Jednoduchá kniha návštěv</a:t>
-            </a:r>
-          </a:p>
-        </p:txBody>
-      </p:sp>
-      <p:sp>
-        <p:nvSpPr>
-          <p:cNvPr id="4" name="TextovéPole 3">
-            <a:extLst>
-              <a:ext uri="{FF2B5EF4-FFF2-40B4-BE49-F238E27FC236}">
-                <a16:creationId xmlns:a16="http://schemas.microsoft.com/office/drawing/2014/main" id="{74497BDE-2679-4BEB-880B-BE806C438A14}"/>
-              </a:ext>
-            </a:extLst>
-          </p:cNvPr>
-          <p:cNvSpPr txBox="1"/>
-          <p:nvPr/>
-        </p:nvSpPr>
-        <p:spPr>
-          <a:xfrm>
-            <a:off x="6654019" y="5083012"/>
-            <a:ext cx="5134707" cy="1200329"/>
-          </a:xfrm>
-          <a:prstGeom prst="rect">
-            <a:avLst/>
-          </a:prstGeom>
-        </p:spPr>
-        <p:style>
-          <a:lnRef idx="2">
-            <a:schemeClr val="accent2">
-              <a:shade val="50000"/>
-            </a:schemeClr>
-          </a:lnRef>
-          <a:fillRef idx="1">
-            <a:schemeClr val="accent2"/>
-          </a:fillRef>
-          <a:effectRef idx="0">
-            <a:schemeClr val="accent2"/>
-          </a:effectRef>
-          <a:fontRef idx="minor">
-            <a:schemeClr val="lt1"/>
-          </a:fontRef>
-        </p:style>
-        <p:txBody>
-          <a:bodyPr wrap="square" rtlCol="0">
-            <a:spAutoFit/>
-          </a:bodyPr>
-          <a:lstStyle/>
-          <a:p>
-            <a:r>
-              <a:rPr lang="en-US" dirty="0"/>
-              <a:t>V r</a:t>
-            </a:r>
-            <a:r>
-              <a:rPr lang="cs-CZ" dirty="0" err="1"/>
-              <a:t>ámci</a:t>
+              <a:t>Jednoduchá „kniha návštěv“</a:t>
+            </a:r>
+          </a:p>
+        </p:txBody>
+      </p:sp>
+      <p:sp>
+        <p:nvSpPr>
+          <p:cNvPr id="3" name="Podnadpis 2">
+            <a:extLst>
+              <a:ext uri="{FF2B5EF4-FFF2-40B4-BE49-F238E27FC236}">
+                <a16:creationId xmlns:a16="http://schemas.microsoft.com/office/drawing/2014/main" id="{0A35DFD0-3D73-F57D-8123-FD58C084CBBF}"/>
+              </a:ext>
+            </a:extLst>
+          </p:cNvPr>
+          <p:cNvSpPr>
+            <a:spLocks noGrp="1"/>
+          </p:cNvSpPr>
+          <p:nvPr>
+            <p:ph type="subTitle" idx="1"/>
+          </p:nvPr>
+        </p:nvSpPr>
+        <p:spPr/>
+        <p:txBody>
+          <a:bodyPr/>
+          <a:lstStyle/>
+          <a:p>
+            <a:r>
+              <a:rPr lang="en-US" dirty="0" err="1"/>
+              <a:t>Komentovan</a:t>
             </a:r>
             <a:r>
               <a:rPr lang="cs-CZ" dirty="0"/>
-              <a:t> tohoto postupu si procvičíme získávání dat z formuláře, vybavíme formulář kontrolami vstupních dat a následně vytvoříme velmi jednoduchou knihu návštěv.</a:t>
+              <a:t>ý postup</a:t>
             </a:r>
           </a:p>
         </p:txBody>
@@ -3430,7 +3404,7 @@
     </p:spTree>
     <p:extLst>
       <p:ext uri="{BB962C8B-B14F-4D97-AF65-F5344CB8AC3E}">
-        <p14:creationId xmlns:p14="http://schemas.microsoft.com/office/powerpoint/2010/main" val="3685126582"/>
+        <p14:creationId xmlns:p14="http://schemas.microsoft.com/office/powerpoint/2010/main" val="134693585"/>
       </p:ext>
     </p:extLst>
   </p:cSld>
@@ -3462,7 +3436,7 @@
           <p:cNvPr id="2" name="Nadpis 1">
             <a:extLst>
               <a:ext uri="{FF2B5EF4-FFF2-40B4-BE49-F238E27FC236}">
-                <a16:creationId xmlns:a16="http://schemas.microsoft.com/office/drawing/2014/main" id="{7EF516F7-95FF-4D81-8641-36C2D1A1DB76}"/>
+                <a16:creationId xmlns:a16="http://schemas.microsoft.com/office/drawing/2014/main" id="{48722D1E-AD09-442B-75F2-C4D1DC9070D3}"/>
               </a:ext>
             </a:extLst>
           </p:cNvPr>
@@ -3487,7 +3461,7 @@
           <p:cNvPr id="3" name="Zástupný obsah 2">
             <a:extLst>
               <a:ext uri="{FF2B5EF4-FFF2-40B4-BE49-F238E27FC236}">
-                <a16:creationId xmlns:a16="http://schemas.microsoft.com/office/drawing/2014/main" id="{77F888EE-E593-4D7B-B6F3-80D9D0436CB8}"/>
+                <a16:creationId xmlns:a16="http://schemas.microsoft.com/office/drawing/2014/main" id="{0D00EBAB-F485-C5F8-5FE0-3904857EC0A1}"/>
               </a:ext>
             </a:extLst>
           </p:cNvPr>
@@ -3512,7 +3486,7 @@
           <p:cNvPr id="5" name="Obrázek 4">
             <a:extLst>
               <a:ext uri="{FF2B5EF4-FFF2-40B4-BE49-F238E27FC236}">
-                <a16:creationId xmlns:a16="http://schemas.microsoft.com/office/drawing/2014/main" id="{15F539C8-C9D9-4B30-B702-E56F35474E94}"/>
+                <a16:creationId xmlns:a16="http://schemas.microsoft.com/office/drawing/2014/main" id="{A532AC04-2635-BEA7-2FE0-69841F063C04}"/>
               </a:ext>
             </a:extLst>
           </p:cNvPr>
@@ -3539,10 +3513,10 @@
       </p:pic>
       <p:sp>
         <p:nvSpPr>
-          <p:cNvPr id="6" name="TextovéPole 5">
-            <a:extLst>
-              <a:ext uri="{FF2B5EF4-FFF2-40B4-BE49-F238E27FC236}">
-                <a16:creationId xmlns:a16="http://schemas.microsoft.com/office/drawing/2014/main" id="{F433731A-4516-4541-8FE0-A10627DCA215}"/>
+          <p:cNvPr id="4" name="TextovéPole 3">
+            <a:extLst>
+              <a:ext uri="{FF2B5EF4-FFF2-40B4-BE49-F238E27FC236}">
+                <a16:creationId xmlns:a16="http://schemas.microsoft.com/office/drawing/2014/main" id="{F9CC8058-97A8-9B6D-73B0-18177AF9C729}"/>
               </a:ext>
             </a:extLst>
           </p:cNvPr>
@@ -3551,23 +3525,21 @@
         </p:nvSpPr>
         <p:spPr>
           <a:xfrm>
-            <a:off x="6096000" y="3004289"/>
-            <a:ext cx="3076135" cy="1477328"/>
+            <a:off x="6755324" y="1477357"/>
+            <a:ext cx="4737315" cy="2862322"/>
           </a:xfrm>
           <a:prstGeom prst="rect">
             <a:avLst/>
           </a:prstGeom>
         </p:spPr>
         <p:style>
-          <a:lnRef idx="2">
-            <a:schemeClr val="accent2">
-              <a:shade val="50000"/>
-            </a:schemeClr>
+          <a:lnRef idx="3">
+            <a:schemeClr val="lt1"/>
           </a:lnRef>
           <a:fillRef idx="1">
             <a:schemeClr val="accent2"/>
           </a:fillRef>
-          <a:effectRef idx="0">
+          <a:effectRef idx="1">
             <a:schemeClr val="accent2"/>
           </a:effectRef>
           <a:fontRef idx="minor">
@@ -3582,17 +3554,34 @@
           <a:p>
             <a:r>
               <a:rPr lang="cs-CZ" dirty="0"/>
-              <a:t>Pokud bychom naopak nějaké chyby našli, musíme o nich dát vědět uživateli. Nejjednodušší variantou je vypsat formou seznamu nad formulářem.</a:t>
-            </a:r>
-          </a:p>
-        </p:txBody>
-      </p:sp>
-      <p:sp>
-        <p:nvSpPr>
-          <p:cNvPr id="7" name="Obdélník 6">
-            <a:extLst>
-              <a:ext uri="{FF2B5EF4-FFF2-40B4-BE49-F238E27FC236}">
-                <a16:creationId xmlns:a16="http://schemas.microsoft.com/office/drawing/2014/main" id="{59ADB756-DED3-445E-8954-03E4D54BF1D8}"/>
+              <a:t>Když jsme nenašli žádné chyby, sestavíme si HTML obsah, který uložíme do externího souboru. V tomto případě už je výstupem rovnou kousek HTML stránky, tj. nezapomeneme na ošetření speciálních znaků. </a:t>
+            </a:r>
+          </a:p>
+          <a:p>
+            <a:endParaRPr lang="cs-CZ" dirty="0"/>
+          </a:p>
+          <a:p>
+            <a:r>
+              <a:rPr lang="cs-CZ" dirty="0"/>
+              <a:t>Pro zápis do souboru pak budeme používat funkci </a:t>
+            </a:r>
+            <a:r>
+              <a:rPr lang="cs-CZ" dirty="0" err="1"/>
+              <a:t>file_put_contents</a:t>
+            </a:r>
+            <a:r>
+              <a:rPr lang="cs-CZ" dirty="0"/>
+              <a:t>, která v tomto zápisu připisuje obsah na konec daného souboru.</a:t>
+            </a:r>
+          </a:p>
+        </p:txBody>
+      </p:sp>
+      <p:sp>
+        <p:nvSpPr>
+          <p:cNvPr id="6" name="Obdélník 5">
+            <a:extLst>
+              <a:ext uri="{FF2B5EF4-FFF2-40B4-BE49-F238E27FC236}">
+                <a16:creationId xmlns:a16="http://schemas.microsoft.com/office/drawing/2014/main" id="{876849EE-8175-0288-A8B5-787E25A02AE3}"/>
               </a:ext>
             </a:extLst>
           </p:cNvPr>
@@ -3601,8 +3590,8 @@
         </p:nvSpPr>
         <p:spPr>
           <a:xfrm>
-            <a:off x="3562643" y="3084760"/>
-            <a:ext cx="2402059" cy="1318427"/>
+            <a:off x="1055177" y="4113800"/>
+            <a:ext cx="5283630" cy="923149"/>
           </a:xfrm>
           <a:prstGeom prst="rect">
             <a:avLst/>
@@ -3636,7 +3625,7 @@
     </p:spTree>
     <p:extLst>
       <p:ext uri="{BB962C8B-B14F-4D97-AF65-F5344CB8AC3E}">
-        <p14:creationId xmlns:p14="http://schemas.microsoft.com/office/powerpoint/2010/main" val="3867145965"/>
+        <p14:creationId xmlns:p14="http://schemas.microsoft.com/office/powerpoint/2010/main" val="4098158995"/>
       </p:ext>
     </p:extLst>
   </p:cSld>
@@ -3668,7 +3657,7 @@
           <p:cNvPr id="2" name="Nadpis 1">
             <a:extLst>
               <a:ext uri="{FF2B5EF4-FFF2-40B4-BE49-F238E27FC236}">
-                <a16:creationId xmlns:a16="http://schemas.microsoft.com/office/drawing/2014/main" id="{352B79CC-83FB-4FDA-9EF6-57B5673D9F8B}"/>
+                <a16:creationId xmlns:a16="http://schemas.microsoft.com/office/drawing/2014/main" id="{4C7E8581-5506-C3E1-8BD5-15DCE150ECD3}"/>
               </a:ext>
             </a:extLst>
           </p:cNvPr>
@@ -3693,7 +3682,7 @@
           <p:cNvPr id="3" name="Zástupný obsah 2">
             <a:extLst>
               <a:ext uri="{FF2B5EF4-FFF2-40B4-BE49-F238E27FC236}">
-                <a16:creationId xmlns:a16="http://schemas.microsoft.com/office/drawing/2014/main" id="{B257E5A7-B256-4BEF-93F5-6F36F15FBACD}"/>
+                <a16:creationId xmlns:a16="http://schemas.microsoft.com/office/drawing/2014/main" id="{630A784B-0834-9E96-7798-2A879FD6167D}"/>
               </a:ext>
             </a:extLst>
           </p:cNvPr>
@@ -3715,10 +3704,10 @@
       </p:sp>
       <p:pic>
         <p:nvPicPr>
-          <p:cNvPr id="7" name="Obrázek 6">
-            <a:extLst>
-              <a:ext uri="{FF2B5EF4-FFF2-40B4-BE49-F238E27FC236}">
-                <a16:creationId xmlns:a16="http://schemas.microsoft.com/office/drawing/2014/main" id="{B7F3D1A4-421E-4541-ADC1-338A2684385C}"/>
+          <p:cNvPr id="5" name="Obrázek 4">
+            <a:extLst>
+              <a:ext uri="{FF2B5EF4-FFF2-40B4-BE49-F238E27FC236}">
+                <a16:creationId xmlns:a16="http://schemas.microsoft.com/office/drawing/2014/main" id="{26C60CA6-3725-A637-AC36-FB1154FAA2BA}"/>
               </a:ext>
             </a:extLst>
           </p:cNvPr>
@@ -3745,10 +3734,10 @@
       </p:pic>
       <p:sp>
         <p:nvSpPr>
-          <p:cNvPr id="8" name="TextovéPole 7">
-            <a:extLst>
-              <a:ext uri="{FF2B5EF4-FFF2-40B4-BE49-F238E27FC236}">
-                <a16:creationId xmlns:a16="http://schemas.microsoft.com/office/drawing/2014/main" id="{2FE7E5F2-000A-462E-934C-68722353A24E}"/>
+          <p:cNvPr id="4" name="TextovéPole 3">
+            <a:extLst>
+              <a:ext uri="{FF2B5EF4-FFF2-40B4-BE49-F238E27FC236}">
+                <a16:creationId xmlns:a16="http://schemas.microsoft.com/office/drawing/2014/main" id="{AA4C7760-7ABD-041A-4F9B-0BE1390ED9F8}"/>
               </a:ext>
             </a:extLst>
           </p:cNvPr>
@@ -3757,23 +3746,21 @@
         </p:nvSpPr>
         <p:spPr>
           <a:xfrm>
-            <a:off x="7104183" y="582971"/>
-            <a:ext cx="4933071" cy="2585323"/>
+            <a:off x="6096000" y="3314641"/>
+            <a:ext cx="5656881" cy="2862322"/>
           </a:xfrm>
           <a:prstGeom prst="rect">
             <a:avLst/>
           </a:prstGeom>
         </p:spPr>
         <p:style>
-          <a:lnRef idx="2">
-            <a:schemeClr val="accent2">
-              <a:shade val="50000"/>
-            </a:schemeClr>
+          <a:lnRef idx="3">
+            <a:schemeClr val="lt1"/>
           </a:lnRef>
           <a:fillRef idx="1">
             <a:schemeClr val="accent2"/>
           </a:fillRef>
-          <a:effectRef idx="0">
+          <a:effectRef idx="1">
             <a:schemeClr val="accent2"/>
           </a:effectRef>
           <a:fontRef idx="minor">
@@ -3788,7 +3775,23 @@
           <a:p>
             <a:r>
               <a:rPr lang="cs-CZ" dirty="0"/>
-              <a:t>Pokud uživatel musí opravit nějaké chyby, měli bychom mu zároveň nechat ve formuláři vyplněná data, která do něj vyplnil.</a:t>
+              <a:t>A když máme formulář kompletně zpracovaný, </a:t>
+            </a:r>
+            <a:r>
+              <a:rPr lang="cs-CZ" b="1" dirty="0"/>
+              <a:t>vždy </a:t>
+            </a:r>
+            <a:r>
+              <a:rPr lang="cs-CZ" dirty="0"/>
+              <a:t>po odeslání formuláře metodou POST </a:t>
+            </a:r>
+            <a:r>
+              <a:rPr lang="cs-CZ" b="1" dirty="0"/>
+              <a:t>provádíme přesměrování</a:t>
+            </a:r>
+            <a:r>
+              <a:rPr lang="cs-CZ" dirty="0"/>
+              <a:t>. </a:t>
             </a:r>
           </a:p>
           <a:p>
@@ -3797,25 +3800,34 @@
           <a:p>
             <a:r>
               <a:rPr lang="cs-CZ" dirty="0"/>
-              <a:t>Vypíšeme je tedy jako výchozí hodnoty formuláře, pro ošetření nebezpečných znaků použijeme funkci </a:t>
-            </a:r>
-            <a:r>
-              <a:rPr lang="cs-CZ" b="1" dirty="0" err="1"/>
-              <a:t>htmlspecialchars</a:t>
-            </a:r>
+              <a:t>Přesměrováním zajistíme, že se prohlížeč nebude snažit při obnově stránky odesílat data znovu.</a:t>
+            </a:r>
+          </a:p>
+          <a:p>
+            <a:endParaRPr lang="cs-CZ" b="1" dirty="0"/>
+          </a:p>
+          <a:p>
             <a:r>
               <a:rPr lang="cs-CZ" dirty="0"/>
-              <a:t>. Zavináč před názvem proměnných skryje chybu v situaci, kdy by daná proměnná nebyla definovaná.</a:t>
-            </a:r>
-          </a:p>
-        </p:txBody>
-      </p:sp>
-      <p:sp>
-        <p:nvSpPr>
-          <p:cNvPr id="9" name="Obdélník 8">
-            <a:extLst>
-              <a:ext uri="{FF2B5EF4-FFF2-40B4-BE49-F238E27FC236}">
-                <a16:creationId xmlns:a16="http://schemas.microsoft.com/office/drawing/2014/main" id="{AFCB1925-1E66-4C42-86B1-F30F072B65EF}"/>
+              <a:t>Pro přesměrování odešleme HTTP hlavičku </a:t>
+            </a:r>
+            <a:r>
+              <a:rPr lang="cs-CZ" dirty="0" err="1"/>
+              <a:t>Location</a:t>
+            </a:r>
+            <a:r>
+              <a:rPr lang="cs-CZ" dirty="0"/>
+              <a:t> a můžeme ukončit zpracování skriptu, protože další obsah by se v prohlížeči stejně nezobrazil.</a:t>
+            </a:r>
+          </a:p>
+        </p:txBody>
+      </p:sp>
+      <p:sp>
+        <p:nvSpPr>
+          <p:cNvPr id="6" name="Obdélník 5">
+            <a:extLst>
+              <a:ext uri="{FF2B5EF4-FFF2-40B4-BE49-F238E27FC236}">
+                <a16:creationId xmlns:a16="http://schemas.microsoft.com/office/drawing/2014/main" id="{A8A85EC2-2898-9791-2163-DDE304EB26E2}"/>
               </a:ext>
             </a:extLst>
           </p:cNvPr>
@@ -3824,8 +3836,8 @@
         </p:nvSpPr>
         <p:spPr>
           <a:xfrm>
-            <a:off x="7357402" y="4754880"/>
-            <a:ext cx="3010485" cy="259654"/>
+            <a:off x="1039679" y="5176434"/>
+            <a:ext cx="2493935" cy="592688"/>
           </a:xfrm>
           <a:prstGeom prst="rect">
             <a:avLst/>
@@ -3856,102 +3868,10 @@
           </a:p>
         </p:txBody>
       </p:sp>
-      <p:sp>
-        <p:nvSpPr>
-          <p:cNvPr id="10" name="Obdélník 9">
-            <a:extLst>
-              <a:ext uri="{FF2B5EF4-FFF2-40B4-BE49-F238E27FC236}">
-                <a16:creationId xmlns:a16="http://schemas.microsoft.com/office/drawing/2014/main" id="{DDF1214D-16AE-424E-B306-194990987706}"/>
-              </a:ext>
-            </a:extLst>
-          </p:cNvPr>
-          <p:cNvSpPr/>
-          <p:nvPr/>
-        </p:nvSpPr>
-        <p:spPr>
-          <a:xfrm>
-            <a:off x="6342184" y="4215910"/>
-            <a:ext cx="3589607" cy="259654"/>
-          </a:xfrm>
-          <a:prstGeom prst="rect">
-            <a:avLst/>
-          </a:prstGeom>
-          <a:noFill/>
-          <a:ln w="38100"/>
-        </p:spPr>
-        <p:style>
-          <a:lnRef idx="2">
-            <a:schemeClr val="accent2"/>
-          </a:lnRef>
-          <a:fillRef idx="1">
-            <a:schemeClr val="lt1"/>
-          </a:fillRef>
-          <a:effectRef idx="0">
-            <a:schemeClr val="accent2"/>
-          </a:effectRef>
-          <a:fontRef idx="minor">
-            <a:schemeClr val="dk1"/>
-          </a:fontRef>
-        </p:style>
-        <p:txBody>
-          <a:bodyPr rtlCol="0" anchor="ctr"/>
-          <a:lstStyle/>
-          <a:p>
-            <a:pPr algn="ctr"/>
-            <a:endParaRPr lang="cs-CZ"/>
-          </a:p>
-        </p:txBody>
-      </p:sp>
-      <p:sp>
-        <p:nvSpPr>
-          <p:cNvPr id="11" name="Obdélník 10">
-            <a:extLst>
-              <a:ext uri="{FF2B5EF4-FFF2-40B4-BE49-F238E27FC236}">
-                <a16:creationId xmlns:a16="http://schemas.microsoft.com/office/drawing/2014/main" id="{9DB5AAC5-0B04-4EEC-9AA6-0B060E7C5F5C}"/>
-              </a:ext>
-            </a:extLst>
-          </p:cNvPr>
-          <p:cNvSpPr/>
-          <p:nvPr/>
-        </p:nvSpPr>
-        <p:spPr>
-          <a:xfrm>
-            <a:off x="6834549" y="3676940"/>
-            <a:ext cx="3589607" cy="259654"/>
-          </a:xfrm>
-          <a:prstGeom prst="rect">
-            <a:avLst/>
-          </a:prstGeom>
-          <a:noFill/>
-          <a:ln w="38100"/>
-        </p:spPr>
-        <p:style>
-          <a:lnRef idx="2">
-            <a:schemeClr val="accent2"/>
-          </a:lnRef>
-          <a:fillRef idx="1">
-            <a:schemeClr val="lt1"/>
-          </a:fillRef>
-          <a:effectRef idx="0">
-            <a:schemeClr val="accent2"/>
-          </a:effectRef>
-          <a:fontRef idx="minor">
-            <a:schemeClr val="dk1"/>
-          </a:fontRef>
-        </p:style>
-        <p:txBody>
-          <a:bodyPr rtlCol="0" anchor="ctr"/>
-          <a:lstStyle/>
-          <a:p>
-            <a:pPr algn="ctr"/>
-            <a:endParaRPr lang="cs-CZ"/>
-          </a:p>
-        </p:txBody>
-      </p:sp>
     </p:spTree>
     <p:extLst>
       <p:ext uri="{BB962C8B-B14F-4D97-AF65-F5344CB8AC3E}">
-        <p14:creationId xmlns:p14="http://schemas.microsoft.com/office/powerpoint/2010/main" val="323295522"/>
+        <p14:creationId xmlns:p14="http://schemas.microsoft.com/office/powerpoint/2010/main" val="2284498214"/>
       </p:ext>
     </p:extLst>
   </p:cSld>
@@ -3983,7 +3903,7 @@
           <p:cNvPr id="2" name="Nadpis 1">
             <a:extLst>
               <a:ext uri="{FF2B5EF4-FFF2-40B4-BE49-F238E27FC236}">
-                <a16:creationId xmlns:a16="http://schemas.microsoft.com/office/drawing/2014/main" id="{DCFFB10C-01B5-4944-851D-9E0D3B57501D}"/>
+                <a16:creationId xmlns:a16="http://schemas.microsoft.com/office/drawing/2014/main" id="{FE3CF488-6819-DB61-A7AC-83831B9D6C58}"/>
               </a:ext>
             </a:extLst>
           </p:cNvPr>
@@ -4008,7 +3928,7 @@
           <p:cNvPr id="3" name="Zástupný obsah 2">
             <a:extLst>
               <a:ext uri="{FF2B5EF4-FFF2-40B4-BE49-F238E27FC236}">
-                <a16:creationId xmlns:a16="http://schemas.microsoft.com/office/drawing/2014/main" id="{A2DBE2B5-F25C-4011-BB6E-AC62A64FF40F}"/>
+                <a16:creationId xmlns:a16="http://schemas.microsoft.com/office/drawing/2014/main" id="{4B0C3AD5-3A2D-DB48-2315-F601197B4687}"/>
               </a:ext>
             </a:extLst>
           </p:cNvPr>
@@ -4033,7 +3953,7 @@
           <p:cNvPr id="5" name="Obrázek 4">
             <a:extLst>
               <a:ext uri="{FF2B5EF4-FFF2-40B4-BE49-F238E27FC236}">
-                <a16:creationId xmlns:a16="http://schemas.microsoft.com/office/drawing/2014/main" id="{5B5C4A40-8410-427F-9B5E-2676B9580787}"/>
+                <a16:creationId xmlns:a16="http://schemas.microsoft.com/office/drawing/2014/main" id="{DE7A9DF2-4C34-69E9-056A-DF5121E53309}"/>
               </a:ext>
             </a:extLst>
           </p:cNvPr>
@@ -4060,10 +3980,10 @@
       </p:pic>
       <p:sp>
         <p:nvSpPr>
-          <p:cNvPr id="6" name="TextovéPole 5">
-            <a:extLst>
-              <a:ext uri="{FF2B5EF4-FFF2-40B4-BE49-F238E27FC236}">
-                <a16:creationId xmlns:a16="http://schemas.microsoft.com/office/drawing/2014/main" id="{1ED95B5F-8CFF-4BDD-BA39-52A6A085B042}"/>
+          <p:cNvPr id="4" name="TextovéPole 3">
+            <a:extLst>
+              <a:ext uri="{FF2B5EF4-FFF2-40B4-BE49-F238E27FC236}">
+                <a16:creationId xmlns:a16="http://schemas.microsoft.com/office/drawing/2014/main" id="{22CD9666-5904-5347-A51C-83208B5715D6}"/>
               </a:ext>
             </a:extLst>
           </p:cNvPr>
@@ -4072,23 +3992,21 @@
         </p:nvSpPr>
         <p:spPr>
           <a:xfrm>
-            <a:off x="5950633" y="309105"/>
-            <a:ext cx="5822267" cy="2031325"/>
+            <a:off x="3786107" y="1120676"/>
+            <a:ext cx="5656881" cy="2308324"/>
           </a:xfrm>
           <a:prstGeom prst="rect">
             <a:avLst/>
           </a:prstGeom>
         </p:spPr>
         <p:style>
-          <a:lnRef idx="2">
-            <a:schemeClr val="accent2">
-              <a:shade val="50000"/>
-            </a:schemeClr>
+          <a:lnRef idx="3">
+            <a:schemeClr val="lt1"/>
           </a:lnRef>
           <a:fillRef idx="1">
             <a:schemeClr val="accent2"/>
           </a:fillRef>
-          <a:effectRef idx="0">
+          <a:effectRef idx="1">
             <a:schemeClr val="accent2"/>
           </a:effectRef>
           <a:fontRef idx="minor">
@@ -4103,62 +4021,26 @@
           <a:p>
             <a:r>
               <a:rPr lang="cs-CZ" dirty="0"/>
-              <a:t>Vrátíme se ke zpracování dat z formuláře. Data budeme ukládat rovnou v HTML, které jen vložíme do příslušného místa na stránce. Sestavíme si tedy </a:t>
-            </a:r>
-            <a:r>
-              <a:rPr lang="en-US" dirty="0" err="1"/>
-              <a:t>obsah</a:t>
-            </a:r>
-            <a:r>
-              <a:rPr lang="en-US" dirty="0"/>
-              <a:t> v </a:t>
-            </a:r>
+              <a:t>Kdybyste nyní spustili aplikaci na Windows nebo na serverech s menším zabezpečením, tak už se data budou ukládat. Jenže většina linuxových serverů má PHP spuštěné pod jiným uživatelem, než pod kterým se přihlašujeme v rámci SFTP. </a:t>
+            </a:r>
+          </a:p>
+          <a:p>
+            <a:endParaRPr lang="cs-CZ" dirty="0"/>
+          </a:p>
+          <a:p>
             <a:r>
               <a:rPr lang="cs-CZ" dirty="0"/>
-              <a:t>proměnné </a:t>
-            </a:r>
-            <a:r>
-              <a:rPr lang="en-US" b="1" dirty="0"/>
-              <a:t>$</a:t>
-            </a:r>
-            <a:r>
-              <a:rPr lang="en-US" b="1" dirty="0" err="1"/>
-              <a:t>prispevek</a:t>
-            </a:r>
-            <a:r>
-              <a:rPr lang="en-US" dirty="0"/>
-              <a:t>.</a:t>
-            </a:r>
-          </a:p>
-          <a:p>
-            <a:endParaRPr lang="en-US" dirty="0"/>
-          </a:p>
-          <a:p>
-            <a:r>
-              <a:rPr lang="en-US" dirty="0" err="1"/>
-              <a:t>Pokud</a:t>
-            </a:r>
-            <a:r>
-              <a:rPr lang="en-US" dirty="0"/>
-              <a:t> u</a:t>
-            </a:r>
-            <a:r>
-              <a:rPr lang="cs-CZ" dirty="0" err="1"/>
-              <a:t>živatel</a:t>
-            </a:r>
-            <a:r>
-              <a:rPr lang="cs-CZ" dirty="0"/>
-              <a:t> vyplnil také e-mail, zobrazíme jeho jméno jako odkaz.</a:t>
-            </a:r>
-          </a:p>
-        </p:txBody>
-      </p:sp>
-      <p:sp>
-        <p:nvSpPr>
-          <p:cNvPr id="7" name="Obdélník 6">
-            <a:extLst>
-              <a:ext uri="{FF2B5EF4-FFF2-40B4-BE49-F238E27FC236}">
-                <a16:creationId xmlns:a16="http://schemas.microsoft.com/office/drawing/2014/main" id="{9511D3DC-02E6-44C7-B753-491190A2FC83}"/>
+              <a:t>Nejprve si tedy vytvoříme úplně prázdný soubor, který uložíme jako obsah.html.</a:t>
+            </a:r>
+          </a:p>
+        </p:txBody>
+      </p:sp>
+      <p:sp>
+        <p:nvSpPr>
+          <p:cNvPr id="6" name="Obdélník 5">
+            <a:extLst>
+              <a:ext uri="{FF2B5EF4-FFF2-40B4-BE49-F238E27FC236}">
+                <a16:creationId xmlns:a16="http://schemas.microsoft.com/office/drawing/2014/main" id="{392C72CC-7248-4E1B-7E4B-F474A1AC566A}"/>
               </a:ext>
             </a:extLst>
           </p:cNvPr>
@@ -4167,8 +4049,8 @@
         </p:nvSpPr>
         <p:spPr>
           <a:xfrm>
-            <a:off x="3419622" y="2465781"/>
-            <a:ext cx="6596575" cy="3090957"/>
+            <a:off x="404249" y="1324768"/>
+            <a:ext cx="1471046" cy="209564"/>
           </a:xfrm>
           <a:prstGeom prst="rect">
             <a:avLst/>
@@ -4202,7 +4084,7 @@
     </p:spTree>
     <p:extLst>
       <p:ext uri="{BB962C8B-B14F-4D97-AF65-F5344CB8AC3E}">
-        <p14:creationId xmlns:p14="http://schemas.microsoft.com/office/powerpoint/2010/main" val="3436008209"/>
+        <p14:creationId xmlns:p14="http://schemas.microsoft.com/office/powerpoint/2010/main" val="3579109634"/>
       </p:ext>
     </p:extLst>
   </p:cSld>
@@ -4234,7 +4116,7 @@
           <p:cNvPr id="2" name="Nadpis 1">
             <a:extLst>
               <a:ext uri="{FF2B5EF4-FFF2-40B4-BE49-F238E27FC236}">
-                <a16:creationId xmlns:a16="http://schemas.microsoft.com/office/drawing/2014/main" id="{90A306BE-184A-44E4-B985-92EDD9D303CC}"/>
+                <a16:creationId xmlns:a16="http://schemas.microsoft.com/office/drawing/2014/main" id="{8A1E6236-E5DA-C6FE-E73C-0CE709EFD2EF}"/>
               </a:ext>
             </a:extLst>
           </p:cNvPr>
@@ -4259,7 +4141,7 @@
           <p:cNvPr id="3" name="Zástupný obsah 2">
             <a:extLst>
               <a:ext uri="{FF2B5EF4-FFF2-40B4-BE49-F238E27FC236}">
-                <a16:creationId xmlns:a16="http://schemas.microsoft.com/office/drawing/2014/main" id="{7B877F23-ECB7-4807-9FE0-A0F15F4FA2D1}"/>
+                <a16:creationId xmlns:a16="http://schemas.microsoft.com/office/drawing/2014/main" id="{17CC7277-F682-F4C4-78D0-3034E2B2E496}"/>
               </a:ext>
             </a:extLst>
           </p:cNvPr>
@@ -4284,7 +4166,7 @@
           <p:cNvPr id="5" name="Obrázek 4">
             <a:extLst>
               <a:ext uri="{FF2B5EF4-FFF2-40B4-BE49-F238E27FC236}">
-                <a16:creationId xmlns:a16="http://schemas.microsoft.com/office/drawing/2014/main" id="{60E756D6-1E60-4098-967E-35A95051B47D}"/>
+                <a16:creationId xmlns:a16="http://schemas.microsoft.com/office/drawing/2014/main" id="{D101D229-A42D-9B17-5865-46065A136B1A}"/>
               </a:ext>
             </a:extLst>
           </p:cNvPr>
@@ -4295,14 +4177,13 @@
         </p:nvPicPr>
         <p:blipFill>
           <a:blip r:embed="rId2"/>
-          <a:stretch>
-            <a:fillRect/>
-          </a:stretch>
+          <a:srcRect b="5303"/>
+          <a:stretch/>
         </p:blipFill>
         <p:spPr>
           <a:xfrm>
-            <a:off x="0" y="180180"/>
-            <a:ext cx="12192000" cy="6497640"/>
+            <a:off x="0" y="183399"/>
+            <a:ext cx="12192000" cy="6491202"/>
           </a:xfrm>
           <a:prstGeom prst="rect">
             <a:avLst/>
@@ -4311,10 +4192,10 @@
       </p:pic>
       <p:sp>
         <p:nvSpPr>
-          <p:cNvPr id="6" name="TextovéPole 5">
-            <a:extLst>
-              <a:ext uri="{FF2B5EF4-FFF2-40B4-BE49-F238E27FC236}">
-                <a16:creationId xmlns:a16="http://schemas.microsoft.com/office/drawing/2014/main" id="{756540A5-0F32-4F7C-BE4E-DFDE1825CFA7}"/>
+          <p:cNvPr id="4" name="TextovéPole 3">
+            <a:extLst>
+              <a:ext uri="{FF2B5EF4-FFF2-40B4-BE49-F238E27FC236}">
+                <a16:creationId xmlns:a16="http://schemas.microsoft.com/office/drawing/2014/main" id="{9E43DD09-1E3A-5AA1-C05A-E18EEC31A1E3}"/>
               </a:ext>
             </a:extLst>
           </p:cNvPr>
@@ -4323,23 +4204,21 @@
         </p:nvSpPr>
         <p:spPr>
           <a:xfrm>
-            <a:off x="8070752" y="3668752"/>
-            <a:ext cx="3816448" cy="1754326"/>
+            <a:off x="2218842" y="3124131"/>
+            <a:ext cx="3614977" cy="1754326"/>
           </a:xfrm>
           <a:prstGeom prst="rect">
             <a:avLst/>
           </a:prstGeom>
         </p:spPr>
         <p:style>
-          <a:lnRef idx="2">
-            <a:schemeClr val="accent2">
-              <a:shade val="50000"/>
-            </a:schemeClr>
+          <a:lnRef idx="3">
+            <a:schemeClr val="lt1"/>
           </a:lnRef>
           <a:fillRef idx="1">
             <a:schemeClr val="accent2"/>
           </a:fillRef>
-          <a:effectRef idx="0">
+          <a:effectRef idx="1">
             <a:schemeClr val="accent2"/>
           </a:effectRef>
           <a:fontRef idx="minor">
@@ -4354,46 +4233,25 @@
           <a:p>
             <a:r>
               <a:rPr lang="cs-CZ" dirty="0"/>
-              <a:t>Jako další část výpisu uvedeme text příspěvku. Funkce </a:t>
-            </a:r>
-            <a:r>
-              <a:rPr lang="cs-CZ" b="1" dirty="0" err="1"/>
-              <a:t>htmlspecialchars</a:t>
+              <a:t>Soubor nahrajeme na server (do stejného adresáře, kde máme soubor </a:t>
+            </a:r>
+            <a:r>
+              <a:rPr lang="cs-CZ" dirty="0" err="1"/>
+              <a:t>kniha.php</a:t>
             </a:r>
             <a:r>
               <a:rPr lang="cs-CZ" dirty="0"/>
-              <a:t> nejprve ošetří speciální znak zadané uživatelem (např. HTML značky), následně pomocí funkce </a:t>
-            </a:r>
-            <a:r>
-              <a:rPr lang="cs-CZ" b="1" dirty="0"/>
-              <a:t>nl2br</a:t>
-            </a:r>
-            <a:r>
-              <a:rPr lang="cs-CZ" dirty="0"/>
-              <a:t> změníme konce řádků na značku </a:t>
-            </a:r>
-            <a:r>
-              <a:rPr lang="en-US" dirty="0"/>
-              <a:t>&lt;</a:t>
-            </a:r>
-            <a:r>
-              <a:rPr lang="en-US" dirty="0" err="1"/>
-              <a:t>br</a:t>
-            </a:r>
-            <a:r>
-              <a:rPr lang="en-US" dirty="0"/>
-              <a:t>&gt;.</a:t>
-            </a:r>
-            <a:endParaRPr lang="cs-CZ" dirty="0"/>
-          </a:p>
-        </p:txBody>
-      </p:sp>
-      <p:sp>
-        <p:nvSpPr>
-          <p:cNvPr id="7" name="Obdélník 6">
-            <a:extLst>
-              <a:ext uri="{FF2B5EF4-FFF2-40B4-BE49-F238E27FC236}">
-                <a16:creationId xmlns:a16="http://schemas.microsoft.com/office/drawing/2014/main" id="{854295DF-61FC-4B46-A2A2-D756D4D3D84E}"/>
+              <a:t>). Poté si ve správci souborů zobrazíme vlastnosti daného souboru, abych do něj povolili zápis.</a:t>
+            </a:r>
+          </a:p>
+        </p:txBody>
+      </p:sp>
+      <p:sp>
+        <p:nvSpPr>
+          <p:cNvPr id="6" name="Obdélník 5">
+            <a:extLst>
+              <a:ext uri="{FF2B5EF4-FFF2-40B4-BE49-F238E27FC236}">
+                <a16:creationId xmlns:a16="http://schemas.microsoft.com/office/drawing/2014/main" id="{5BCC7C68-863B-AADF-5AA9-DC833E25D10C}"/>
               </a:ext>
             </a:extLst>
           </p:cNvPr>
@@ -4402,8 +4260,8 @@
         </p:nvSpPr>
         <p:spPr>
           <a:xfrm>
-            <a:off x="3576711" y="4431323"/>
-            <a:ext cx="4371535" cy="229184"/>
+            <a:off x="6127644" y="2228819"/>
+            <a:ext cx="3124843" cy="2591153"/>
           </a:xfrm>
           <a:prstGeom prst="rect">
             <a:avLst/>
@@ -4437,7 +4295,7 @@
     </p:spTree>
     <p:extLst>
       <p:ext uri="{BB962C8B-B14F-4D97-AF65-F5344CB8AC3E}">
-        <p14:creationId xmlns:p14="http://schemas.microsoft.com/office/powerpoint/2010/main" val="4286091797"/>
+        <p14:creationId xmlns:p14="http://schemas.microsoft.com/office/powerpoint/2010/main" val="4179811961"/>
       </p:ext>
     </p:extLst>
   </p:cSld>
@@ -4469,7 +4327,7 @@
           <p:cNvPr id="2" name="Nadpis 1">
             <a:extLst>
               <a:ext uri="{FF2B5EF4-FFF2-40B4-BE49-F238E27FC236}">
-                <a16:creationId xmlns:a16="http://schemas.microsoft.com/office/drawing/2014/main" id="{3DDBCD15-81B2-4151-B592-1F65BEEB135B}"/>
+                <a16:creationId xmlns:a16="http://schemas.microsoft.com/office/drawing/2014/main" id="{3A3FFBD5-67B3-7380-EB80-BF57690D984D}"/>
               </a:ext>
             </a:extLst>
           </p:cNvPr>
@@ -4494,7 +4352,7 @@
           <p:cNvPr id="3" name="Zástupný obsah 2">
             <a:extLst>
               <a:ext uri="{FF2B5EF4-FFF2-40B4-BE49-F238E27FC236}">
-                <a16:creationId xmlns:a16="http://schemas.microsoft.com/office/drawing/2014/main" id="{5F500107-CBF4-4068-8466-D6908E29ADF4}"/>
+                <a16:creationId xmlns:a16="http://schemas.microsoft.com/office/drawing/2014/main" id="{3BEE884A-FFBF-D220-949F-CFF5F28C73DC}"/>
               </a:ext>
             </a:extLst>
           </p:cNvPr>
@@ -4519,7 +4377,7 @@
           <p:cNvPr id="5" name="Obrázek 4">
             <a:extLst>
               <a:ext uri="{FF2B5EF4-FFF2-40B4-BE49-F238E27FC236}">
-                <a16:creationId xmlns:a16="http://schemas.microsoft.com/office/drawing/2014/main" id="{FF208CD0-4BFC-48CE-BF9F-C66B3336916D}"/>
+                <a16:creationId xmlns:a16="http://schemas.microsoft.com/office/drawing/2014/main" id="{6A11403E-4CE8-73F0-CDBA-E188E18AF09F}"/>
               </a:ext>
             </a:extLst>
           </p:cNvPr>
@@ -4530,14 +4388,13 @@
         </p:nvPicPr>
         <p:blipFill>
           <a:blip r:embed="rId2"/>
-          <a:stretch>
-            <a:fillRect/>
-          </a:stretch>
+          <a:srcRect b="5303"/>
+          <a:stretch/>
         </p:blipFill>
         <p:spPr>
           <a:xfrm>
-            <a:off x="0" y="180180"/>
-            <a:ext cx="12192000" cy="6497640"/>
+            <a:off x="0" y="183399"/>
+            <a:ext cx="12192000" cy="6491202"/>
           </a:xfrm>
           <a:prstGeom prst="rect">
             <a:avLst/>
@@ -4546,10 +4403,10 @@
       </p:pic>
       <p:sp>
         <p:nvSpPr>
-          <p:cNvPr id="6" name="TextovéPole 5">
-            <a:extLst>
-              <a:ext uri="{FF2B5EF4-FFF2-40B4-BE49-F238E27FC236}">
-                <a16:creationId xmlns:a16="http://schemas.microsoft.com/office/drawing/2014/main" id="{33022B4F-F7FD-4783-8385-431645125FD4}"/>
+          <p:cNvPr id="4" name="TextovéPole 3">
+            <a:extLst>
+              <a:ext uri="{FF2B5EF4-FFF2-40B4-BE49-F238E27FC236}">
+                <a16:creationId xmlns:a16="http://schemas.microsoft.com/office/drawing/2014/main" id="{861BACB3-3DB0-FE4A-331A-D3ACE9E83B32}"/>
               </a:ext>
             </a:extLst>
           </p:cNvPr>
@@ -4558,23 +4415,21 @@
         </p:nvSpPr>
         <p:spPr>
           <a:xfrm>
-            <a:off x="6839829" y="4061500"/>
-            <a:ext cx="4933071" cy="1477328"/>
+            <a:off x="7980333" y="3339385"/>
+            <a:ext cx="4211667" cy="1477328"/>
           </a:xfrm>
           <a:prstGeom prst="rect">
             <a:avLst/>
           </a:prstGeom>
         </p:spPr>
         <p:style>
-          <a:lnRef idx="2">
-            <a:schemeClr val="accent2">
-              <a:shade val="50000"/>
-            </a:schemeClr>
+          <a:lnRef idx="3">
+            <a:schemeClr val="lt1"/>
           </a:lnRef>
           <a:fillRef idx="1">
             <a:schemeClr val="accent2"/>
           </a:fillRef>
-          <a:effectRef idx="0">
+          <a:effectRef idx="1">
             <a:schemeClr val="accent2"/>
           </a:effectRef>
           <a:fontRef idx="minor">
@@ -4588,121 +4443,18 @@
           <a:lstStyle/>
           <a:p>
             <a:r>
-              <a:rPr lang="en-US" dirty="0" err="1"/>
-              <a:t>Jako</a:t>
-            </a:r>
-            <a:r>
-              <a:rPr lang="en-US" dirty="0"/>
-              <a:t> </a:t>
-            </a:r>
-            <a:r>
-              <a:rPr lang="en-US" dirty="0" err="1"/>
-              <a:t>posledn</a:t>
-            </a:r>
-            <a:r>
               <a:rPr lang="cs-CZ" dirty="0"/>
-              <a:t>í část doplníme do textu příspěvku informaci o aktuálním datu a čase. K jejich výpisu použijeme funkci </a:t>
-            </a:r>
-            <a:r>
-              <a:rPr lang="cs-CZ" b="1" dirty="0" err="1"/>
-              <a:t>date</a:t>
-            </a:r>
-            <a:r>
-              <a:rPr lang="cs-CZ" b="1" dirty="0"/>
-              <a:t>.</a:t>
-            </a:r>
-          </a:p>
-          <a:p>
-            <a:endParaRPr lang="cs-CZ" b="1" dirty="0"/>
-          </a:p>
-          <a:p>
-            <a:r>
-              <a:rPr lang="cs-CZ" i="1" dirty="0">
-                <a:solidFill>
-                  <a:srgbClr val="FFFF00"/>
-                </a:solidFill>
-              </a:rPr>
-              <a:t>Podívejte se na funkci </a:t>
-            </a:r>
-            <a:r>
-              <a:rPr lang="cs-CZ" i="1" dirty="0" err="1">
-                <a:solidFill>
-                  <a:srgbClr val="FFFF00"/>
-                </a:solidFill>
-              </a:rPr>
-              <a:t>date</a:t>
-            </a:r>
-            <a:r>
-              <a:rPr lang="en-US" i="1" dirty="0">
-                <a:solidFill>
-                  <a:srgbClr val="FFFF00"/>
-                </a:solidFill>
-              </a:rPr>
-              <a:t>()</a:t>
-            </a:r>
-            <a:r>
-              <a:rPr lang="cs-CZ" i="1" dirty="0">
-                <a:solidFill>
-                  <a:srgbClr val="FFFF00"/>
-                </a:solidFill>
-              </a:rPr>
-              <a:t> do </a:t>
-            </a:r>
-            <a:r>
-              <a:rPr lang="en-US" i="1" dirty="0">
-                <a:solidFill>
-                  <a:srgbClr val="FFFF00"/>
-                </a:solidFill>
-              </a:rPr>
-              <a:t>PHP </a:t>
-            </a:r>
-            <a:r>
-              <a:rPr lang="en-US" i="1" dirty="0" err="1">
-                <a:solidFill>
-                  <a:srgbClr val="FFFF00"/>
-                </a:solidFill>
-              </a:rPr>
-              <a:t>manu</a:t>
-            </a:r>
-            <a:r>
-              <a:rPr lang="cs-CZ" i="1" dirty="0" err="1">
-                <a:solidFill>
-                  <a:srgbClr val="FFFF00"/>
-                </a:solidFill>
-              </a:rPr>
-              <a:t>álu</a:t>
-            </a:r>
-            <a:r>
-              <a:rPr lang="cs-CZ" i="1" dirty="0">
-                <a:solidFill>
-                  <a:srgbClr val="FFFF00"/>
-                </a:solidFill>
-              </a:rPr>
-              <a:t> </a:t>
-            </a:r>
-            <a:r>
-              <a:rPr lang="cs-CZ" dirty="0">
-                <a:solidFill>
-                  <a:srgbClr val="FFFF00"/>
-                </a:solidFill>
-                <a:sym typeface="Wingdings" panose="05000000000000000000" pitchFamily="2" charset="2"/>
-              </a:rPr>
-              <a:t></a:t>
-            </a:r>
-            <a:endParaRPr lang="cs-CZ" dirty="0">
-              <a:solidFill>
-                <a:srgbClr val="FFFF00"/>
-              </a:solidFill>
-            </a:endParaRPr>
-          </a:p>
-        </p:txBody>
-      </p:sp>
-      <p:sp>
-        <p:nvSpPr>
-          <p:cNvPr id="7" name="Obdélník 6">
-            <a:extLst>
-              <a:ext uri="{FF2B5EF4-FFF2-40B4-BE49-F238E27FC236}">
-                <a16:creationId xmlns:a16="http://schemas.microsoft.com/office/drawing/2014/main" id="{96247E04-A120-443F-9AF1-AD277A95A29C}"/>
+              <a:t>Aby mohli do souboru zapisovat i ostatní uživatelé, nastavíme práva na hodnotu 666. (Alternativně pro povolení zápisu a prohlížení celého adresáře bychom mohli pro adresáři nastavit práva 777.)</a:t>
+            </a:r>
+          </a:p>
+        </p:txBody>
+      </p:sp>
+      <p:sp>
+        <p:nvSpPr>
+          <p:cNvPr id="6" name="Obdélník 5">
+            <a:extLst>
+              <a:ext uri="{FF2B5EF4-FFF2-40B4-BE49-F238E27FC236}">
+                <a16:creationId xmlns:a16="http://schemas.microsoft.com/office/drawing/2014/main" id="{98C5C82D-D5FC-0B31-008F-137EBA9CC73D}"/>
               </a:ext>
             </a:extLst>
           </p:cNvPr>
@@ -4711,8 +4463,8 @@
         </p:nvSpPr>
         <p:spPr>
           <a:xfrm>
-            <a:off x="3599570" y="4061500"/>
-            <a:ext cx="2618350" cy="243213"/>
+            <a:off x="5176431" y="3630228"/>
+            <a:ext cx="2340247" cy="957270"/>
           </a:xfrm>
           <a:prstGeom prst="rect">
             <a:avLst/>
@@ -4746,7 +4498,7 @@
     </p:spTree>
     <p:extLst>
       <p:ext uri="{BB962C8B-B14F-4D97-AF65-F5344CB8AC3E}">
-        <p14:creationId xmlns:p14="http://schemas.microsoft.com/office/powerpoint/2010/main" val="546009131"/>
+        <p14:creationId xmlns:p14="http://schemas.microsoft.com/office/powerpoint/2010/main" val="2221089495"/>
       </p:ext>
     </p:extLst>
   </p:cSld>
@@ -4778,7 +4530,7 @@
           <p:cNvPr id="2" name="Nadpis 1">
             <a:extLst>
               <a:ext uri="{FF2B5EF4-FFF2-40B4-BE49-F238E27FC236}">
-                <a16:creationId xmlns:a16="http://schemas.microsoft.com/office/drawing/2014/main" id="{A74850FD-0987-41E6-8EB8-F6A0837B2CDE}"/>
+                <a16:creationId xmlns:a16="http://schemas.microsoft.com/office/drawing/2014/main" id="{5AA44B90-41AD-6823-68DB-B4E1F1827E8F}"/>
               </a:ext>
             </a:extLst>
           </p:cNvPr>
@@ -4803,7 +4555,7 @@
           <p:cNvPr id="3" name="Zástupný obsah 2">
             <a:extLst>
               <a:ext uri="{FF2B5EF4-FFF2-40B4-BE49-F238E27FC236}">
-                <a16:creationId xmlns:a16="http://schemas.microsoft.com/office/drawing/2014/main" id="{70B1BAB7-D8C0-41D2-84B9-4BAB261CF7C4}"/>
+                <a16:creationId xmlns:a16="http://schemas.microsoft.com/office/drawing/2014/main" id="{C6A893FB-0490-EB60-8774-71823323BCE9}"/>
               </a:ext>
             </a:extLst>
           </p:cNvPr>
@@ -4825,10 +4577,10 @@
       </p:sp>
       <p:pic>
         <p:nvPicPr>
-          <p:cNvPr id="7" name="Obrázek 6">
-            <a:extLst>
-              <a:ext uri="{FF2B5EF4-FFF2-40B4-BE49-F238E27FC236}">
-                <a16:creationId xmlns:a16="http://schemas.microsoft.com/office/drawing/2014/main" id="{8AFD7688-A022-47B5-8048-CFED8846ADF6}"/>
+          <p:cNvPr id="5" name="Obrázek 4">
+            <a:extLst>
+              <a:ext uri="{FF2B5EF4-FFF2-40B4-BE49-F238E27FC236}">
+                <a16:creationId xmlns:a16="http://schemas.microsoft.com/office/drawing/2014/main" id="{3E9FE696-4599-236C-4D55-A01CE997E1B6}"/>
               </a:ext>
             </a:extLst>
           </p:cNvPr>
@@ -4855,10 +4607,10 @@
       </p:pic>
       <p:sp>
         <p:nvSpPr>
-          <p:cNvPr id="8" name="TextovéPole 7">
-            <a:extLst>
-              <a:ext uri="{FF2B5EF4-FFF2-40B4-BE49-F238E27FC236}">
-                <a16:creationId xmlns:a16="http://schemas.microsoft.com/office/drawing/2014/main" id="{67F121B2-9A83-48DC-B2FD-3D3A42C321F8}"/>
+          <p:cNvPr id="4" name="TextovéPole 3">
+            <a:extLst>
+              <a:ext uri="{FF2B5EF4-FFF2-40B4-BE49-F238E27FC236}">
+                <a16:creationId xmlns:a16="http://schemas.microsoft.com/office/drawing/2014/main" id="{7302F78B-AE2B-A152-9288-AE91DDD80558}"/>
               </a:ext>
             </a:extLst>
           </p:cNvPr>
@@ -4867,23 +4619,21 @@
         </p:nvSpPr>
         <p:spPr>
           <a:xfrm>
-            <a:off x="6255435" y="1925075"/>
-            <a:ext cx="5257800" cy="2308324"/>
+            <a:off x="6819254" y="2839815"/>
+            <a:ext cx="3095789" cy="2031325"/>
           </a:xfrm>
           <a:prstGeom prst="rect">
             <a:avLst/>
           </a:prstGeom>
         </p:spPr>
         <p:style>
-          <a:lnRef idx="2">
-            <a:schemeClr val="accent2">
-              <a:shade val="50000"/>
-            </a:schemeClr>
+          <a:lnRef idx="3">
+            <a:schemeClr val="lt1"/>
           </a:lnRef>
           <a:fillRef idx="1">
             <a:schemeClr val="accent2"/>
           </a:fillRef>
-          <a:effectRef idx="0">
+          <a:effectRef idx="1">
             <a:schemeClr val="accent2"/>
           </a:effectRef>
           <a:fontRef idx="minor">
@@ -4898,54 +4648,25 @@
           <a:p>
             <a:r>
               <a:rPr lang="cs-CZ" dirty="0"/>
-              <a:t>Po zpracování dat zaslaných na server metodou POST musí vždy následovat přesměrování. </a:t>
-            </a:r>
-          </a:p>
-          <a:p>
-            <a:endParaRPr lang="cs-CZ" dirty="0"/>
-          </a:p>
-          <a:p>
+              <a:t>Zápis už by nám fungoval, ale ještě chybí poslední krok. Do našeho souboru s knihou návštěv doplníme příkaz </a:t>
+            </a:r>
+            <a:r>
+              <a:rPr lang="cs-CZ" dirty="0" err="1"/>
+              <a:t>include</a:t>
+            </a:r>
             <a:r>
               <a:rPr lang="cs-CZ" dirty="0"/>
-              <a:t>Funkce </a:t>
-            </a:r>
-            <a:r>
-              <a:rPr lang="cs-CZ" b="1" dirty="0" err="1"/>
-              <a:t>header</a:t>
-            </a:r>
-            <a:r>
-              <a:rPr lang="en-US" b="1" dirty="0"/>
-              <a:t>()</a:t>
-            </a:r>
-            <a:r>
-              <a:rPr lang="en-US" dirty="0"/>
-              <a:t> odes</a:t>
-            </a:r>
-            <a:r>
-              <a:rPr lang="cs-CZ" dirty="0" err="1"/>
-              <a:t>ílá</a:t>
-            </a:r>
-            <a:r>
-              <a:rPr lang="cs-CZ" dirty="0"/>
-              <a:t> HTTP hlavičku. Hlavička </a:t>
-            </a:r>
-            <a:r>
-              <a:rPr lang="cs-CZ" b="1" dirty="0" err="1"/>
-              <a:t>Location</a:t>
-            </a:r>
-            <a:r>
-              <a:rPr lang="cs-CZ" dirty="0"/>
-              <a:t> uvádí přesměrování na jinou adresu (uvedená hodnota ./ označuje aktuální adresář, můžeme tu ale uvést také celou URL či jméno konkrétního PHP souboru)</a:t>
-            </a:r>
-          </a:p>
-        </p:txBody>
-      </p:sp>
-      <p:sp>
-        <p:nvSpPr>
-          <p:cNvPr id="9" name="Obdélník 8">
-            <a:extLst>
-              <a:ext uri="{FF2B5EF4-FFF2-40B4-BE49-F238E27FC236}">
-                <a16:creationId xmlns:a16="http://schemas.microsoft.com/office/drawing/2014/main" id="{E45C00B2-660D-4EB6-A6CD-FC4F63D65623}"/>
+              <a:t>, kterým vložíme soubor  obsah.html do stránky. </a:t>
+            </a:r>
+          </a:p>
+        </p:txBody>
+      </p:sp>
+      <p:sp>
+        <p:nvSpPr>
+          <p:cNvPr id="6" name="Obdélník 5">
+            <a:extLst>
+              <a:ext uri="{FF2B5EF4-FFF2-40B4-BE49-F238E27FC236}">
+                <a16:creationId xmlns:a16="http://schemas.microsoft.com/office/drawing/2014/main" id="{65C8BEC1-8EC6-E225-785D-94345AF99135}"/>
               </a:ext>
             </a:extLst>
           </p:cNvPr>
@@ -4954,8 +4675,8 @@
         </p:nvSpPr>
         <p:spPr>
           <a:xfrm>
-            <a:off x="3562642" y="4332849"/>
-            <a:ext cx="3611881" cy="414578"/>
+            <a:off x="4014060" y="3242770"/>
+            <a:ext cx="1966993" cy="414830"/>
           </a:xfrm>
           <a:prstGeom prst="rect">
             <a:avLst/>
@@ -4989,7 +4710,7 @@
     </p:spTree>
     <p:extLst>
       <p:ext uri="{BB962C8B-B14F-4D97-AF65-F5344CB8AC3E}">
-        <p14:creationId xmlns:p14="http://schemas.microsoft.com/office/powerpoint/2010/main" val="1252624798"/>
+        <p14:creationId xmlns:p14="http://schemas.microsoft.com/office/powerpoint/2010/main" val="2397661771"/>
       </p:ext>
     </p:extLst>
   </p:cSld>
@@ -5021,7 +4742,7 @@
           <p:cNvPr id="2" name="Nadpis 1">
             <a:extLst>
               <a:ext uri="{FF2B5EF4-FFF2-40B4-BE49-F238E27FC236}">
-                <a16:creationId xmlns:a16="http://schemas.microsoft.com/office/drawing/2014/main" id="{0DBE35AD-D6F7-4DD2-A1B4-20DDD2E93CB0}"/>
+                <a16:creationId xmlns:a16="http://schemas.microsoft.com/office/drawing/2014/main" id="{8DF50C9E-4C87-D442-4BF8-C2DA5D5267FF}"/>
               </a:ext>
             </a:extLst>
           </p:cNvPr>
@@ -5046,7 +4767,7 @@
           <p:cNvPr id="3" name="Zástupný obsah 2">
             <a:extLst>
               <a:ext uri="{FF2B5EF4-FFF2-40B4-BE49-F238E27FC236}">
-                <a16:creationId xmlns:a16="http://schemas.microsoft.com/office/drawing/2014/main" id="{EC8A75D2-5683-41C6-B2F9-ED500739B7C7}"/>
+                <a16:creationId xmlns:a16="http://schemas.microsoft.com/office/drawing/2014/main" id="{41BC7E7C-40D3-1125-33D6-0F7DEBF770FC}"/>
               </a:ext>
             </a:extLst>
           </p:cNvPr>
@@ -5071,7 +4792,7 @@
           <p:cNvPr id="5" name="Obrázek 4">
             <a:extLst>
               <a:ext uri="{FF2B5EF4-FFF2-40B4-BE49-F238E27FC236}">
-                <a16:creationId xmlns:a16="http://schemas.microsoft.com/office/drawing/2014/main" id="{BF43D5BC-6440-4A51-9E07-873C6036378A}"/>
+                <a16:creationId xmlns:a16="http://schemas.microsoft.com/office/drawing/2014/main" id="{2B9B9C79-19F9-4E97-27C2-6EEF0C7D4B32}"/>
               </a:ext>
             </a:extLst>
           </p:cNvPr>
@@ -5098,10 +4819,10 @@
       </p:pic>
       <p:sp>
         <p:nvSpPr>
-          <p:cNvPr id="6" name="TextovéPole 5">
-            <a:extLst>
-              <a:ext uri="{FF2B5EF4-FFF2-40B4-BE49-F238E27FC236}">
-                <a16:creationId xmlns:a16="http://schemas.microsoft.com/office/drawing/2014/main" id="{BC842B83-187E-45B2-A39B-B926F1EFDC4F}"/>
+          <p:cNvPr id="4" name="TextovéPole 3">
+            <a:extLst>
+              <a:ext uri="{FF2B5EF4-FFF2-40B4-BE49-F238E27FC236}">
+                <a16:creationId xmlns:a16="http://schemas.microsoft.com/office/drawing/2014/main" id="{CC42157C-1AD9-2585-9A9D-71F8FAEFEA8B}"/>
               </a:ext>
             </a:extLst>
           </p:cNvPr>
@@ -5110,23 +4831,21 @@
         </p:nvSpPr>
         <p:spPr>
           <a:xfrm>
-            <a:off x="7024468" y="226318"/>
-            <a:ext cx="5003409" cy="2308324"/>
+            <a:off x="3049295" y="1875633"/>
+            <a:ext cx="3351505" cy="368335"/>
           </a:xfrm>
           <a:prstGeom prst="rect">
             <a:avLst/>
           </a:prstGeom>
         </p:spPr>
         <p:style>
-          <a:lnRef idx="2">
-            <a:schemeClr val="accent2">
-              <a:shade val="50000"/>
-            </a:schemeClr>
+          <a:lnRef idx="3">
+            <a:schemeClr val="lt1"/>
           </a:lnRef>
           <a:fillRef idx="1">
             <a:schemeClr val="accent2"/>
           </a:fillRef>
-          <a:effectRef idx="0">
+          <a:effectRef idx="1">
             <a:schemeClr val="accent2"/>
           </a:effectRef>
           <a:fontRef idx="minor">
@@ -5141,34 +4860,24 @@
           <a:p>
             <a:r>
               <a:rPr lang="cs-CZ" dirty="0"/>
-              <a:t>Dalším krokem bude vytvoření souboru, do kterého budeme ukládat data. Na většině serverů je nutné tento soubor vytvořit předem a nastavit mu příslušná uživatelská práva. </a:t>
-            </a:r>
-          </a:p>
-          <a:p>
+              <a:t>A můžeme aplikaci vyzkoušet </a:t>
+            </a:r>
+            <a:r>
+              <a:rPr lang="cs-CZ" dirty="0">
+                <a:sym typeface="Wingdings" panose="05000000000000000000" pitchFamily="2" charset="2"/>
+              </a:rPr>
+              <a:t></a:t>
+            </a:r>
             <a:endParaRPr lang="cs-CZ" dirty="0"/>
           </a:p>
-          <a:p>
-            <a:r>
-              <a:rPr lang="cs-CZ" dirty="0"/>
-              <a:t>Vytvoříme soubor </a:t>
-            </a:r>
-            <a:r>
-              <a:rPr lang="cs-CZ" b="1" dirty="0"/>
-              <a:t>prispevky.html</a:t>
-            </a:r>
-            <a:r>
-              <a:rPr lang="cs-CZ" dirty="0"/>
-              <a:t>, nahrajeme jej na server a následně se k serveru připojíme pro úpravu práv.</a:t>
-            </a:r>
-          </a:p>
-        </p:txBody>
-      </p:sp>
-      <p:sp>
-        <p:nvSpPr>
-          <p:cNvPr id="7" name="Obdélník 6">
-            <a:extLst>
-              <a:ext uri="{FF2B5EF4-FFF2-40B4-BE49-F238E27FC236}">
-                <a16:creationId xmlns:a16="http://schemas.microsoft.com/office/drawing/2014/main" id="{C8F58F03-FB80-4DB4-AAEE-552EBC0878EF}"/>
+        </p:txBody>
+      </p:sp>
+      <p:sp>
+        <p:nvSpPr>
+          <p:cNvPr id="6" name="Obdélník 5">
+            <a:extLst>
+              <a:ext uri="{FF2B5EF4-FFF2-40B4-BE49-F238E27FC236}">
+                <a16:creationId xmlns:a16="http://schemas.microsoft.com/office/drawing/2014/main" id="{D74CBE80-7BDD-462A-5559-4A362A921E1D}"/>
               </a:ext>
             </a:extLst>
           </p:cNvPr>
@@ -5177,8 +4886,8 @@
         </p:nvSpPr>
         <p:spPr>
           <a:xfrm>
-            <a:off x="467752" y="1281903"/>
-            <a:ext cx="1037492" cy="265543"/>
+            <a:off x="0" y="1063953"/>
+            <a:ext cx="2867186" cy="3229077"/>
           </a:xfrm>
           <a:prstGeom prst="rect">
             <a:avLst/>
@@ -5212,763 +4921,7 @@
     </p:spTree>
     <p:extLst>
       <p:ext uri="{BB962C8B-B14F-4D97-AF65-F5344CB8AC3E}">
-        <p14:creationId xmlns:p14="http://schemas.microsoft.com/office/powerpoint/2010/main" val="3895975018"/>
-      </p:ext>
-    </p:extLst>
-  </p:cSld>
-  <p:clrMapOvr>
-    <a:masterClrMapping/>
-  </p:clrMapOvr>
-</p:sld>
-</file>
-
-<file path=ppt/slides/slide17.xml><?xml version="1.0" encoding="utf-8"?>
-<p:sld xmlns:a="http://schemas.openxmlformats.org/drawingml/2006/main" xmlns:r="http://schemas.openxmlformats.org/officeDocument/2006/relationships" xmlns:p="http://schemas.openxmlformats.org/presentationml/2006/main">
-  <p:cSld>
-    <p:spTree>
-      <p:nvGrpSpPr>
-        <p:cNvPr id="1" name=""/>
-        <p:cNvGrpSpPr/>
-        <p:nvPr/>
-      </p:nvGrpSpPr>
-      <p:grpSpPr>
-        <a:xfrm>
-          <a:off x="0" y="0"/>
-          <a:ext cx="0" cy="0"/>
-          <a:chOff x="0" y="0"/>
-          <a:chExt cx="0" cy="0"/>
-        </a:xfrm>
-      </p:grpSpPr>
-      <p:sp>
-        <p:nvSpPr>
-          <p:cNvPr id="2" name="Nadpis 1">
-            <a:extLst>
-              <a:ext uri="{FF2B5EF4-FFF2-40B4-BE49-F238E27FC236}">
-                <a16:creationId xmlns:a16="http://schemas.microsoft.com/office/drawing/2014/main" id="{3ED3CFD1-2269-45F2-913F-5EF736240915}"/>
-              </a:ext>
-            </a:extLst>
-          </p:cNvPr>
-          <p:cNvSpPr>
-            <a:spLocks noGrp="1"/>
-          </p:cNvSpPr>
-          <p:nvPr>
-            <p:ph type="title"/>
-          </p:nvPr>
-        </p:nvSpPr>
-        <p:spPr/>
-        <p:txBody>
-          <a:bodyPr/>
-          <a:lstStyle/>
-          <a:p>
-            <a:endParaRPr lang="cs-CZ"/>
-          </a:p>
-        </p:txBody>
-      </p:sp>
-      <p:sp>
-        <p:nvSpPr>
-          <p:cNvPr id="3" name="Zástupný obsah 2">
-            <a:extLst>
-              <a:ext uri="{FF2B5EF4-FFF2-40B4-BE49-F238E27FC236}">
-                <a16:creationId xmlns:a16="http://schemas.microsoft.com/office/drawing/2014/main" id="{B7D3C21B-DFD9-40B8-9DCE-52021EB82BE1}"/>
-              </a:ext>
-            </a:extLst>
-          </p:cNvPr>
-          <p:cNvSpPr>
-            <a:spLocks noGrp="1"/>
-          </p:cNvSpPr>
-          <p:nvPr>
-            <p:ph idx="1"/>
-          </p:nvPr>
-        </p:nvSpPr>
-        <p:spPr/>
-        <p:txBody>
-          <a:bodyPr/>
-          <a:lstStyle/>
-          <a:p>
-            <a:endParaRPr lang="cs-CZ"/>
-          </a:p>
-        </p:txBody>
-      </p:sp>
-      <p:pic>
-        <p:nvPicPr>
-          <p:cNvPr id="5" name="Obrázek 4">
-            <a:extLst>
-              <a:ext uri="{FF2B5EF4-FFF2-40B4-BE49-F238E27FC236}">
-                <a16:creationId xmlns:a16="http://schemas.microsoft.com/office/drawing/2014/main" id="{AB7AF290-E514-4A22-AE0E-DC17AD1C057A}"/>
-              </a:ext>
-            </a:extLst>
-          </p:cNvPr>
-          <p:cNvPicPr>
-            <a:picLocks noChangeAspect="1"/>
-          </p:cNvPicPr>
-          <p:nvPr/>
-        </p:nvPicPr>
-        <p:blipFill>
-          <a:blip r:embed="rId2"/>
-          <a:stretch>
-            <a:fillRect/>
-          </a:stretch>
-        </p:blipFill>
-        <p:spPr>
-          <a:xfrm>
-            <a:off x="0" y="180180"/>
-            <a:ext cx="12192000" cy="6497640"/>
-          </a:xfrm>
-          <a:prstGeom prst="rect">
-            <a:avLst/>
-          </a:prstGeom>
-        </p:spPr>
-      </p:pic>
-      <p:pic>
-        <p:nvPicPr>
-          <p:cNvPr id="6" name="Obrázek 5">
-            <a:extLst>
-              <a:ext uri="{FF2B5EF4-FFF2-40B4-BE49-F238E27FC236}">
-                <a16:creationId xmlns:a16="http://schemas.microsoft.com/office/drawing/2014/main" id="{622E06A3-672E-4428-BBA4-38F00590DD19}"/>
-              </a:ext>
-            </a:extLst>
-          </p:cNvPr>
-          <p:cNvPicPr>
-            <a:picLocks noChangeAspect="1"/>
-          </p:cNvPicPr>
-          <p:nvPr/>
-        </p:nvPicPr>
-        <p:blipFill>
-          <a:blip r:embed="rId3"/>
-          <a:stretch>
-            <a:fillRect/>
-          </a:stretch>
-        </p:blipFill>
-        <p:spPr>
-          <a:xfrm>
-            <a:off x="4343400" y="2355020"/>
-            <a:ext cx="3505200" cy="2457450"/>
-          </a:xfrm>
-          <a:prstGeom prst="rect">
-            <a:avLst/>
-          </a:prstGeom>
-          <a:ln w="38100">
-            <a:solidFill>
-              <a:schemeClr val="accent2"/>
-            </a:solidFill>
-          </a:ln>
-        </p:spPr>
-      </p:pic>
-      <p:cxnSp>
-        <p:nvCxnSpPr>
-          <p:cNvPr id="8" name="Přímá spojnice se šipkou 7">
-            <a:extLst>
-              <a:ext uri="{FF2B5EF4-FFF2-40B4-BE49-F238E27FC236}">
-                <a16:creationId xmlns:a16="http://schemas.microsoft.com/office/drawing/2014/main" id="{3ADC88F7-CF3E-44B3-B485-BFB8ED16546A}"/>
-              </a:ext>
-            </a:extLst>
-          </p:cNvPr>
-          <p:cNvCxnSpPr/>
-          <p:nvPr/>
-        </p:nvCxnSpPr>
-        <p:spPr>
-          <a:xfrm flipH="1">
-            <a:off x="7962314" y="2489982"/>
-            <a:ext cx="872197" cy="365760"/>
-          </a:xfrm>
-          <a:prstGeom prst="straightConnector1">
-            <a:avLst/>
-          </a:prstGeom>
-          <a:ln w="76200">
-            <a:solidFill>
-              <a:schemeClr val="accent2"/>
-            </a:solidFill>
-            <a:tailEnd type="triangle"/>
-          </a:ln>
-        </p:spPr>
-        <p:style>
-          <a:lnRef idx="1">
-            <a:schemeClr val="accent1"/>
-          </a:lnRef>
-          <a:fillRef idx="0">
-            <a:schemeClr val="accent1"/>
-          </a:fillRef>
-          <a:effectRef idx="0">
-            <a:schemeClr val="accent1"/>
-          </a:effectRef>
-          <a:fontRef idx="minor">
-            <a:schemeClr val="tx1"/>
-          </a:fontRef>
-        </p:style>
-      </p:cxnSp>
-      <p:sp>
-        <p:nvSpPr>
-          <p:cNvPr id="9" name="TextovéPole 8">
-            <a:extLst>
-              <a:ext uri="{FF2B5EF4-FFF2-40B4-BE49-F238E27FC236}">
-                <a16:creationId xmlns:a16="http://schemas.microsoft.com/office/drawing/2014/main" id="{C9FEA200-E7CC-46A6-BF37-E98C0E42B087}"/>
-              </a:ext>
-            </a:extLst>
-          </p:cNvPr>
-          <p:cNvSpPr txBox="1"/>
-          <p:nvPr/>
-        </p:nvSpPr>
-        <p:spPr>
-          <a:xfrm>
-            <a:off x="6223781" y="5200492"/>
-            <a:ext cx="4848665" cy="1477328"/>
-          </a:xfrm>
-          <a:prstGeom prst="rect">
-            <a:avLst/>
-          </a:prstGeom>
-        </p:spPr>
-        <p:style>
-          <a:lnRef idx="2">
-            <a:schemeClr val="accent2">
-              <a:shade val="50000"/>
-            </a:schemeClr>
-          </a:lnRef>
-          <a:fillRef idx="1">
-            <a:schemeClr val="accent2"/>
-          </a:fillRef>
-          <a:effectRef idx="0">
-            <a:schemeClr val="accent2"/>
-          </a:effectRef>
-          <a:fontRef idx="minor">
-            <a:schemeClr val="lt1"/>
-          </a:fontRef>
-        </p:style>
-        <p:txBody>
-          <a:bodyPr wrap="square" rtlCol="0">
-            <a:spAutoFit/>
-          </a:bodyPr>
-          <a:lstStyle/>
-          <a:p>
-            <a:r>
-              <a:rPr lang="cs-CZ" dirty="0"/>
-              <a:t>Je nutné nastavit souboru </a:t>
-            </a:r>
-            <a:r>
-              <a:rPr lang="cs-CZ" b="1" dirty="0"/>
-              <a:t>prispevky.html </a:t>
-            </a:r>
-            <a:r>
-              <a:rPr lang="cs-CZ" dirty="0"/>
-              <a:t>nastavit práva zápisu pro všechny (hodnota </a:t>
-            </a:r>
-            <a:r>
-              <a:rPr lang="cs-CZ" b="1" dirty="0"/>
-              <a:t>666</a:t>
-            </a:r>
-            <a:r>
-              <a:rPr lang="cs-CZ" dirty="0"/>
-              <a:t>). Obdobně jako v </a:t>
-            </a:r>
-            <a:r>
-              <a:rPr lang="cs-CZ" dirty="0" err="1"/>
-              <a:t>phpStormu</a:t>
-            </a:r>
-            <a:r>
-              <a:rPr lang="cs-CZ" dirty="0"/>
-              <a:t> je možné práva změnit také v ostatních aplikacích pro nahrávání souborů na server (</a:t>
-            </a:r>
-            <a:r>
-              <a:rPr lang="cs-CZ" dirty="0" err="1"/>
-              <a:t>winscp</a:t>
-            </a:r>
-            <a:r>
-              <a:rPr lang="cs-CZ" dirty="0"/>
-              <a:t> atp.)</a:t>
-            </a:r>
-          </a:p>
-        </p:txBody>
-      </p:sp>
-      <p:sp>
-        <p:nvSpPr>
-          <p:cNvPr id="10" name="Obdélník 9">
-            <a:extLst>
-              <a:ext uri="{FF2B5EF4-FFF2-40B4-BE49-F238E27FC236}">
-                <a16:creationId xmlns:a16="http://schemas.microsoft.com/office/drawing/2014/main" id="{17C464D5-5B97-4848-9674-93EA21706957}"/>
-              </a:ext>
-            </a:extLst>
-          </p:cNvPr>
-          <p:cNvSpPr/>
-          <p:nvPr/>
-        </p:nvSpPr>
-        <p:spPr>
-          <a:xfrm>
-            <a:off x="5278901" y="4007302"/>
-            <a:ext cx="2402059" cy="326395"/>
-          </a:xfrm>
-          <a:prstGeom prst="rect">
-            <a:avLst/>
-          </a:prstGeom>
-          <a:noFill/>
-          <a:ln w="38100"/>
-        </p:spPr>
-        <p:style>
-          <a:lnRef idx="2">
-            <a:schemeClr val="accent2"/>
-          </a:lnRef>
-          <a:fillRef idx="1">
-            <a:schemeClr val="lt1"/>
-          </a:fillRef>
-          <a:effectRef idx="0">
-            <a:schemeClr val="accent2"/>
-          </a:effectRef>
-          <a:fontRef idx="minor">
-            <a:schemeClr val="dk1"/>
-          </a:fontRef>
-        </p:style>
-        <p:txBody>
-          <a:bodyPr rtlCol="0" anchor="ctr"/>
-          <a:lstStyle/>
-          <a:p>
-            <a:pPr algn="ctr"/>
-            <a:endParaRPr lang="cs-CZ"/>
-          </a:p>
-        </p:txBody>
-      </p:sp>
-    </p:spTree>
-    <p:extLst>
-      <p:ext uri="{BB962C8B-B14F-4D97-AF65-F5344CB8AC3E}">
-        <p14:creationId xmlns:p14="http://schemas.microsoft.com/office/powerpoint/2010/main" val="3522740407"/>
-      </p:ext>
-    </p:extLst>
-  </p:cSld>
-  <p:clrMapOvr>
-    <a:masterClrMapping/>
-  </p:clrMapOvr>
-</p:sld>
-</file>
-
-<file path=ppt/slides/slide18.xml><?xml version="1.0" encoding="utf-8"?>
-<p:sld xmlns:a="http://schemas.openxmlformats.org/drawingml/2006/main" xmlns:r="http://schemas.openxmlformats.org/officeDocument/2006/relationships" xmlns:p="http://schemas.openxmlformats.org/presentationml/2006/main">
-  <p:cSld>
-    <p:spTree>
-      <p:nvGrpSpPr>
-        <p:cNvPr id="1" name=""/>
-        <p:cNvGrpSpPr/>
-        <p:nvPr/>
-      </p:nvGrpSpPr>
-      <p:grpSpPr>
-        <a:xfrm>
-          <a:off x="0" y="0"/>
-          <a:ext cx="0" cy="0"/>
-          <a:chOff x="0" y="0"/>
-          <a:chExt cx="0" cy="0"/>
-        </a:xfrm>
-      </p:grpSpPr>
-      <p:sp>
-        <p:nvSpPr>
-          <p:cNvPr id="2" name="Nadpis 1">
-            <a:extLst>
-              <a:ext uri="{FF2B5EF4-FFF2-40B4-BE49-F238E27FC236}">
-                <a16:creationId xmlns:a16="http://schemas.microsoft.com/office/drawing/2014/main" id="{B973F48C-0DEC-4F75-B073-4480ECC54063}"/>
-              </a:ext>
-            </a:extLst>
-          </p:cNvPr>
-          <p:cNvSpPr>
-            <a:spLocks noGrp="1"/>
-          </p:cNvSpPr>
-          <p:nvPr>
-            <p:ph type="title"/>
-          </p:nvPr>
-        </p:nvSpPr>
-        <p:spPr/>
-        <p:txBody>
-          <a:bodyPr/>
-          <a:lstStyle/>
-          <a:p>
-            <a:endParaRPr lang="cs-CZ"/>
-          </a:p>
-        </p:txBody>
-      </p:sp>
-      <p:sp>
-        <p:nvSpPr>
-          <p:cNvPr id="3" name="Zástupný obsah 2">
-            <a:extLst>
-              <a:ext uri="{FF2B5EF4-FFF2-40B4-BE49-F238E27FC236}">
-                <a16:creationId xmlns:a16="http://schemas.microsoft.com/office/drawing/2014/main" id="{C3E84254-C7A4-476B-9B54-6ACBD0F598A1}"/>
-              </a:ext>
-            </a:extLst>
-          </p:cNvPr>
-          <p:cNvSpPr>
-            <a:spLocks noGrp="1"/>
-          </p:cNvSpPr>
-          <p:nvPr>
-            <p:ph idx="1"/>
-          </p:nvPr>
-        </p:nvSpPr>
-        <p:spPr/>
-        <p:txBody>
-          <a:bodyPr/>
-          <a:lstStyle/>
-          <a:p>
-            <a:endParaRPr lang="cs-CZ"/>
-          </a:p>
-        </p:txBody>
-      </p:sp>
-      <p:pic>
-        <p:nvPicPr>
-          <p:cNvPr id="5" name="Obrázek 4">
-            <a:extLst>
-              <a:ext uri="{FF2B5EF4-FFF2-40B4-BE49-F238E27FC236}">
-                <a16:creationId xmlns:a16="http://schemas.microsoft.com/office/drawing/2014/main" id="{C79F264A-C9A2-4319-AFF6-63D903C2AEF5}"/>
-              </a:ext>
-            </a:extLst>
-          </p:cNvPr>
-          <p:cNvPicPr>
-            <a:picLocks noChangeAspect="1"/>
-          </p:cNvPicPr>
-          <p:nvPr/>
-        </p:nvPicPr>
-        <p:blipFill>
-          <a:blip r:embed="rId2"/>
-          <a:stretch>
-            <a:fillRect/>
-          </a:stretch>
-        </p:blipFill>
-        <p:spPr>
-          <a:xfrm>
-            <a:off x="0" y="180180"/>
-            <a:ext cx="12192000" cy="6497640"/>
-          </a:xfrm>
-          <a:prstGeom prst="rect">
-            <a:avLst/>
-          </a:prstGeom>
-        </p:spPr>
-      </p:pic>
-      <p:sp>
-        <p:nvSpPr>
-          <p:cNvPr id="6" name="TextovéPole 5">
-            <a:extLst>
-              <a:ext uri="{FF2B5EF4-FFF2-40B4-BE49-F238E27FC236}">
-                <a16:creationId xmlns:a16="http://schemas.microsoft.com/office/drawing/2014/main" id="{5A0DCFF4-2BC8-48E4-A716-4CD4CA2E5819}"/>
-              </a:ext>
-            </a:extLst>
-          </p:cNvPr>
-          <p:cNvSpPr txBox="1"/>
-          <p:nvPr/>
-        </p:nvSpPr>
-        <p:spPr>
-          <a:xfrm>
-            <a:off x="4999892" y="2964906"/>
-            <a:ext cx="4848665" cy="2308324"/>
-          </a:xfrm>
-          <a:prstGeom prst="rect">
-            <a:avLst/>
-          </a:prstGeom>
-        </p:spPr>
-        <p:style>
-          <a:lnRef idx="2">
-            <a:schemeClr val="accent2">
-              <a:shade val="50000"/>
-            </a:schemeClr>
-          </a:lnRef>
-          <a:fillRef idx="1">
-            <a:schemeClr val="accent2"/>
-          </a:fillRef>
-          <a:effectRef idx="0">
-            <a:schemeClr val="accent2"/>
-          </a:effectRef>
-          <a:fontRef idx="minor">
-            <a:schemeClr val="lt1"/>
-          </a:fontRef>
-        </p:style>
-        <p:txBody>
-          <a:bodyPr wrap="square" rtlCol="0">
-            <a:spAutoFit/>
-          </a:bodyPr>
-          <a:lstStyle/>
-          <a:p>
-            <a:r>
-              <a:rPr lang="cs-CZ" dirty="0"/>
-              <a:t>A můžeme se vrhnout na ukládání dat do souboru. V tomto případě nám bude stačit zápis dat na konec souboru, k čemuž můžeme využít jednoduchou funkci </a:t>
-            </a:r>
-            <a:r>
-              <a:rPr lang="cs-CZ" b="1" dirty="0" err="1"/>
-              <a:t>file_put_contents</a:t>
-            </a:r>
-            <a:r>
-              <a:rPr lang="cs-CZ" dirty="0"/>
-              <a:t>. </a:t>
-            </a:r>
-          </a:p>
-          <a:p>
-            <a:endParaRPr lang="cs-CZ" dirty="0"/>
-          </a:p>
-          <a:p>
-            <a:r>
-              <a:rPr lang="cs-CZ" dirty="0">
-                <a:solidFill>
-                  <a:srgbClr val="FFFF00"/>
-                </a:solidFill>
-              </a:rPr>
-              <a:t>Podívejme se na tuto funkci do PHP manuálu. </a:t>
-            </a:r>
-            <a:r>
-              <a:rPr lang="cs-CZ" dirty="0"/>
-              <a:t>Umožňuje buď zapsat celý obsah souboru, nebo jen připojit obsah na jeho konec.</a:t>
-            </a:r>
-          </a:p>
-        </p:txBody>
-      </p:sp>
-    </p:spTree>
-    <p:extLst>
-      <p:ext uri="{BB962C8B-B14F-4D97-AF65-F5344CB8AC3E}">
-        <p14:creationId xmlns:p14="http://schemas.microsoft.com/office/powerpoint/2010/main" val="2685277356"/>
-      </p:ext>
-    </p:extLst>
-  </p:cSld>
-  <p:clrMapOvr>
-    <a:masterClrMapping/>
-  </p:clrMapOvr>
-</p:sld>
-</file>
-
-<file path=ppt/slides/slide19.xml><?xml version="1.0" encoding="utf-8"?>
-<p:sld xmlns:a="http://schemas.openxmlformats.org/drawingml/2006/main" xmlns:r="http://schemas.openxmlformats.org/officeDocument/2006/relationships" xmlns:p="http://schemas.openxmlformats.org/presentationml/2006/main">
-  <p:cSld>
-    <p:spTree>
-      <p:nvGrpSpPr>
-        <p:cNvPr id="1" name=""/>
-        <p:cNvGrpSpPr/>
-        <p:nvPr/>
-      </p:nvGrpSpPr>
-      <p:grpSpPr>
-        <a:xfrm>
-          <a:off x="0" y="0"/>
-          <a:ext cx="0" cy="0"/>
-          <a:chOff x="0" y="0"/>
-          <a:chExt cx="0" cy="0"/>
-        </a:xfrm>
-      </p:grpSpPr>
-      <p:sp>
-        <p:nvSpPr>
-          <p:cNvPr id="2" name="Nadpis 1">
-            <a:extLst>
-              <a:ext uri="{FF2B5EF4-FFF2-40B4-BE49-F238E27FC236}">
-                <a16:creationId xmlns:a16="http://schemas.microsoft.com/office/drawing/2014/main" id="{66E927AD-C8FD-4986-84C1-B5047CCA8A91}"/>
-              </a:ext>
-            </a:extLst>
-          </p:cNvPr>
-          <p:cNvSpPr>
-            <a:spLocks noGrp="1"/>
-          </p:cNvSpPr>
-          <p:nvPr>
-            <p:ph type="title"/>
-          </p:nvPr>
-        </p:nvSpPr>
-        <p:spPr/>
-        <p:txBody>
-          <a:bodyPr/>
-          <a:lstStyle/>
-          <a:p>
-            <a:endParaRPr lang="cs-CZ"/>
-          </a:p>
-        </p:txBody>
-      </p:sp>
-      <p:sp>
-        <p:nvSpPr>
-          <p:cNvPr id="3" name="Zástupný obsah 2">
-            <a:extLst>
-              <a:ext uri="{FF2B5EF4-FFF2-40B4-BE49-F238E27FC236}">
-                <a16:creationId xmlns:a16="http://schemas.microsoft.com/office/drawing/2014/main" id="{4674EA62-9FDF-49BC-874C-C0F33AC853B6}"/>
-              </a:ext>
-            </a:extLst>
-          </p:cNvPr>
-          <p:cNvSpPr>
-            <a:spLocks noGrp="1"/>
-          </p:cNvSpPr>
-          <p:nvPr>
-            <p:ph idx="1"/>
-          </p:nvPr>
-        </p:nvSpPr>
-        <p:spPr/>
-        <p:txBody>
-          <a:bodyPr/>
-          <a:lstStyle/>
-          <a:p>
-            <a:endParaRPr lang="cs-CZ"/>
-          </a:p>
-        </p:txBody>
-      </p:sp>
-      <p:pic>
-        <p:nvPicPr>
-          <p:cNvPr id="5" name="Obrázek 4">
-            <a:extLst>
-              <a:ext uri="{FF2B5EF4-FFF2-40B4-BE49-F238E27FC236}">
-                <a16:creationId xmlns:a16="http://schemas.microsoft.com/office/drawing/2014/main" id="{EFE60BC4-255B-424B-993C-2E4385FC5AC1}"/>
-              </a:ext>
-            </a:extLst>
-          </p:cNvPr>
-          <p:cNvPicPr>
-            <a:picLocks noChangeAspect="1"/>
-          </p:cNvPicPr>
-          <p:nvPr/>
-        </p:nvPicPr>
-        <p:blipFill>
-          <a:blip r:embed="rId2"/>
-          <a:stretch>
-            <a:fillRect/>
-          </a:stretch>
-        </p:blipFill>
-        <p:spPr>
-          <a:xfrm>
-            <a:off x="0" y="180180"/>
-            <a:ext cx="12192000" cy="6497640"/>
-          </a:xfrm>
-          <a:prstGeom prst="rect">
-            <a:avLst/>
-          </a:prstGeom>
-        </p:spPr>
-      </p:pic>
-      <p:sp>
-        <p:nvSpPr>
-          <p:cNvPr id="7" name="TextovéPole 6">
-            <a:extLst>
-              <a:ext uri="{FF2B5EF4-FFF2-40B4-BE49-F238E27FC236}">
-                <a16:creationId xmlns:a16="http://schemas.microsoft.com/office/drawing/2014/main" id="{243C9372-90E8-4DA7-8C76-567D15888267}"/>
-              </a:ext>
-            </a:extLst>
-          </p:cNvPr>
-          <p:cNvSpPr txBox="1"/>
-          <p:nvPr/>
-        </p:nvSpPr>
-        <p:spPr>
-          <a:xfrm>
-            <a:off x="7196238" y="1117836"/>
-            <a:ext cx="4848665" cy="2585323"/>
-          </a:xfrm>
-          <a:prstGeom prst="rect">
-            <a:avLst/>
-          </a:prstGeom>
-        </p:spPr>
-        <p:style>
-          <a:lnRef idx="2">
-            <a:schemeClr val="accent2">
-              <a:shade val="50000"/>
-            </a:schemeClr>
-          </a:lnRef>
-          <a:fillRef idx="1">
-            <a:schemeClr val="accent2"/>
-          </a:fillRef>
-          <a:effectRef idx="0">
-            <a:schemeClr val="accent2"/>
-          </a:effectRef>
-          <a:fontRef idx="minor">
-            <a:schemeClr val="lt1"/>
-          </a:fontRef>
-        </p:style>
-        <p:txBody>
-          <a:bodyPr wrap="square" rtlCol="0">
-            <a:spAutoFit/>
-          </a:bodyPr>
-          <a:lstStyle/>
-          <a:p>
-            <a:r>
-              <a:rPr lang="cs-CZ" dirty="0"/>
-              <a:t>Na konec souboru prispevky.html zapíšeme obsah příspěvku, který jsme sestavili na základě dat z formuláře.</a:t>
-            </a:r>
-          </a:p>
-          <a:p>
-            <a:endParaRPr lang="cs-CZ" dirty="0"/>
-          </a:p>
-          <a:p>
-            <a:r>
-              <a:rPr lang="cs-CZ" dirty="0"/>
-              <a:t>Konstanta </a:t>
-            </a:r>
-            <a:r>
-              <a:rPr lang="en-US" dirty="0"/>
-              <a:t>__DIR__ </a:t>
-            </a:r>
-            <a:r>
-              <a:rPr lang="en-US" dirty="0" err="1"/>
-              <a:t>obsahuje</a:t>
-            </a:r>
-            <a:r>
-              <a:rPr lang="en-US" dirty="0"/>
-              <a:t> </a:t>
-            </a:r>
-            <a:r>
-              <a:rPr lang="en-US" dirty="0" err="1"/>
-              <a:t>cestu</a:t>
-            </a:r>
-            <a:r>
-              <a:rPr lang="en-US" dirty="0"/>
-              <a:t> k </a:t>
-            </a:r>
-            <a:r>
-              <a:rPr lang="en-US" dirty="0" err="1"/>
-              <a:t>adres</a:t>
-            </a:r>
-            <a:r>
-              <a:rPr lang="cs-CZ" dirty="0" err="1"/>
-              <a:t>áři</a:t>
-            </a:r>
-            <a:r>
-              <a:rPr lang="cs-CZ" dirty="0"/>
-              <a:t>, ve kterém je umístěn aktuální PHP soubor.</a:t>
-            </a:r>
-          </a:p>
-          <a:p>
-            <a:endParaRPr lang="cs-CZ" dirty="0"/>
-          </a:p>
-          <a:p>
-            <a:r>
-              <a:rPr lang="cs-CZ" dirty="0"/>
-              <a:t>Konstanta FILE_APPEND zařídí, že připojujeme obsah až na konec souboru.</a:t>
-            </a:r>
-          </a:p>
-        </p:txBody>
-      </p:sp>
-      <p:sp>
-        <p:nvSpPr>
-          <p:cNvPr id="8" name="Obdélník 7">
-            <a:extLst>
-              <a:ext uri="{FF2B5EF4-FFF2-40B4-BE49-F238E27FC236}">
-                <a16:creationId xmlns:a16="http://schemas.microsoft.com/office/drawing/2014/main" id="{35F49B52-434D-4D90-8DD0-1149BF293EAE}"/>
-              </a:ext>
-            </a:extLst>
-          </p:cNvPr>
-          <p:cNvSpPr/>
-          <p:nvPr/>
-        </p:nvSpPr>
-        <p:spPr>
-          <a:xfrm>
-            <a:off x="3566215" y="3838096"/>
-            <a:ext cx="4503728" cy="429104"/>
-          </a:xfrm>
-          <a:prstGeom prst="rect">
-            <a:avLst/>
-          </a:prstGeom>
-          <a:noFill/>
-          <a:ln w="38100"/>
-        </p:spPr>
-        <p:style>
-          <a:lnRef idx="2">
-            <a:schemeClr val="accent2"/>
-          </a:lnRef>
-          <a:fillRef idx="1">
-            <a:schemeClr val="lt1"/>
-          </a:fillRef>
-          <a:effectRef idx="0">
-            <a:schemeClr val="accent2"/>
-          </a:effectRef>
-          <a:fontRef idx="minor">
-            <a:schemeClr val="dk1"/>
-          </a:fontRef>
-        </p:style>
-        <p:txBody>
-          <a:bodyPr rtlCol="0" anchor="ctr"/>
-          <a:lstStyle/>
-          <a:p>
-            <a:pPr algn="ctr"/>
-            <a:endParaRPr lang="cs-CZ"/>
-          </a:p>
-        </p:txBody>
-      </p:sp>
-    </p:spTree>
-    <p:extLst>
-      <p:ext uri="{BB962C8B-B14F-4D97-AF65-F5344CB8AC3E}">
-        <p14:creationId xmlns:p14="http://schemas.microsoft.com/office/powerpoint/2010/main" val="948595301"/>
+        <p14:creationId xmlns:p14="http://schemas.microsoft.com/office/powerpoint/2010/main" val="424752656"/>
       </p:ext>
     </p:extLst>
   </p:cSld>
@@ -6000,7 +4953,7 @@
           <p:cNvPr id="2" name="Nadpis 1">
             <a:extLst>
               <a:ext uri="{FF2B5EF4-FFF2-40B4-BE49-F238E27FC236}">
-                <a16:creationId xmlns:a16="http://schemas.microsoft.com/office/drawing/2014/main" id="{0803039A-6027-4BC9-8DA4-0930AE36E65B}"/>
+                <a16:creationId xmlns:a16="http://schemas.microsoft.com/office/drawing/2014/main" id="{89B796DD-C40B-8C85-7967-951A07C5E0AB}"/>
               </a:ext>
             </a:extLst>
           </p:cNvPr>
@@ -6016,7 +4969,26 @@
           <a:bodyPr/>
           <a:lstStyle/>
           <a:p>
-            <a:endParaRPr lang="cs-CZ"/>
+            <a:r>
+              <a:rPr lang="en-US" dirty="0"/>
+              <a:t>Co </a:t>
+            </a:r>
+            <a:r>
+              <a:rPr lang="en-US" dirty="0" err="1"/>
+              <a:t>budeme</a:t>
+            </a:r>
+            <a:r>
+              <a:rPr lang="en-US" dirty="0"/>
+              <a:t> d</a:t>
+            </a:r>
+            <a:r>
+              <a:rPr lang="cs-CZ" dirty="0" err="1"/>
+              <a:t>ělat</a:t>
+            </a:r>
+            <a:r>
+              <a:rPr lang="cs-CZ" dirty="0"/>
+              <a:t>?</a:t>
+            </a:r>
           </a:p>
         </p:txBody>
       </p:sp>
@@ -6025,7 +4997,7 @@
           <p:cNvPr id="3" name="Zástupný obsah 2">
             <a:extLst>
               <a:ext uri="{FF2B5EF4-FFF2-40B4-BE49-F238E27FC236}">
-                <a16:creationId xmlns:a16="http://schemas.microsoft.com/office/drawing/2014/main" id="{D66B0A93-B04C-4DA4-8874-8DB31DEBE0E9}"/>
+                <a16:creationId xmlns:a16="http://schemas.microsoft.com/office/drawing/2014/main" id="{E4459835-8EAD-58E0-A6F9-BA7F299B0668}"/>
               </a:ext>
             </a:extLst>
           </p:cNvPr>
@@ -6041,171 +5013,35 @@
           <a:bodyPr/>
           <a:lstStyle/>
           <a:p>
-            <a:endParaRPr lang="cs-CZ"/>
-          </a:p>
-        </p:txBody>
-      </p:sp>
-      <p:pic>
-        <p:nvPicPr>
-          <p:cNvPr id="5" name="Obrázek 4">
-            <a:extLst>
-              <a:ext uri="{FF2B5EF4-FFF2-40B4-BE49-F238E27FC236}">
-                <a16:creationId xmlns:a16="http://schemas.microsoft.com/office/drawing/2014/main" id="{F04DEC54-BB04-454F-B8C2-5BD5D769E50A}"/>
-              </a:ext>
-            </a:extLst>
-          </p:cNvPr>
-          <p:cNvPicPr>
-            <a:picLocks noChangeAspect="1"/>
-          </p:cNvPicPr>
-          <p:nvPr/>
-        </p:nvPicPr>
-        <p:blipFill>
-          <a:blip r:embed="rId2"/>
-          <a:stretch>
-            <a:fillRect/>
-          </a:stretch>
-        </p:blipFill>
-        <p:spPr>
-          <a:xfrm>
-            <a:off x="0" y="180180"/>
-            <a:ext cx="12192000" cy="6497640"/>
-          </a:xfrm>
-          <a:prstGeom prst="rect">
-            <a:avLst/>
-          </a:prstGeom>
-        </p:spPr>
-      </p:pic>
-      <p:pic>
-        <p:nvPicPr>
-          <p:cNvPr id="7" name="Obrázek 6">
-            <a:extLst>
-              <a:ext uri="{FF2B5EF4-FFF2-40B4-BE49-F238E27FC236}">
-                <a16:creationId xmlns:a16="http://schemas.microsoft.com/office/drawing/2014/main" id="{2E05B5CF-267C-4A32-B7EC-97771C823237}"/>
-              </a:ext>
-            </a:extLst>
-          </p:cNvPr>
-          <p:cNvPicPr>
-            <a:picLocks noChangeAspect="1"/>
-          </p:cNvPicPr>
-          <p:nvPr/>
-        </p:nvPicPr>
-        <p:blipFill>
-          <a:blip r:embed="rId2"/>
-          <a:stretch>
-            <a:fillRect/>
-          </a:stretch>
-        </p:blipFill>
-        <p:spPr>
-          <a:xfrm>
-            <a:off x="0" y="180180"/>
-            <a:ext cx="12192000" cy="6497640"/>
-          </a:xfrm>
-          <a:prstGeom prst="rect">
-            <a:avLst/>
-          </a:prstGeom>
-        </p:spPr>
-      </p:pic>
-      <p:sp>
-        <p:nvSpPr>
-          <p:cNvPr id="8" name="TextovéPole 7">
-            <a:extLst>
-              <a:ext uri="{FF2B5EF4-FFF2-40B4-BE49-F238E27FC236}">
-                <a16:creationId xmlns:a16="http://schemas.microsoft.com/office/drawing/2014/main" id="{8F465A8B-4B6E-40F4-8479-7BD9C4E084E8}"/>
-              </a:ext>
-            </a:extLst>
-          </p:cNvPr>
-          <p:cNvSpPr txBox="1"/>
-          <p:nvPr/>
-        </p:nvSpPr>
-        <p:spPr>
-          <a:xfrm>
-            <a:off x="6879102" y="3591640"/>
-            <a:ext cx="5134707" cy="2585323"/>
-          </a:xfrm>
-          <a:prstGeom prst="rect">
-            <a:avLst/>
-          </a:prstGeom>
-        </p:spPr>
-        <p:style>
-          <a:lnRef idx="2">
-            <a:schemeClr val="accent2">
-              <a:shade val="50000"/>
-            </a:schemeClr>
-          </a:lnRef>
-          <a:fillRef idx="1">
-            <a:schemeClr val="accent2"/>
-          </a:fillRef>
-          <a:effectRef idx="0">
-            <a:schemeClr val="accent2"/>
-          </a:effectRef>
-          <a:fontRef idx="minor">
-            <a:schemeClr val="lt1"/>
-          </a:fontRef>
-        </p:style>
-        <p:txBody>
-          <a:bodyPr wrap="square" rtlCol="0">
-            <a:spAutoFit/>
-          </a:bodyPr>
-          <a:lstStyle/>
-          <a:p>
+            <a:pPr marL="0" indent="0">
+              <a:buNone/>
+            </a:pPr>
             <a:r>
               <a:rPr lang="cs-CZ" dirty="0"/>
-              <a:t>Začneme vytvořením prázdného HTML souboru,  do kterého jsme zatím doplnili jen nadpis a uložíme jej pod názvem </a:t>
+              <a:t>Vytvoříme si </a:t>
             </a:r>
             <a:r>
               <a:rPr lang="cs-CZ" dirty="0" err="1"/>
-              <a:t>index.php</a:t>
+              <a:t>jednoduchu</a:t>
             </a:r>
             <a:r>
               <a:rPr lang="cs-CZ" dirty="0"/>
-              <a:t>.</a:t>
-            </a:r>
-          </a:p>
-          <a:p>
+              <a:t> aplikaci, pomocí které budou moci uživatelé psát vzkazy na náš vlastní web.</a:t>
+            </a:r>
+          </a:p>
+          <a:p>
+            <a:pPr marL="0" indent="0">
+              <a:buNone/>
+            </a:pPr>
             <a:endParaRPr lang="cs-CZ" dirty="0"/>
           </a:p>
           <a:p>
+            <a:pPr marL="0" indent="0">
+              <a:buNone/>
+            </a:pPr>
             <a:r>
               <a:rPr lang="cs-CZ" dirty="0"/>
-              <a:t>Následně soubor nahrajeme do samostatného podadresáře ve svém profilu na eso.vse.cz.</a:t>
-            </a:r>
-          </a:p>
-          <a:p>
-            <a:r>
-              <a:rPr lang="cs-CZ" dirty="0"/>
-              <a:t>Doporučuji nastavit </a:t>
-            </a:r>
-            <a:r>
-              <a:rPr lang="cs-CZ" dirty="0" err="1"/>
-              <a:t>deployment</a:t>
-            </a:r>
-            <a:r>
-              <a:rPr lang="cs-CZ" dirty="0"/>
-              <a:t> v rámci </a:t>
-            </a:r>
-            <a:r>
-              <a:rPr lang="cs-CZ" dirty="0" err="1"/>
-              <a:t>phpStormu</a:t>
-            </a:r>
-            <a:r>
-              <a:rPr lang="cs-CZ" dirty="0"/>
-              <a:t>, ale můžete samozřejmě použít také např. </a:t>
-            </a:r>
-            <a:r>
-              <a:rPr lang="cs-CZ" dirty="0" err="1"/>
-              <a:t>WinSCP</a:t>
-            </a:r>
-            <a:r>
-              <a:rPr lang="cs-CZ" dirty="0"/>
-              <a:t>, </a:t>
-            </a:r>
-            <a:r>
-              <a:rPr lang="cs-CZ" dirty="0" err="1"/>
-              <a:t>FileZillu</a:t>
-            </a:r>
-            <a:r>
-              <a:rPr lang="cs-CZ" dirty="0"/>
-              <a:t> atp.</a:t>
+              <a:t>Vzkazy budou ukládány v souboru, který poté vložíme do naší vlastní stránky.</a:t>
             </a:r>
           </a:p>
         </p:txBody>
@@ -6213,389 +5049,7 @@
     </p:spTree>
     <p:extLst>
       <p:ext uri="{BB962C8B-B14F-4D97-AF65-F5344CB8AC3E}">
-        <p14:creationId xmlns:p14="http://schemas.microsoft.com/office/powerpoint/2010/main" val="2789740062"/>
-      </p:ext>
-    </p:extLst>
-  </p:cSld>
-  <p:clrMapOvr>
-    <a:masterClrMapping/>
-  </p:clrMapOvr>
-</p:sld>
-</file>
-
-<file path=ppt/slides/slide20.xml><?xml version="1.0" encoding="utf-8"?>
-<p:sld xmlns:a="http://schemas.openxmlformats.org/drawingml/2006/main" xmlns:r="http://schemas.openxmlformats.org/officeDocument/2006/relationships" xmlns:p="http://schemas.openxmlformats.org/presentationml/2006/main">
-  <p:cSld>
-    <p:spTree>
-      <p:nvGrpSpPr>
-        <p:cNvPr id="1" name=""/>
-        <p:cNvGrpSpPr/>
-        <p:nvPr/>
-      </p:nvGrpSpPr>
-      <p:grpSpPr>
-        <a:xfrm>
-          <a:off x="0" y="0"/>
-          <a:ext cx="0" cy="0"/>
-          <a:chOff x="0" y="0"/>
-          <a:chExt cx="0" cy="0"/>
-        </a:xfrm>
-      </p:grpSpPr>
-      <p:sp>
-        <p:nvSpPr>
-          <p:cNvPr id="2" name="Nadpis 1">
-            <a:extLst>
-              <a:ext uri="{FF2B5EF4-FFF2-40B4-BE49-F238E27FC236}">
-                <a16:creationId xmlns:a16="http://schemas.microsoft.com/office/drawing/2014/main" id="{9C2790D7-31B0-4091-AFF5-5D003F4D4B68}"/>
-              </a:ext>
-            </a:extLst>
-          </p:cNvPr>
-          <p:cNvSpPr>
-            <a:spLocks noGrp="1"/>
-          </p:cNvSpPr>
-          <p:nvPr>
-            <p:ph type="title"/>
-          </p:nvPr>
-        </p:nvSpPr>
-        <p:spPr/>
-        <p:txBody>
-          <a:bodyPr/>
-          <a:lstStyle/>
-          <a:p>
-            <a:endParaRPr lang="cs-CZ"/>
-          </a:p>
-        </p:txBody>
-      </p:sp>
-      <p:sp>
-        <p:nvSpPr>
-          <p:cNvPr id="3" name="Zástupný obsah 2">
-            <a:extLst>
-              <a:ext uri="{FF2B5EF4-FFF2-40B4-BE49-F238E27FC236}">
-                <a16:creationId xmlns:a16="http://schemas.microsoft.com/office/drawing/2014/main" id="{3F07A9EC-57EA-44BD-9251-DF9B0C213CC7}"/>
-              </a:ext>
-            </a:extLst>
-          </p:cNvPr>
-          <p:cNvSpPr>
-            <a:spLocks noGrp="1"/>
-          </p:cNvSpPr>
-          <p:nvPr>
-            <p:ph idx="1"/>
-          </p:nvPr>
-        </p:nvSpPr>
-        <p:spPr/>
-        <p:txBody>
-          <a:bodyPr/>
-          <a:lstStyle/>
-          <a:p>
-            <a:endParaRPr lang="cs-CZ"/>
-          </a:p>
-        </p:txBody>
-      </p:sp>
-      <p:pic>
-        <p:nvPicPr>
-          <p:cNvPr id="5" name="Obrázek 4">
-            <a:extLst>
-              <a:ext uri="{FF2B5EF4-FFF2-40B4-BE49-F238E27FC236}">
-                <a16:creationId xmlns:a16="http://schemas.microsoft.com/office/drawing/2014/main" id="{4CF00FD5-AD54-429B-8319-8947ECB5BD76}"/>
-              </a:ext>
-            </a:extLst>
-          </p:cNvPr>
-          <p:cNvPicPr>
-            <a:picLocks noChangeAspect="1"/>
-          </p:cNvPicPr>
-          <p:nvPr/>
-        </p:nvPicPr>
-        <p:blipFill>
-          <a:blip r:embed="rId2"/>
-          <a:stretch>
-            <a:fillRect/>
-          </a:stretch>
-        </p:blipFill>
-        <p:spPr>
-          <a:xfrm>
-            <a:off x="0" y="180180"/>
-            <a:ext cx="12192000" cy="6497640"/>
-          </a:xfrm>
-          <a:prstGeom prst="rect">
-            <a:avLst/>
-          </a:prstGeom>
-        </p:spPr>
-      </p:pic>
-      <p:sp>
-        <p:nvSpPr>
-          <p:cNvPr id="6" name="Obdélník 5">
-            <a:extLst>
-              <a:ext uri="{FF2B5EF4-FFF2-40B4-BE49-F238E27FC236}">
-                <a16:creationId xmlns:a16="http://schemas.microsoft.com/office/drawing/2014/main" id="{54E49F33-4DC9-467F-9B06-BDA477773A07}"/>
-              </a:ext>
-            </a:extLst>
-          </p:cNvPr>
-          <p:cNvSpPr/>
-          <p:nvPr/>
-        </p:nvSpPr>
-        <p:spPr>
-          <a:xfrm>
-            <a:off x="3421966" y="3632695"/>
-            <a:ext cx="2528668" cy="615748"/>
-          </a:xfrm>
-          <a:prstGeom prst="rect">
-            <a:avLst/>
-          </a:prstGeom>
-          <a:noFill/>
-          <a:ln w="38100"/>
-        </p:spPr>
-        <p:style>
-          <a:lnRef idx="2">
-            <a:schemeClr val="accent2"/>
-          </a:lnRef>
-          <a:fillRef idx="1">
-            <a:schemeClr val="lt1"/>
-          </a:fillRef>
-          <a:effectRef idx="0">
-            <a:schemeClr val="accent2"/>
-          </a:effectRef>
-          <a:fontRef idx="minor">
-            <a:schemeClr val="dk1"/>
-          </a:fontRef>
-        </p:style>
-        <p:txBody>
-          <a:bodyPr rtlCol="0" anchor="ctr"/>
-          <a:lstStyle/>
-          <a:p>
-            <a:pPr algn="ctr"/>
-            <a:endParaRPr lang="cs-CZ"/>
-          </a:p>
-        </p:txBody>
-      </p:sp>
-      <p:sp>
-        <p:nvSpPr>
-          <p:cNvPr id="7" name="TextovéPole 6">
-            <a:extLst>
-              <a:ext uri="{FF2B5EF4-FFF2-40B4-BE49-F238E27FC236}">
-                <a16:creationId xmlns:a16="http://schemas.microsoft.com/office/drawing/2014/main" id="{B973BF37-19AB-4A58-9A2C-3FB672B8D6AB}"/>
-              </a:ext>
-            </a:extLst>
-          </p:cNvPr>
-          <p:cNvSpPr txBox="1"/>
-          <p:nvPr/>
-        </p:nvSpPr>
-        <p:spPr>
-          <a:xfrm>
-            <a:off x="6227884" y="3340404"/>
-            <a:ext cx="4848665" cy="1200329"/>
-          </a:xfrm>
-          <a:prstGeom prst="rect">
-            <a:avLst/>
-          </a:prstGeom>
-        </p:spPr>
-        <p:style>
-          <a:lnRef idx="2">
-            <a:schemeClr val="accent2">
-              <a:shade val="50000"/>
-            </a:schemeClr>
-          </a:lnRef>
-          <a:fillRef idx="1">
-            <a:schemeClr val="accent2"/>
-          </a:fillRef>
-          <a:effectRef idx="0">
-            <a:schemeClr val="accent2"/>
-          </a:effectRef>
-          <a:fontRef idx="minor">
-            <a:schemeClr val="lt1"/>
-          </a:fontRef>
-        </p:style>
-        <p:txBody>
-          <a:bodyPr wrap="square" rtlCol="0">
-            <a:spAutoFit/>
-          </a:bodyPr>
-          <a:lstStyle/>
-          <a:p>
-            <a:r>
-              <a:rPr lang="cs-CZ" dirty="0"/>
-              <a:t>Vložení obsahu souboru prispevky.html do stránky již bude velmi jednoduché. Jelikož v něm máme připravený kompletní HTML, můžeme soubor jen načíst příkazem </a:t>
-            </a:r>
-            <a:r>
-              <a:rPr lang="cs-CZ" b="1" dirty="0" err="1"/>
-              <a:t>include</a:t>
-            </a:r>
-            <a:r>
-              <a:rPr lang="cs-CZ" dirty="0"/>
-              <a:t> (či případně </a:t>
-            </a:r>
-            <a:r>
-              <a:rPr lang="cs-CZ" b="1" dirty="0" err="1"/>
-              <a:t>require</a:t>
-            </a:r>
-            <a:r>
-              <a:rPr lang="cs-CZ" dirty="0"/>
-              <a:t>).</a:t>
-            </a:r>
-          </a:p>
-        </p:txBody>
-      </p:sp>
-    </p:spTree>
-    <p:extLst>
-      <p:ext uri="{BB962C8B-B14F-4D97-AF65-F5344CB8AC3E}">
-        <p14:creationId xmlns:p14="http://schemas.microsoft.com/office/powerpoint/2010/main" val="328733576"/>
-      </p:ext>
-    </p:extLst>
-  </p:cSld>
-  <p:clrMapOvr>
-    <a:masterClrMapping/>
-  </p:clrMapOvr>
-</p:sld>
-</file>
-
-<file path=ppt/slides/slide21.xml><?xml version="1.0" encoding="utf-8"?>
-<p:sld xmlns:a="http://schemas.openxmlformats.org/drawingml/2006/main" xmlns:r="http://schemas.openxmlformats.org/officeDocument/2006/relationships" xmlns:p="http://schemas.openxmlformats.org/presentationml/2006/main">
-  <p:cSld>
-    <p:spTree>
-      <p:nvGrpSpPr>
-        <p:cNvPr id="1" name=""/>
-        <p:cNvGrpSpPr/>
-        <p:nvPr/>
-      </p:nvGrpSpPr>
-      <p:grpSpPr>
-        <a:xfrm>
-          <a:off x="0" y="0"/>
-          <a:ext cx="0" cy="0"/>
-          <a:chOff x="0" y="0"/>
-          <a:chExt cx="0" cy="0"/>
-        </a:xfrm>
-      </p:grpSpPr>
-      <p:sp>
-        <p:nvSpPr>
-          <p:cNvPr id="2" name="Nadpis 1">
-            <a:extLst>
-              <a:ext uri="{FF2B5EF4-FFF2-40B4-BE49-F238E27FC236}">
-                <a16:creationId xmlns:a16="http://schemas.microsoft.com/office/drawing/2014/main" id="{D5EDAD74-68A5-4618-948C-3CE07650A1A8}"/>
-              </a:ext>
-            </a:extLst>
-          </p:cNvPr>
-          <p:cNvSpPr>
-            <a:spLocks noGrp="1"/>
-          </p:cNvSpPr>
-          <p:nvPr>
-            <p:ph type="title"/>
-          </p:nvPr>
-        </p:nvSpPr>
-        <p:spPr/>
-        <p:txBody>
-          <a:bodyPr/>
-          <a:lstStyle/>
-          <a:p>
-            <a:endParaRPr lang="cs-CZ"/>
-          </a:p>
-        </p:txBody>
-      </p:sp>
-      <p:sp>
-        <p:nvSpPr>
-          <p:cNvPr id="3" name="Zástupný obsah 2">
-            <a:extLst>
-              <a:ext uri="{FF2B5EF4-FFF2-40B4-BE49-F238E27FC236}">
-                <a16:creationId xmlns:a16="http://schemas.microsoft.com/office/drawing/2014/main" id="{7D0DBAE6-AC78-4071-9504-857671BB355B}"/>
-              </a:ext>
-            </a:extLst>
-          </p:cNvPr>
-          <p:cNvSpPr>
-            <a:spLocks noGrp="1"/>
-          </p:cNvSpPr>
-          <p:nvPr>
-            <p:ph idx="1"/>
-          </p:nvPr>
-        </p:nvSpPr>
-        <p:spPr/>
-        <p:txBody>
-          <a:bodyPr/>
-          <a:lstStyle/>
-          <a:p>
-            <a:endParaRPr lang="cs-CZ"/>
-          </a:p>
-        </p:txBody>
-      </p:sp>
-      <p:pic>
-        <p:nvPicPr>
-          <p:cNvPr id="5" name="Obrázek 4">
-            <a:extLst>
-              <a:ext uri="{FF2B5EF4-FFF2-40B4-BE49-F238E27FC236}">
-                <a16:creationId xmlns:a16="http://schemas.microsoft.com/office/drawing/2014/main" id="{470A4D5E-51D7-400B-B4D9-B85FA580020D}"/>
-              </a:ext>
-            </a:extLst>
-          </p:cNvPr>
-          <p:cNvPicPr>
-            <a:picLocks noChangeAspect="1"/>
-          </p:cNvPicPr>
-          <p:nvPr/>
-        </p:nvPicPr>
-        <p:blipFill>
-          <a:blip r:embed="rId2"/>
-          <a:stretch>
-            <a:fillRect/>
-          </a:stretch>
-        </p:blipFill>
-        <p:spPr>
-          <a:xfrm>
-            <a:off x="0" y="180180"/>
-            <a:ext cx="12192000" cy="6497640"/>
-          </a:xfrm>
-          <a:prstGeom prst="rect">
-            <a:avLst/>
-          </a:prstGeom>
-        </p:spPr>
-      </p:pic>
-      <p:sp>
-        <p:nvSpPr>
-          <p:cNvPr id="6" name="TextovéPole 5">
-            <a:extLst>
-              <a:ext uri="{FF2B5EF4-FFF2-40B4-BE49-F238E27FC236}">
-                <a16:creationId xmlns:a16="http://schemas.microsoft.com/office/drawing/2014/main" id="{7CE2F6A0-9854-4BDD-94AF-8D7159A66C96}"/>
-              </a:ext>
-            </a:extLst>
-          </p:cNvPr>
-          <p:cNvSpPr txBox="1"/>
-          <p:nvPr/>
-        </p:nvSpPr>
-        <p:spPr>
-          <a:xfrm>
-            <a:off x="2654690" y="2299395"/>
-            <a:ext cx="4848665" cy="369332"/>
-          </a:xfrm>
-          <a:prstGeom prst="rect">
-            <a:avLst/>
-          </a:prstGeom>
-        </p:spPr>
-        <p:style>
-          <a:lnRef idx="2">
-            <a:schemeClr val="accent2">
-              <a:shade val="50000"/>
-            </a:schemeClr>
-          </a:lnRef>
-          <a:fillRef idx="1">
-            <a:schemeClr val="accent2"/>
-          </a:fillRef>
-          <a:effectRef idx="0">
-            <a:schemeClr val="accent2"/>
-          </a:effectRef>
-          <a:fontRef idx="minor">
-            <a:schemeClr val="lt1"/>
-          </a:fontRef>
-        </p:style>
-        <p:txBody>
-          <a:bodyPr wrap="square" rtlCol="0">
-            <a:spAutoFit/>
-          </a:bodyPr>
-          <a:lstStyle/>
-          <a:p>
-            <a:r>
-              <a:rPr lang="cs-CZ" dirty="0"/>
-              <a:t>A můžeme vyzkoušet kompletní funkčnost…</a:t>
-            </a:r>
-          </a:p>
-        </p:txBody>
-      </p:sp>
-    </p:spTree>
-    <p:extLst>
-      <p:ext uri="{BB962C8B-B14F-4D97-AF65-F5344CB8AC3E}">
-        <p14:creationId xmlns:p14="http://schemas.microsoft.com/office/powerpoint/2010/main" val="2827849931"/>
+        <p14:creationId xmlns:p14="http://schemas.microsoft.com/office/powerpoint/2010/main" val="3192999365"/>
       </p:ext>
     </p:extLst>
   </p:cSld>
@@ -6627,7 +5081,7 @@
           <p:cNvPr id="2" name="Nadpis 1">
             <a:extLst>
               <a:ext uri="{FF2B5EF4-FFF2-40B4-BE49-F238E27FC236}">
-                <a16:creationId xmlns:a16="http://schemas.microsoft.com/office/drawing/2014/main" id="{0766E645-FB40-47F5-9321-3F14062F1ADF}"/>
+                <a16:creationId xmlns:a16="http://schemas.microsoft.com/office/drawing/2014/main" id="{1B81F503-4410-7B38-6E9C-0BC9F679CFBA}"/>
               </a:ext>
             </a:extLst>
           </p:cNvPr>
@@ -6652,7 +5106,7 @@
           <p:cNvPr id="3" name="Zástupný obsah 2">
             <a:extLst>
               <a:ext uri="{FF2B5EF4-FFF2-40B4-BE49-F238E27FC236}">
-                <a16:creationId xmlns:a16="http://schemas.microsoft.com/office/drawing/2014/main" id="{BD5A1C70-CF6E-4AD3-BF8F-5F07BE689979}"/>
+                <a16:creationId xmlns:a16="http://schemas.microsoft.com/office/drawing/2014/main" id="{E8C0EB74-6B9B-2CC8-4E7B-5A2C876794BF}"/>
               </a:ext>
             </a:extLst>
           </p:cNvPr>
@@ -6677,7 +5131,7 @@
           <p:cNvPr id="5" name="Obrázek 4">
             <a:extLst>
               <a:ext uri="{FF2B5EF4-FFF2-40B4-BE49-F238E27FC236}">
-                <a16:creationId xmlns:a16="http://schemas.microsoft.com/office/drawing/2014/main" id="{5911607A-0BB3-4395-BEEC-EA0CCC275B9D}"/>
+                <a16:creationId xmlns:a16="http://schemas.microsoft.com/office/drawing/2014/main" id="{1910C992-26A9-9129-3B6F-4A782BC92D4F}"/>
               </a:ext>
             </a:extLst>
           </p:cNvPr>
@@ -6704,10 +5158,10 @@
       </p:pic>
       <p:sp>
         <p:nvSpPr>
-          <p:cNvPr id="6" name="TextovéPole 5">
-            <a:extLst>
-              <a:ext uri="{FF2B5EF4-FFF2-40B4-BE49-F238E27FC236}">
-                <a16:creationId xmlns:a16="http://schemas.microsoft.com/office/drawing/2014/main" id="{87603E2E-3F73-4D5A-B4EE-5C1059AD5B34}"/>
+          <p:cNvPr id="4" name="TextovéPole 3">
+            <a:extLst>
+              <a:ext uri="{FF2B5EF4-FFF2-40B4-BE49-F238E27FC236}">
+                <a16:creationId xmlns:a16="http://schemas.microsoft.com/office/drawing/2014/main" id="{AD5F5027-B065-CD58-1872-30FC1CC31FED}"/>
               </a:ext>
             </a:extLst>
           </p:cNvPr>
@@ -6716,23 +5170,21 @@
         </p:nvSpPr>
         <p:spPr>
           <a:xfrm>
-            <a:off x="7805811" y="1229302"/>
-            <a:ext cx="3967089" cy="646331"/>
+            <a:off x="3267559" y="1413968"/>
+            <a:ext cx="5656881" cy="923330"/>
           </a:xfrm>
           <a:prstGeom prst="rect">
             <a:avLst/>
           </a:prstGeom>
         </p:spPr>
         <p:style>
-          <a:lnRef idx="2">
-            <a:schemeClr val="accent2">
-              <a:shade val="50000"/>
-            </a:schemeClr>
+          <a:lnRef idx="3">
+            <a:schemeClr val="lt1"/>
           </a:lnRef>
           <a:fillRef idx="1">
             <a:schemeClr val="accent2"/>
           </a:fillRef>
-          <a:effectRef idx="0">
+          <a:effectRef idx="1">
             <a:schemeClr val="accent2"/>
           </a:effectRef>
           <a:fontRef idx="minor">
@@ -6747,15 +5199,69 @@
           <a:p>
             <a:r>
               <a:rPr lang="cs-CZ" dirty="0"/>
-              <a:t>Nahrání souboru do správné složky ověříme jeho načtením přes prohlížeč.</a:t>
-            </a:r>
+              <a:t>Začneme tím, že si vytvoříme prázdný HTML soubor, který uložíme s příponou PHP. V mém případě </a:t>
+            </a:r>
+            <a:r>
+              <a:rPr lang="cs-CZ" dirty="0" err="1"/>
+              <a:t>kniha.php</a:t>
+            </a:r>
+            <a:r>
+              <a:rPr lang="cs-CZ" dirty="0"/>
+              <a:t>.</a:t>
+            </a:r>
+          </a:p>
+        </p:txBody>
+      </p:sp>
+      <p:sp>
+        <p:nvSpPr>
+          <p:cNvPr id="6" name="Obdélník 5">
+            <a:extLst>
+              <a:ext uri="{FF2B5EF4-FFF2-40B4-BE49-F238E27FC236}">
+                <a16:creationId xmlns:a16="http://schemas.microsoft.com/office/drawing/2014/main" id="{6894B652-A1BB-3C55-FFAB-BF50BCA56412}"/>
+              </a:ext>
+            </a:extLst>
+          </p:cNvPr>
+          <p:cNvSpPr/>
+          <p:nvPr/>
+        </p:nvSpPr>
+        <p:spPr>
+          <a:xfrm>
+            <a:off x="619932" y="945397"/>
+            <a:ext cx="2464231" cy="2371240"/>
+          </a:xfrm>
+          <a:prstGeom prst="rect">
+            <a:avLst/>
+          </a:prstGeom>
+          <a:noFill/>
+          <a:ln w="38100"/>
+        </p:spPr>
+        <p:style>
+          <a:lnRef idx="2">
+            <a:schemeClr val="accent2"/>
+          </a:lnRef>
+          <a:fillRef idx="1">
+            <a:schemeClr val="lt1"/>
+          </a:fillRef>
+          <a:effectRef idx="0">
+            <a:schemeClr val="accent2"/>
+          </a:effectRef>
+          <a:fontRef idx="minor">
+            <a:schemeClr val="dk1"/>
+          </a:fontRef>
+        </p:style>
+        <p:txBody>
+          <a:bodyPr rtlCol="0" anchor="ctr"/>
+          <a:lstStyle/>
+          <a:p>
+            <a:pPr algn="ctr"/>
+            <a:endParaRPr lang="cs-CZ"/>
           </a:p>
         </p:txBody>
       </p:sp>
     </p:spTree>
     <p:extLst>
       <p:ext uri="{BB962C8B-B14F-4D97-AF65-F5344CB8AC3E}">
-        <p14:creationId xmlns:p14="http://schemas.microsoft.com/office/powerpoint/2010/main" val="668445712"/>
+        <p14:creationId xmlns:p14="http://schemas.microsoft.com/office/powerpoint/2010/main" val="3112143256"/>
       </p:ext>
     </p:extLst>
   </p:cSld>
@@ -6787,7 +5293,7 @@
           <p:cNvPr id="2" name="Nadpis 1">
             <a:extLst>
               <a:ext uri="{FF2B5EF4-FFF2-40B4-BE49-F238E27FC236}">
-                <a16:creationId xmlns:a16="http://schemas.microsoft.com/office/drawing/2014/main" id="{F9B2F386-2207-4FA2-A119-B08DF529FBFF}"/>
+                <a16:creationId xmlns:a16="http://schemas.microsoft.com/office/drawing/2014/main" id="{A5DE7317-D24D-3D45-48DB-2259453B71AA}"/>
               </a:ext>
             </a:extLst>
           </p:cNvPr>
@@ -6812,7 +5318,7 @@
           <p:cNvPr id="3" name="Zástupný obsah 2">
             <a:extLst>
               <a:ext uri="{FF2B5EF4-FFF2-40B4-BE49-F238E27FC236}">
-                <a16:creationId xmlns:a16="http://schemas.microsoft.com/office/drawing/2014/main" id="{1F949C8B-5C92-4217-968E-A41EDCF3AE16}"/>
+                <a16:creationId xmlns:a16="http://schemas.microsoft.com/office/drawing/2014/main" id="{17D3972F-92D4-2E14-3193-130A71EC4588}"/>
               </a:ext>
             </a:extLst>
           </p:cNvPr>
@@ -6837,7 +5343,7 @@
           <p:cNvPr id="5" name="Obrázek 4">
             <a:extLst>
               <a:ext uri="{FF2B5EF4-FFF2-40B4-BE49-F238E27FC236}">
-                <a16:creationId xmlns:a16="http://schemas.microsoft.com/office/drawing/2014/main" id="{B89B6DC6-4930-4A3E-9996-FC4AF1D20EA3}"/>
+                <a16:creationId xmlns:a16="http://schemas.microsoft.com/office/drawing/2014/main" id="{F9F149ED-3478-EB25-7635-F0EFD3739D5A}"/>
               </a:ext>
             </a:extLst>
           </p:cNvPr>
@@ -6854,8 +5360,8 @@
         </p:blipFill>
         <p:spPr>
           <a:xfrm>
-            <a:off x="0" y="180180"/>
-            <a:ext cx="12192000" cy="6497640"/>
+            <a:off x="0" y="180975"/>
+            <a:ext cx="12192000" cy="6496050"/>
           </a:xfrm>
           <a:prstGeom prst="rect">
             <a:avLst/>
@@ -6864,10 +5370,10 @@
       </p:pic>
       <p:sp>
         <p:nvSpPr>
-          <p:cNvPr id="6" name="TextovéPole 5">
-            <a:extLst>
-              <a:ext uri="{FF2B5EF4-FFF2-40B4-BE49-F238E27FC236}">
-                <a16:creationId xmlns:a16="http://schemas.microsoft.com/office/drawing/2014/main" id="{2735A0C6-15B4-4D89-B472-4F0F14604CA7}"/>
+          <p:cNvPr id="4" name="TextovéPole 3">
+            <a:extLst>
+              <a:ext uri="{FF2B5EF4-FFF2-40B4-BE49-F238E27FC236}">
+                <a16:creationId xmlns:a16="http://schemas.microsoft.com/office/drawing/2014/main" id="{7379EF7A-3829-F341-6F82-E1A67E950832}"/>
               </a:ext>
             </a:extLst>
           </p:cNvPr>
@@ -6876,23 +5382,21 @@
         </p:nvSpPr>
         <p:spPr>
           <a:xfrm>
-            <a:off x="7057293" y="3565070"/>
-            <a:ext cx="5134707" cy="2862322"/>
+            <a:off x="5095071" y="2590965"/>
+            <a:ext cx="5656881" cy="2031325"/>
           </a:xfrm>
           <a:prstGeom prst="rect">
             <a:avLst/>
           </a:prstGeom>
         </p:spPr>
         <p:style>
-          <a:lnRef idx="2">
-            <a:schemeClr val="accent2">
-              <a:shade val="50000"/>
-            </a:schemeClr>
+          <a:lnRef idx="3">
+            <a:schemeClr val="lt1"/>
           </a:lnRef>
           <a:fillRef idx="1">
             <a:schemeClr val="accent2"/>
           </a:fillRef>
-          <a:effectRef idx="0">
+          <a:effectRef idx="1">
             <a:schemeClr val="accent2"/>
           </a:effectRef>
           <a:fontRef idx="minor">
@@ -6907,7 +5411,15 @@
           <a:p>
             <a:r>
               <a:rPr lang="cs-CZ" dirty="0"/>
-              <a:t>A můžeme se vrhnout na začátek programování. </a:t>
+              <a:t>Následně ve stránce připravíme potřebný formulář. Na server jej s ohledem na velikost a „</a:t>
+            </a:r>
+            <a:r>
+              <a:rPr lang="cs-CZ" dirty="0" err="1"/>
+              <a:t>jednorázovost</a:t>
+            </a:r>
+            <a:r>
+              <a:rPr lang="cs-CZ" dirty="0"/>
+              <a:t>“ dat budeme odesílat metodou POST.</a:t>
             </a:r>
           </a:p>
           <a:p>
@@ -6915,35 +5427,22 @@
           </a:p>
           <a:p>
             <a:r>
+              <a:rPr lang="cs-CZ" dirty="0" err="1"/>
+              <a:t>Hidden</a:t>
+            </a:r>
+            <a:r>
               <a:rPr lang="cs-CZ" dirty="0"/>
-              <a:t>Začneme HTML částí – ve stránce budeme potřebovat formulář, pomocí kterého půjde zadat nový příspěvek.</a:t>
-            </a:r>
-          </a:p>
-          <a:p>
-            <a:endParaRPr lang="cs-CZ" dirty="0"/>
-          </a:p>
-          <a:p>
-            <a:r>
-              <a:rPr lang="cs-CZ" dirty="0"/>
-              <a:t>Jelikož očekáváme i delší textové příspěvky, budeme data na server odesílat metodou POST. Atribut „</a:t>
-            </a:r>
-            <a:r>
-              <a:rPr lang="cs-CZ" dirty="0" err="1"/>
-              <a:t>action</a:t>
-            </a:r>
-            <a:r>
-              <a:rPr lang="cs-CZ" dirty="0"/>
-              <a:t>“ u formuláře uvádět nemusíme, stránka bude data posílat sama sobě.</a:t>
-            </a:r>
-          </a:p>
-        </p:txBody>
-      </p:sp>
-      <p:sp>
-        <p:nvSpPr>
-          <p:cNvPr id="7" name="Obdélník 6">
-            <a:extLst>
-              <a:ext uri="{FF2B5EF4-FFF2-40B4-BE49-F238E27FC236}">
-                <a16:creationId xmlns:a16="http://schemas.microsoft.com/office/drawing/2014/main" id="{513A4421-9EA3-4C91-A294-CD3AD6483B20}"/>
+              <a:t> pole nám bude na straně serveru sloužit k ověření, že požadovanou akcí je opravdu uložení nového komentáře.</a:t>
+            </a:r>
+          </a:p>
+        </p:txBody>
+      </p:sp>
+      <p:sp>
+        <p:nvSpPr>
+          <p:cNvPr id="6" name="Obdélník 5">
+            <a:extLst>
+              <a:ext uri="{FF2B5EF4-FFF2-40B4-BE49-F238E27FC236}">
+                <a16:creationId xmlns:a16="http://schemas.microsoft.com/office/drawing/2014/main" id="{80856B2F-4EE9-F91E-935B-18DB9C4D2BFC}"/>
               </a:ext>
             </a:extLst>
           </p:cNvPr>
@@ -6952,8 +5451,8 @@
         </p:nvSpPr>
         <p:spPr>
           <a:xfrm>
-            <a:off x="3362178" y="3010486"/>
-            <a:ext cx="1702191" cy="661182"/>
+            <a:off x="927318" y="2514350"/>
+            <a:ext cx="4078635" cy="2584592"/>
           </a:xfrm>
           <a:prstGeom prst="rect">
             <a:avLst/>
@@ -6987,7 +5486,7 @@
     </p:spTree>
     <p:extLst>
       <p:ext uri="{BB962C8B-B14F-4D97-AF65-F5344CB8AC3E}">
-        <p14:creationId xmlns:p14="http://schemas.microsoft.com/office/powerpoint/2010/main" val="1860630114"/>
+        <p14:creationId xmlns:p14="http://schemas.microsoft.com/office/powerpoint/2010/main" val="342156050"/>
       </p:ext>
     </p:extLst>
   </p:cSld>
@@ -7019,7 +5518,7 @@
           <p:cNvPr id="2" name="Nadpis 1">
             <a:extLst>
               <a:ext uri="{FF2B5EF4-FFF2-40B4-BE49-F238E27FC236}">
-                <a16:creationId xmlns:a16="http://schemas.microsoft.com/office/drawing/2014/main" id="{5935D2B8-D03B-4AF1-AE87-31AB636752CA}"/>
+                <a16:creationId xmlns:a16="http://schemas.microsoft.com/office/drawing/2014/main" id="{4091F317-3F7C-8141-7862-00820FAC3D21}"/>
               </a:ext>
             </a:extLst>
           </p:cNvPr>
@@ -7044,7 +5543,7 @@
           <p:cNvPr id="3" name="Zástupný obsah 2">
             <a:extLst>
               <a:ext uri="{FF2B5EF4-FFF2-40B4-BE49-F238E27FC236}">
-                <a16:creationId xmlns:a16="http://schemas.microsoft.com/office/drawing/2014/main" id="{D6D6CF3D-069A-4B39-86B5-DD429B900553}"/>
+                <a16:creationId xmlns:a16="http://schemas.microsoft.com/office/drawing/2014/main" id="{1A3AAFF6-EDCF-7946-A0DA-9C382BCA58D4}"/>
               </a:ext>
             </a:extLst>
           </p:cNvPr>
@@ -7069,7 +5568,7 @@
           <p:cNvPr id="5" name="Obrázek 4">
             <a:extLst>
               <a:ext uri="{FF2B5EF4-FFF2-40B4-BE49-F238E27FC236}">
-                <a16:creationId xmlns:a16="http://schemas.microsoft.com/office/drawing/2014/main" id="{17FC8CE5-E96D-4FC3-9B71-19927636B63C}"/>
+                <a16:creationId xmlns:a16="http://schemas.microsoft.com/office/drawing/2014/main" id="{F2998709-049F-7B42-0412-BED57D2B07C3}"/>
               </a:ext>
             </a:extLst>
           </p:cNvPr>
@@ -7086,8 +5585,8 @@
         </p:blipFill>
         <p:spPr>
           <a:xfrm>
-            <a:off x="0" y="180180"/>
-            <a:ext cx="12192000" cy="6497640"/>
+            <a:off x="0" y="180975"/>
+            <a:ext cx="12192000" cy="6496050"/>
           </a:xfrm>
           <a:prstGeom prst="rect">
             <a:avLst/>
@@ -7096,10 +5595,10 @@
       </p:pic>
       <p:sp>
         <p:nvSpPr>
-          <p:cNvPr id="6" name="TextovéPole 5">
-            <a:extLst>
-              <a:ext uri="{FF2B5EF4-FFF2-40B4-BE49-F238E27FC236}">
-                <a16:creationId xmlns:a16="http://schemas.microsoft.com/office/drawing/2014/main" id="{EB19A0E4-DAE8-40D4-950A-B38B8619C56D}"/>
+          <p:cNvPr id="4" name="TextovéPole 3">
+            <a:extLst>
+              <a:ext uri="{FF2B5EF4-FFF2-40B4-BE49-F238E27FC236}">
+                <a16:creationId xmlns:a16="http://schemas.microsoft.com/office/drawing/2014/main" id="{311A7073-B5D5-1514-3011-19E989C37637}"/>
               </a:ext>
             </a:extLst>
           </p:cNvPr>
@@ -7108,23 +5607,21 @@
         </p:nvSpPr>
         <p:spPr>
           <a:xfrm>
-            <a:off x="7563732" y="1648483"/>
-            <a:ext cx="3971776" cy="1477328"/>
+            <a:off x="6042402" y="1302514"/>
+            <a:ext cx="5656881" cy="3416320"/>
           </a:xfrm>
           <a:prstGeom prst="rect">
             <a:avLst/>
           </a:prstGeom>
         </p:spPr>
         <p:style>
-          <a:lnRef idx="2">
-            <a:schemeClr val="accent2">
-              <a:shade val="50000"/>
-            </a:schemeClr>
+          <a:lnRef idx="3">
+            <a:schemeClr val="lt1"/>
           </a:lnRef>
           <a:fillRef idx="1">
             <a:schemeClr val="accent2"/>
           </a:fillRef>
-          <a:effectRef idx="0">
+          <a:effectRef idx="1">
             <a:schemeClr val="accent2"/>
           </a:effectRef>
           <a:fontRef idx="minor">
@@ -7139,23 +5636,43 @@
           <a:p>
             <a:r>
               <a:rPr lang="cs-CZ" dirty="0"/>
-              <a:t>Do formuláře doplníme vstupní pole pro jméno, e-mail a text příspěvku.</a:t>
-            </a:r>
+              <a:t>A jdeme začít řešit PHP. Zpracování formuláře dáme do stejného souboru, ve kterém vykreslujeme HTML stránku, ale daný PHP blok umístíme ještě před DOCTYPE. Toto umístění je nutné z důvodu potřebného HTTP přesměrování po dokončení zpracování dat.</a:t>
+            </a:r>
+          </a:p>
+          <a:p>
+            <a:endParaRPr lang="cs-CZ" dirty="0"/>
           </a:p>
           <a:p>
             <a:r>
               <a:rPr lang="cs-CZ" dirty="0"/>
-              <a:t>Jméno a text budou povinné, e-mail bude volitelný. Nezapomeneme na popisky a odesílací tlačítko.</a:t>
-            </a:r>
-          </a:p>
-        </p:txBody>
-      </p:sp>
-      <p:sp>
-        <p:nvSpPr>
-          <p:cNvPr id="7" name="Obdélník 6">
-            <a:extLst>
-              <a:ext uri="{FF2B5EF4-FFF2-40B4-BE49-F238E27FC236}">
-                <a16:creationId xmlns:a16="http://schemas.microsoft.com/office/drawing/2014/main" id="{BA0DBB7B-3D16-4DCC-9102-068C149DDBBA}"/>
+              <a:t>Připravíme si podmínku, ve které budeme ověřovat, že nám přišla nějaká data metodou POST a že chceme opravdu vytvářet nový komentář. </a:t>
+            </a:r>
+          </a:p>
+          <a:p>
+            <a:endParaRPr lang="cs-CZ" dirty="0"/>
+          </a:p>
+          <a:p>
+            <a:r>
+              <a:rPr lang="cs-CZ" dirty="0"/>
+              <a:t>Připravená proměnná</a:t>
+            </a:r>
+            <a:r>
+              <a:rPr lang="en-US" dirty="0"/>
+              <a:t> $</a:t>
+            </a:r>
+            <a:r>
+              <a:rPr lang="cs-CZ" dirty="0"/>
+              <a:t>chyby nám bude v dalším kroku sloužit pro kontroly formuláře.</a:t>
+            </a:r>
+          </a:p>
+        </p:txBody>
+      </p:sp>
+      <p:sp>
+        <p:nvSpPr>
+          <p:cNvPr id="6" name="Obdélník 5">
+            <a:extLst>
+              <a:ext uri="{FF2B5EF4-FFF2-40B4-BE49-F238E27FC236}">
+                <a16:creationId xmlns:a16="http://schemas.microsoft.com/office/drawing/2014/main" id="{0655BF6B-2012-007A-F6A8-E76EA504B1B2}"/>
               </a:ext>
             </a:extLst>
           </p:cNvPr>
@@ -7164,8 +5681,8 @@
         </p:nvSpPr>
         <p:spPr>
           <a:xfrm>
-            <a:off x="3539784" y="3260748"/>
-            <a:ext cx="4675748" cy="1789553"/>
+            <a:off x="838200" y="1181496"/>
+            <a:ext cx="4973664" cy="1127751"/>
           </a:xfrm>
           <a:prstGeom prst="rect">
             <a:avLst/>
@@ -7199,7 +5716,7 @@
     </p:spTree>
     <p:extLst>
       <p:ext uri="{BB962C8B-B14F-4D97-AF65-F5344CB8AC3E}">
-        <p14:creationId xmlns:p14="http://schemas.microsoft.com/office/powerpoint/2010/main" val="229778612"/>
+        <p14:creationId xmlns:p14="http://schemas.microsoft.com/office/powerpoint/2010/main" val="317635965"/>
       </p:ext>
     </p:extLst>
   </p:cSld>
@@ -7231,7 +5748,7 @@
           <p:cNvPr id="2" name="Nadpis 1">
             <a:extLst>
               <a:ext uri="{FF2B5EF4-FFF2-40B4-BE49-F238E27FC236}">
-                <a16:creationId xmlns:a16="http://schemas.microsoft.com/office/drawing/2014/main" id="{8CED3D59-14D3-43D1-B621-29FAB282E766}"/>
+                <a16:creationId xmlns:a16="http://schemas.microsoft.com/office/drawing/2014/main" id="{27EDF3CF-9E42-2323-89FB-AC01C1D55015}"/>
               </a:ext>
             </a:extLst>
           </p:cNvPr>
@@ -7256,7 +5773,7 @@
           <p:cNvPr id="3" name="Zástupný obsah 2">
             <a:extLst>
               <a:ext uri="{FF2B5EF4-FFF2-40B4-BE49-F238E27FC236}">
-                <a16:creationId xmlns:a16="http://schemas.microsoft.com/office/drawing/2014/main" id="{C207F8E7-3119-468B-87FD-601D49FB34FA}"/>
+                <a16:creationId xmlns:a16="http://schemas.microsoft.com/office/drawing/2014/main" id="{4CC2FBF2-7453-8ABE-C82F-6FAFAFE666DC}"/>
               </a:ext>
             </a:extLst>
           </p:cNvPr>
@@ -7278,10 +5795,10 @@
       </p:sp>
       <p:pic>
         <p:nvPicPr>
-          <p:cNvPr id="5" name="Obrázek 4">
-            <a:extLst>
-              <a:ext uri="{FF2B5EF4-FFF2-40B4-BE49-F238E27FC236}">
-                <a16:creationId xmlns:a16="http://schemas.microsoft.com/office/drawing/2014/main" id="{9CB3206E-40EB-4997-BC2F-D702D8522E27}"/>
+          <p:cNvPr id="7" name="Obrázek 6">
+            <a:extLst>
+              <a:ext uri="{FF2B5EF4-FFF2-40B4-BE49-F238E27FC236}">
+                <a16:creationId xmlns:a16="http://schemas.microsoft.com/office/drawing/2014/main" id="{2ECA820B-C2D3-2115-3B85-16FB5C0FD668}"/>
               </a:ext>
             </a:extLst>
           </p:cNvPr>
@@ -7308,10 +5825,10 @@
       </p:pic>
       <p:sp>
         <p:nvSpPr>
-          <p:cNvPr id="6" name="TextovéPole 5">
-            <a:extLst>
-              <a:ext uri="{FF2B5EF4-FFF2-40B4-BE49-F238E27FC236}">
-                <a16:creationId xmlns:a16="http://schemas.microsoft.com/office/drawing/2014/main" id="{68CCD4C4-E29F-41CA-8A6E-26DB3776BBBD}"/>
+          <p:cNvPr id="4" name="TextovéPole 3">
+            <a:extLst>
+              <a:ext uri="{FF2B5EF4-FFF2-40B4-BE49-F238E27FC236}">
+                <a16:creationId xmlns:a16="http://schemas.microsoft.com/office/drawing/2014/main" id="{FD7D2D4C-19DA-5A55-E9AB-581F0DDD1EC8}"/>
               </a:ext>
             </a:extLst>
           </p:cNvPr>
@@ -7320,23 +5837,21 @@
         </p:nvSpPr>
         <p:spPr>
           <a:xfrm>
-            <a:off x="6638193" y="1324768"/>
-            <a:ext cx="5134707" cy="3693319"/>
+            <a:off x="5696919" y="2274838"/>
+            <a:ext cx="5656881" cy="3416320"/>
           </a:xfrm>
           <a:prstGeom prst="rect">
             <a:avLst/>
           </a:prstGeom>
         </p:spPr>
         <p:style>
-          <a:lnRef idx="2">
-            <a:schemeClr val="accent2">
-              <a:shade val="50000"/>
-            </a:schemeClr>
+          <a:lnRef idx="3">
+            <a:schemeClr val="lt1"/>
           </a:lnRef>
           <a:fillRef idx="1">
             <a:schemeClr val="accent2"/>
           </a:fillRef>
-          <a:effectRef idx="0">
+          <a:effectRef idx="1">
             <a:schemeClr val="accent2"/>
           </a:effectRef>
           <a:fontRef idx="minor">
@@ -7351,74 +5866,48 @@
           <a:p>
             <a:r>
               <a:rPr lang="cs-CZ" dirty="0"/>
-              <a:t>Následně se podíváme na PHP kód, který bude umět data z formuláře zpracovat. Získání dat už jsme si ukazovali, v tomto případě je budeme číst z pole </a:t>
-            </a:r>
-            <a:r>
-              <a:rPr lang="en-US" b="1" dirty="0"/>
-              <a:t>$_POST</a:t>
+              <a:t>A jdeme na kontroly. Je NUTNÉ kontrolovat všechna data od uživatelů – nemůžeme spoléhat na kontrolu např. přímo v prohlížeči. </a:t>
+            </a:r>
+          </a:p>
+          <a:p>
+            <a:endParaRPr lang="cs-CZ" dirty="0"/>
+          </a:p>
+          <a:p>
+            <a:r>
+              <a:rPr lang="cs-CZ" dirty="0"/>
+              <a:t>První kontrolou je jméno, které musí být vyplněné a požadujeme, aby mělo délku minimálně 3 znaky. Před dalším zpracováním ze jména také odstraníme mezery ze začátku a konce poslaného řetězce. </a:t>
+            </a:r>
+          </a:p>
+          <a:p>
+            <a:endParaRPr lang="cs-CZ" dirty="0"/>
+          </a:p>
+          <a:p>
+            <a:r>
+              <a:rPr lang="cs-CZ" dirty="0"/>
+              <a:t>Když bude zadaná hodnota chybná, připravíme si chybovou hlášku pro uživatele do proměnné (pole) </a:t>
+            </a:r>
+            <a:r>
+              <a:rPr lang="en-US" dirty="0"/>
+              <a:t>$</a:t>
+            </a:r>
+            <a:r>
+              <a:rPr lang="en-US" dirty="0" err="1"/>
+              <a:t>chyby</a:t>
             </a:r>
             <a:r>
               <a:rPr lang="en-US" dirty="0"/>
               <a:t>.</a:t>
             </a:r>
-          </a:p>
-          <a:p>
-            <a:endParaRPr lang="en-US" dirty="0"/>
-          </a:p>
-          <a:p>
-            <a:r>
-              <a:rPr lang="en-US" dirty="0"/>
-              <a:t>S </a:t>
-            </a:r>
-            <a:r>
-              <a:rPr lang="en-US" dirty="0" err="1"/>
-              <a:t>ohledem</a:t>
-            </a:r>
-            <a:r>
-              <a:rPr lang="en-US" dirty="0"/>
-              <a:t> </a:t>
-            </a:r>
-            <a:r>
-              <a:rPr lang="en-US" dirty="0" err="1"/>
-              <a:t>na</a:t>
-            </a:r>
-            <a:r>
-              <a:rPr lang="en-US" dirty="0"/>
-              <a:t> </a:t>
-            </a:r>
-            <a:r>
-              <a:rPr lang="en-US" dirty="0" err="1"/>
-              <a:t>odesl</a:t>
-            </a:r>
-            <a:r>
-              <a:rPr lang="cs-CZ" dirty="0" err="1"/>
-              <a:t>ání</a:t>
-            </a:r>
-            <a:r>
-              <a:rPr lang="cs-CZ" dirty="0"/>
-              <a:t> dat metodou POST musíme uvést kód pro jejich zpracování ještě před DOCTYPE, abychom po jejich zpracování mohli provést přesměrování (a data se při obnovení stránky neodesílala znovu).</a:t>
-            </a:r>
-          </a:p>
-          <a:p>
             <a:endParaRPr lang="cs-CZ" dirty="0"/>
           </a:p>
-          <a:p>
-            <a:endParaRPr lang="cs-CZ" dirty="0"/>
-          </a:p>
-          <a:p>
-            <a:r>
-              <a:rPr lang="cs-CZ" i="1" dirty="0"/>
-              <a:t>(pokračování na dalším slidu)</a:t>
-            </a:r>
-          </a:p>
-        </p:txBody>
-      </p:sp>
-      <p:sp>
-        <p:nvSpPr>
-          <p:cNvPr id="7" name="Obdélník 6">
-            <a:extLst>
-              <a:ext uri="{FF2B5EF4-FFF2-40B4-BE49-F238E27FC236}">
-                <a16:creationId xmlns:a16="http://schemas.microsoft.com/office/drawing/2014/main" id="{A77A1DEA-EF4A-4CF9-BE08-488E0B50B675}"/>
+        </p:txBody>
+      </p:sp>
+      <p:sp>
+        <p:nvSpPr>
+          <p:cNvPr id="5" name="Obdélník 4">
+            <a:extLst>
+              <a:ext uri="{FF2B5EF4-FFF2-40B4-BE49-F238E27FC236}">
+                <a16:creationId xmlns:a16="http://schemas.microsoft.com/office/drawing/2014/main" id="{8C62FD41-EBE6-CDD9-974A-6CC436AA61F1}"/>
               </a:ext>
             </a:extLst>
           </p:cNvPr>
@@ -7427,8 +5916,8 @@
         </p:nvSpPr>
         <p:spPr>
           <a:xfrm>
-            <a:off x="3235569" y="914013"/>
-            <a:ext cx="3179299" cy="4178491"/>
+            <a:off x="958315" y="1875633"/>
+            <a:ext cx="4559082" cy="1084543"/>
           </a:xfrm>
           <a:prstGeom prst="rect">
             <a:avLst/>
@@ -7462,7 +5951,7 @@
     </p:spTree>
     <p:extLst>
       <p:ext uri="{BB962C8B-B14F-4D97-AF65-F5344CB8AC3E}">
-        <p14:creationId xmlns:p14="http://schemas.microsoft.com/office/powerpoint/2010/main" val="3548311963"/>
+        <p14:creationId xmlns:p14="http://schemas.microsoft.com/office/powerpoint/2010/main" val="1150050034"/>
       </p:ext>
     </p:extLst>
   </p:cSld>
@@ -7494,7 +5983,7 @@
           <p:cNvPr id="2" name="Nadpis 1">
             <a:extLst>
               <a:ext uri="{FF2B5EF4-FFF2-40B4-BE49-F238E27FC236}">
-                <a16:creationId xmlns:a16="http://schemas.microsoft.com/office/drawing/2014/main" id="{8CED3D59-14D3-43D1-B621-29FAB282E766}"/>
+                <a16:creationId xmlns:a16="http://schemas.microsoft.com/office/drawing/2014/main" id="{A86A06EC-DA18-F374-7D33-5557BECC30EA}"/>
               </a:ext>
             </a:extLst>
           </p:cNvPr>
@@ -7519,7 +6008,7 @@
           <p:cNvPr id="3" name="Zástupný obsah 2">
             <a:extLst>
               <a:ext uri="{FF2B5EF4-FFF2-40B4-BE49-F238E27FC236}">
-                <a16:creationId xmlns:a16="http://schemas.microsoft.com/office/drawing/2014/main" id="{C207F8E7-3119-468B-87FD-601D49FB34FA}"/>
+                <a16:creationId xmlns:a16="http://schemas.microsoft.com/office/drawing/2014/main" id="{5D2A4036-1889-AB80-5DDF-30B29E02C540}"/>
               </a:ext>
             </a:extLst>
           </p:cNvPr>
@@ -7541,10 +6030,10 @@
       </p:sp>
       <p:pic>
         <p:nvPicPr>
-          <p:cNvPr id="5" name="Obrázek 4">
-            <a:extLst>
-              <a:ext uri="{FF2B5EF4-FFF2-40B4-BE49-F238E27FC236}">
-                <a16:creationId xmlns:a16="http://schemas.microsoft.com/office/drawing/2014/main" id="{9CB3206E-40EB-4997-BC2F-D702D8522E27}"/>
+          <p:cNvPr id="7" name="Obrázek 6">
+            <a:extLst>
+              <a:ext uri="{FF2B5EF4-FFF2-40B4-BE49-F238E27FC236}">
+                <a16:creationId xmlns:a16="http://schemas.microsoft.com/office/drawing/2014/main" id="{8C3D310B-3478-A2DA-5EC9-8DEA73A4B492}"/>
               </a:ext>
             </a:extLst>
           </p:cNvPr>
@@ -7571,10 +6060,10 @@
       </p:pic>
       <p:sp>
         <p:nvSpPr>
-          <p:cNvPr id="6" name="TextovéPole 5">
-            <a:extLst>
-              <a:ext uri="{FF2B5EF4-FFF2-40B4-BE49-F238E27FC236}">
-                <a16:creationId xmlns:a16="http://schemas.microsoft.com/office/drawing/2014/main" id="{68CCD4C4-E29F-41CA-8A6E-26DB3776BBBD}"/>
+          <p:cNvPr id="4" name="TextovéPole 3">
+            <a:extLst>
+              <a:ext uri="{FF2B5EF4-FFF2-40B4-BE49-F238E27FC236}">
+                <a16:creationId xmlns:a16="http://schemas.microsoft.com/office/drawing/2014/main" id="{B1FB116C-649C-4642-C931-6B8271088FA3}"/>
               </a:ext>
             </a:extLst>
           </p:cNvPr>
@@ -7583,23 +6072,21 @@
         </p:nvSpPr>
         <p:spPr>
           <a:xfrm>
-            <a:off x="2599592" y="4826675"/>
-            <a:ext cx="9592408" cy="2031325"/>
+            <a:off x="3870705" y="3320262"/>
+            <a:ext cx="5656881" cy="1754326"/>
           </a:xfrm>
           <a:prstGeom prst="rect">
             <a:avLst/>
           </a:prstGeom>
         </p:spPr>
         <p:style>
-          <a:lnRef idx="2">
-            <a:schemeClr val="accent2">
-              <a:shade val="50000"/>
-            </a:schemeClr>
+          <a:lnRef idx="3">
+            <a:schemeClr val="lt1"/>
           </a:lnRef>
           <a:fillRef idx="1">
             <a:schemeClr val="accent2"/>
           </a:fillRef>
-          <a:effectRef idx="0">
+          <a:effectRef idx="1">
             <a:schemeClr val="accent2"/>
           </a:effectRef>
           <a:fontRef idx="minor">
@@ -7613,8 +6100,28 @@
           <a:lstStyle/>
           <a:p>
             <a:r>
+              <a:rPr lang="en-US" dirty="0" err="1"/>
+              <a:t>Pokud</a:t>
+            </a:r>
+            <a:r>
+              <a:rPr lang="en-US" dirty="0"/>
+              <a:t> </a:t>
+            </a:r>
+            <a:r>
+              <a:rPr lang="en-US" dirty="0" err="1"/>
+              <a:t>byla</a:t>
+            </a:r>
+            <a:r>
+              <a:rPr lang="en-US" dirty="0"/>
+              <a:t> p</a:t>
+            </a:r>
+            <a:r>
+              <a:rPr lang="cs-CZ" dirty="0" err="1"/>
+              <a:t>ři</a:t>
+            </a:r>
+            <a:r>
               <a:rPr lang="cs-CZ" dirty="0"/>
-              <a:t>V rámci zpracování nejprve ověříme, jestli nám přišla nějaká data metodou POST. </a:t>
+              <a:t> kontrole formuláře nalezena nějaká chyba, musíme o ní informovat uživatele. Projdeme pole s chybami a vypíšeme je v podobě seznamu. </a:t>
             </a:r>
           </a:p>
           <a:p>
@@ -7623,56 +6130,17 @@
           <a:p>
             <a:r>
               <a:rPr lang="cs-CZ" dirty="0"/>
-              <a:t>Vytvoříme si pole </a:t>
-            </a:r>
-            <a:r>
-              <a:rPr lang="en-US" b="1" dirty="0"/>
-              <a:t>$</a:t>
-            </a:r>
-            <a:r>
-              <a:rPr lang="en-US" b="1" dirty="0" err="1"/>
-              <a:t>chyby</a:t>
-            </a:r>
-            <a:r>
-              <a:rPr lang="en-US" dirty="0"/>
-              <a:t>, do </a:t>
-            </a:r>
-            <a:r>
-              <a:rPr lang="en-US" dirty="0" err="1"/>
-              <a:t>kte</a:t>
-            </a:r>
-            <a:r>
-              <a:rPr lang="cs-CZ" dirty="0" err="1"/>
-              <a:t>rého</a:t>
-            </a:r>
-            <a:r>
-              <a:rPr lang="cs-CZ" dirty="0"/>
-              <a:t> budeme ukládat informace o chybách ve vstupních datech. </a:t>
-            </a:r>
-          </a:p>
-          <a:p>
-            <a:r>
-              <a:rPr lang="cs-CZ" dirty="0"/>
-              <a:t>Následně provedeme kontroly všech vstupních dat. Pokud jsme nenašli žádné chyby (pole s jejich popisy je prázdné), bude možné data uložit.</a:t>
-            </a:r>
-          </a:p>
-          <a:p>
-            <a:endParaRPr lang="cs-CZ" dirty="0"/>
-          </a:p>
-          <a:p>
-            <a:r>
-              <a:rPr lang="cs-CZ" dirty="0"/>
-              <a:t>V rámci uvedených kontrol ověřujeme zadání jméno a délky textu příspěvku. </a:t>
-            </a:r>
-          </a:p>
-        </p:txBody>
-      </p:sp>
-      <p:sp>
-        <p:nvSpPr>
-          <p:cNvPr id="7" name="Obdélník 6">
-            <a:extLst>
-              <a:ext uri="{FF2B5EF4-FFF2-40B4-BE49-F238E27FC236}">
-                <a16:creationId xmlns:a16="http://schemas.microsoft.com/office/drawing/2014/main" id="{A77A1DEA-EF4A-4CF9-BE08-488E0B50B675}"/>
+              <a:t>Ošetření speciálních znaků v tomto případě řešit nemusíme, protože jsou tam naše vlastní texty.</a:t>
+            </a:r>
+          </a:p>
+        </p:txBody>
+      </p:sp>
+      <p:sp>
+        <p:nvSpPr>
+          <p:cNvPr id="5" name="Obdélník 4">
+            <a:extLst>
+              <a:ext uri="{FF2B5EF4-FFF2-40B4-BE49-F238E27FC236}">
+                <a16:creationId xmlns:a16="http://schemas.microsoft.com/office/drawing/2014/main" id="{27395FBD-5DF0-0122-6B9A-5931F3E29788}"/>
               </a:ext>
             </a:extLst>
           </p:cNvPr>
@@ -7681,8 +6149,8 @@
         </p:nvSpPr>
         <p:spPr>
           <a:xfrm>
-            <a:off x="3235569" y="1195754"/>
-            <a:ext cx="5148776" cy="3450742"/>
+            <a:off x="838201" y="3320262"/>
+            <a:ext cx="2803902" cy="1754326"/>
           </a:xfrm>
           <a:prstGeom prst="rect">
             <a:avLst/>
@@ -7716,7 +6184,7 @@
     </p:spTree>
     <p:extLst>
       <p:ext uri="{BB962C8B-B14F-4D97-AF65-F5344CB8AC3E}">
-        <p14:creationId xmlns:p14="http://schemas.microsoft.com/office/powerpoint/2010/main" val="3184972195"/>
+        <p14:creationId xmlns:p14="http://schemas.microsoft.com/office/powerpoint/2010/main" val="3634935056"/>
       </p:ext>
     </p:extLst>
   </p:cSld>
@@ -7748,7 +6216,7 @@
           <p:cNvPr id="2" name="Nadpis 1">
             <a:extLst>
               <a:ext uri="{FF2B5EF4-FFF2-40B4-BE49-F238E27FC236}">
-                <a16:creationId xmlns:a16="http://schemas.microsoft.com/office/drawing/2014/main" id="{4B397A45-0856-469A-850D-7E21855EC8AA}"/>
+                <a16:creationId xmlns:a16="http://schemas.microsoft.com/office/drawing/2014/main" id="{136DF2E6-4420-A9BB-78F7-9F9BD6B24D7E}"/>
               </a:ext>
             </a:extLst>
           </p:cNvPr>
@@ -7773,7 +6241,7 @@
           <p:cNvPr id="3" name="Zástupný obsah 2">
             <a:extLst>
               <a:ext uri="{FF2B5EF4-FFF2-40B4-BE49-F238E27FC236}">
-                <a16:creationId xmlns:a16="http://schemas.microsoft.com/office/drawing/2014/main" id="{B8A12598-F5B4-4C9B-B553-A9C8033B70B0}"/>
+                <a16:creationId xmlns:a16="http://schemas.microsoft.com/office/drawing/2014/main" id="{E820BEDD-37DD-499D-8583-25237E4A2EC1}"/>
               </a:ext>
             </a:extLst>
           </p:cNvPr>
@@ -7795,10 +6263,10 @@
       </p:sp>
       <p:pic>
         <p:nvPicPr>
-          <p:cNvPr id="5" name="Obrázek 4">
-            <a:extLst>
-              <a:ext uri="{FF2B5EF4-FFF2-40B4-BE49-F238E27FC236}">
-                <a16:creationId xmlns:a16="http://schemas.microsoft.com/office/drawing/2014/main" id="{BA77A987-7507-4B99-B534-1F4A6D01FBE5}"/>
+          <p:cNvPr id="6" name="Obrázek 5">
+            <a:extLst>
+              <a:ext uri="{FF2B5EF4-FFF2-40B4-BE49-F238E27FC236}">
+                <a16:creationId xmlns:a16="http://schemas.microsoft.com/office/drawing/2014/main" id="{06D0CA5E-F760-19ED-0CFC-F8405590D469}"/>
               </a:ext>
             </a:extLst>
           </p:cNvPr>
@@ -7815,8 +6283,8 @@
         </p:blipFill>
         <p:spPr>
           <a:xfrm>
-            <a:off x="0" y="180180"/>
-            <a:ext cx="12192000" cy="6497640"/>
+            <a:off x="0" y="165477"/>
+            <a:ext cx="12192000" cy="6496050"/>
           </a:xfrm>
           <a:prstGeom prst="rect">
             <a:avLst/>
@@ -7825,10 +6293,10 @@
       </p:pic>
       <p:sp>
         <p:nvSpPr>
-          <p:cNvPr id="6" name="TextovéPole 5">
-            <a:extLst>
-              <a:ext uri="{FF2B5EF4-FFF2-40B4-BE49-F238E27FC236}">
-                <a16:creationId xmlns:a16="http://schemas.microsoft.com/office/drawing/2014/main" id="{2184BB8F-B032-4B1D-A578-1010A6806E61}"/>
+          <p:cNvPr id="4" name="TextovéPole 3">
+            <a:extLst>
+              <a:ext uri="{FF2B5EF4-FFF2-40B4-BE49-F238E27FC236}">
+                <a16:creationId xmlns:a16="http://schemas.microsoft.com/office/drawing/2014/main" id="{7C1B50C2-3F96-7136-E714-0E4BE1E4961B}"/>
               </a:ext>
             </a:extLst>
           </p:cNvPr>
@@ -7837,23 +6305,21 @@
         </p:nvSpPr>
         <p:spPr>
           <a:xfrm>
-            <a:off x="8556088" y="1027906"/>
-            <a:ext cx="3413760" cy="3970318"/>
+            <a:off x="5607801" y="1360188"/>
+            <a:ext cx="5656881" cy="2308324"/>
           </a:xfrm>
           <a:prstGeom prst="rect">
             <a:avLst/>
           </a:prstGeom>
         </p:spPr>
         <p:style>
-          <a:lnRef idx="2">
-            <a:schemeClr val="accent2">
-              <a:shade val="50000"/>
-            </a:schemeClr>
+          <a:lnRef idx="3">
+            <a:schemeClr val="lt1"/>
           </a:lnRef>
           <a:fillRef idx="1">
             <a:schemeClr val="accent2"/>
           </a:fillRef>
-          <a:effectRef idx="0">
+          <a:effectRef idx="1">
             <a:schemeClr val="accent2"/>
           </a:effectRef>
           <a:fontRef idx="minor">
@@ -7868,7 +6334,7 @@
           <a:p>
             <a:r>
               <a:rPr lang="cs-CZ" dirty="0"/>
-              <a:t>Kromě kontrol pomocí funkcí pro práci s textem budeme potřebovat zkontrolovat také zadání e-mailu. Pokud je e-mail zadán, musí být validní (aby ho uživatel nezadal např. jen půlku).</a:t>
+              <a:t>Pokud byla ve formuláři chyba, musíme v něm zároveň vypsat hodnoty, které uživatel původně odeslal – protože říct mu „vyplň jméno“ a nechat formulář úplně prázdný by uživatele spolehlivě odradilo.</a:t>
             </a:r>
           </a:p>
           <a:p>
@@ -7877,33 +6343,26 @@
           <a:p>
             <a:r>
               <a:rPr lang="cs-CZ" dirty="0"/>
-              <a:t>Mohli bychom zkoušet napsat nějaký regulární výraz, ale jednodušší je kontrola pomocí funkce </a:t>
-            </a:r>
-            <a:r>
-              <a:rPr lang="cs-CZ" b="1" dirty="0" err="1"/>
-              <a:t>filter_var</a:t>
-            </a:r>
-            <a:r>
-              <a:rPr lang="cs-CZ" dirty="0"/>
-              <a:t>, u které zvolíme jako filtr </a:t>
-            </a:r>
-            <a:r>
-              <a:rPr lang="cs-CZ" b="1" dirty="0"/>
-              <a:t>FILTER_VALIDATE_EMAIL</a:t>
-            </a:r>
-            <a:r>
-              <a:rPr lang="cs-CZ" dirty="0"/>
-              <a:t>, který ověří platnost e-mailové adresy.</a:t>
-            </a:r>
-          </a:p>
-        </p:txBody>
-      </p:sp>
-      <p:sp>
-        <p:nvSpPr>
-          <p:cNvPr id="7" name="Obdélník 6">
-            <a:extLst>
-              <a:ext uri="{FF2B5EF4-FFF2-40B4-BE49-F238E27FC236}">
-                <a16:creationId xmlns:a16="http://schemas.microsoft.com/office/drawing/2014/main" id="{980174F9-8A99-495B-A042-65972FF6087F}"/>
+              <a:t>Hodnoty vypisujeme do příslušných polí formuláře, přičemž je nutné ošetřit potenciálně nebezpečné znaky funkcí </a:t>
+            </a:r>
+            <a:r>
+              <a:rPr lang="cs-CZ" dirty="0" err="1"/>
+              <a:t>htmlspecialchars</a:t>
+            </a:r>
+            <a:r>
+              <a:rPr lang="en-US" dirty="0"/>
+              <a:t>().</a:t>
+            </a:r>
+            <a:endParaRPr lang="cs-CZ" dirty="0"/>
+          </a:p>
+        </p:txBody>
+      </p:sp>
+      <p:sp>
+        <p:nvSpPr>
+          <p:cNvPr id="5" name="Obdélník 4">
+            <a:extLst>
+              <a:ext uri="{FF2B5EF4-FFF2-40B4-BE49-F238E27FC236}">
+                <a16:creationId xmlns:a16="http://schemas.microsoft.com/office/drawing/2014/main" id="{746701FE-C019-6650-81CA-C305A3DD127D}"/>
               </a:ext>
             </a:extLst>
           </p:cNvPr>
@@ -7912,8 +6371,8 @@
         </p:nvSpPr>
         <p:spPr>
           <a:xfrm>
-            <a:off x="3235569" y="2504048"/>
-            <a:ext cx="5148776" cy="995291"/>
+            <a:off x="3779006" y="4076935"/>
+            <a:ext cx="4419597" cy="324584"/>
           </a:xfrm>
           <a:prstGeom prst="rect">
             <a:avLst/>
@@ -7944,10 +6403,102 @@
           </a:p>
         </p:txBody>
       </p:sp>
+      <p:sp>
+        <p:nvSpPr>
+          <p:cNvPr id="7" name="Obdélník 6">
+            <a:extLst>
+              <a:ext uri="{FF2B5EF4-FFF2-40B4-BE49-F238E27FC236}">
+                <a16:creationId xmlns:a16="http://schemas.microsoft.com/office/drawing/2014/main" id="{F5672842-4DAB-A549-8AE0-306AAEA19588}"/>
+              </a:ext>
+            </a:extLst>
+          </p:cNvPr>
+          <p:cNvSpPr/>
+          <p:nvPr/>
+        </p:nvSpPr>
+        <p:spPr>
+          <a:xfrm>
+            <a:off x="3701516" y="5114742"/>
+            <a:ext cx="3877156" cy="324584"/>
+          </a:xfrm>
+          <a:prstGeom prst="rect">
+            <a:avLst/>
+          </a:prstGeom>
+          <a:noFill/>
+          <a:ln w="38100"/>
+        </p:spPr>
+        <p:style>
+          <a:lnRef idx="2">
+            <a:schemeClr val="accent2"/>
+          </a:lnRef>
+          <a:fillRef idx="1">
+            <a:schemeClr val="lt1"/>
+          </a:fillRef>
+          <a:effectRef idx="0">
+            <a:schemeClr val="accent2"/>
+          </a:effectRef>
+          <a:fontRef idx="minor">
+            <a:schemeClr val="dk1"/>
+          </a:fontRef>
+        </p:style>
+        <p:txBody>
+          <a:bodyPr rtlCol="0" anchor="ctr"/>
+          <a:lstStyle/>
+          <a:p>
+            <a:pPr algn="ctr"/>
+            <a:endParaRPr lang="cs-CZ"/>
+          </a:p>
+        </p:txBody>
+      </p:sp>
+      <p:sp>
+        <p:nvSpPr>
+          <p:cNvPr id="8" name="Obdélník 7">
+            <a:extLst>
+              <a:ext uri="{FF2B5EF4-FFF2-40B4-BE49-F238E27FC236}">
+                <a16:creationId xmlns:a16="http://schemas.microsoft.com/office/drawing/2014/main" id="{4C422ACB-1B79-C0BC-733F-C22DE532A751}"/>
+              </a:ext>
+            </a:extLst>
+          </p:cNvPr>
+          <p:cNvSpPr/>
+          <p:nvPr/>
+        </p:nvSpPr>
+        <p:spPr>
+          <a:xfrm>
+            <a:off x="3779005" y="4571349"/>
+            <a:ext cx="4419597" cy="324584"/>
+          </a:xfrm>
+          <a:prstGeom prst="rect">
+            <a:avLst/>
+          </a:prstGeom>
+          <a:noFill/>
+          <a:ln w="38100"/>
+        </p:spPr>
+        <p:style>
+          <a:lnRef idx="2">
+            <a:schemeClr val="accent2"/>
+          </a:lnRef>
+          <a:fillRef idx="1">
+            <a:schemeClr val="lt1"/>
+          </a:fillRef>
+          <a:effectRef idx="0">
+            <a:schemeClr val="accent2"/>
+          </a:effectRef>
+          <a:fontRef idx="minor">
+            <a:schemeClr val="dk1"/>
+          </a:fontRef>
+        </p:style>
+        <p:txBody>
+          <a:bodyPr rtlCol="0" anchor="ctr"/>
+          <a:lstStyle/>
+          <a:p>
+            <a:pPr algn="ctr"/>
+            <a:endParaRPr lang="cs-CZ"/>
+          </a:p>
+        </p:txBody>
+      </p:sp>
     </p:spTree>
     <p:extLst>
       <p:ext uri="{BB962C8B-B14F-4D97-AF65-F5344CB8AC3E}">
-        <p14:creationId xmlns:p14="http://schemas.microsoft.com/office/powerpoint/2010/main" val="222498517"/>
+        <p14:creationId xmlns:p14="http://schemas.microsoft.com/office/powerpoint/2010/main" val="2962722430"/>
       </p:ext>
     </p:extLst>
   </p:cSld>
@@ -7979,7 +6530,7 @@
           <p:cNvPr id="2" name="Nadpis 1">
             <a:extLst>
               <a:ext uri="{FF2B5EF4-FFF2-40B4-BE49-F238E27FC236}">
-                <a16:creationId xmlns:a16="http://schemas.microsoft.com/office/drawing/2014/main" id="{2FDA78EE-73FB-4B12-B6F6-CB7ECC2BBCF0}"/>
+                <a16:creationId xmlns:a16="http://schemas.microsoft.com/office/drawing/2014/main" id="{EBD69F0F-B1B9-7A16-7BFD-0928A127B656}"/>
               </a:ext>
             </a:extLst>
           </p:cNvPr>
@@ -8004,7 +6555,7 @@
           <p:cNvPr id="3" name="Zástupný obsah 2">
             <a:extLst>
               <a:ext uri="{FF2B5EF4-FFF2-40B4-BE49-F238E27FC236}">
-                <a16:creationId xmlns:a16="http://schemas.microsoft.com/office/drawing/2014/main" id="{2A50EE7A-F03F-4E64-9DF9-753CB410615F}"/>
+                <a16:creationId xmlns:a16="http://schemas.microsoft.com/office/drawing/2014/main" id="{73E40D56-57F9-9908-F23F-9A7EF2B50F2F}"/>
               </a:ext>
             </a:extLst>
           </p:cNvPr>
@@ -8029,7 +6580,7 @@
           <p:cNvPr id="5" name="Obrázek 4">
             <a:extLst>
               <a:ext uri="{FF2B5EF4-FFF2-40B4-BE49-F238E27FC236}">
-                <a16:creationId xmlns:a16="http://schemas.microsoft.com/office/drawing/2014/main" id="{C449A46D-92FA-4BF2-AE09-6A05C51B4382}"/>
+                <a16:creationId xmlns:a16="http://schemas.microsoft.com/office/drawing/2014/main" id="{573F22AE-6738-AEAC-5664-1EFEC12432F0}"/>
               </a:ext>
             </a:extLst>
           </p:cNvPr>
@@ -8056,85 +6607,20 @@
       </p:pic>
       <p:sp>
         <p:nvSpPr>
-          <p:cNvPr id="6" name="TextovéPole 5">
-            <a:extLst>
-              <a:ext uri="{FF2B5EF4-FFF2-40B4-BE49-F238E27FC236}">
-                <a16:creationId xmlns:a16="http://schemas.microsoft.com/office/drawing/2014/main" id="{071630C8-E984-4A34-A7BB-767A73027CB8}"/>
-              </a:ext>
-            </a:extLst>
-          </p:cNvPr>
-          <p:cNvSpPr txBox="1"/>
+          <p:cNvPr id="6" name="Obdélník 5">
+            <a:extLst>
+              <a:ext uri="{FF2B5EF4-FFF2-40B4-BE49-F238E27FC236}">
+                <a16:creationId xmlns:a16="http://schemas.microsoft.com/office/drawing/2014/main" id="{19C622F5-4E8A-49BE-73FA-FBBC3D4515BB}"/>
+              </a:ext>
+            </a:extLst>
+          </p:cNvPr>
+          <p:cNvSpPr/>
           <p:nvPr/>
         </p:nvSpPr>
         <p:spPr>
           <a:xfrm>
-            <a:off x="7627620" y="4113800"/>
-            <a:ext cx="3638843" cy="1754326"/>
-          </a:xfrm>
-          <a:prstGeom prst="rect">
-            <a:avLst/>
-          </a:prstGeom>
-        </p:spPr>
-        <p:style>
-          <a:lnRef idx="2">
-            <a:schemeClr val="accent2">
-              <a:shade val="50000"/>
-            </a:schemeClr>
-          </a:lnRef>
-          <a:fillRef idx="1">
-            <a:schemeClr val="accent2"/>
-          </a:fillRef>
-          <a:effectRef idx="0">
-            <a:schemeClr val="accent2"/>
-          </a:effectRef>
-          <a:fontRef idx="minor">
-            <a:schemeClr val="lt1"/>
-          </a:fontRef>
-        </p:style>
-        <p:txBody>
-          <a:bodyPr wrap="square" rtlCol="0">
-            <a:spAutoFit/>
-          </a:bodyPr>
-          <a:lstStyle/>
-          <a:p>
-            <a:r>
-              <a:rPr lang="cs-CZ" dirty="0"/>
-              <a:t>Kontrol</a:t>
-            </a:r>
-            <a:r>
-              <a:rPr lang="en-US" dirty="0"/>
-              <a:t>y </a:t>
-            </a:r>
-            <a:r>
-              <a:rPr lang="cs-CZ" dirty="0"/>
-              <a:t>máme hotové. Pokud nebudou po jejich provedení zaznamenány žádné chyby, bude možné data uložit a provést potřebné přesměrování. Zatím si tu poznamenáme TODO komentář </a:t>
-            </a:r>
-            <a:r>
-              <a:rPr lang="cs-CZ" dirty="0">
-                <a:sym typeface="Wingdings" panose="05000000000000000000" pitchFamily="2" charset="2"/>
-              </a:rPr>
-              <a:t></a:t>
-            </a:r>
-            <a:endParaRPr lang="cs-CZ" dirty="0"/>
-          </a:p>
-        </p:txBody>
-      </p:sp>
-      <p:sp>
-        <p:nvSpPr>
-          <p:cNvPr id="7" name="Obdélník 6">
-            <a:extLst>
-              <a:ext uri="{FF2B5EF4-FFF2-40B4-BE49-F238E27FC236}">
-                <a16:creationId xmlns:a16="http://schemas.microsoft.com/office/drawing/2014/main" id="{9C680D2A-0D87-4DDB-9077-830C64F1E31D}"/>
-              </a:ext>
-            </a:extLst>
-          </p:cNvPr>
-          <p:cNvSpPr/>
-          <p:nvPr/>
-        </p:nvSpPr>
-        <p:spPr>
-          <a:xfrm>
-            <a:off x="3474720" y="4445391"/>
-            <a:ext cx="4065564" cy="829993"/>
+            <a:off x="838200" y="2603715"/>
+            <a:ext cx="5965555" cy="2185261"/>
           </a:xfrm>
           <a:prstGeom prst="rect">
             <a:avLst/>
@@ -8165,10 +6651,105 @@
           </a:p>
         </p:txBody>
       </p:sp>
+      <p:sp>
+        <p:nvSpPr>
+          <p:cNvPr id="4" name="TextovéPole 3">
+            <a:extLst>
+              <a:ext uri="{FF2B5EF4-FFF2-40B4-BE49-F238E27FC236}">
+                <a16:creationId xmlns:a16="http://schemas.microsoft.com/office/drawing/2014/main" id="{D5CCE8D0-9506-9467-193F-824C9DBC4F37}"/>
+              </a:ext>
+            </a:extLst>
+          </p:cNvPr>
+          <p:cNvSpPr txBox="1"/>
+          <p:nvPr/>
+        </p:nvSpPr>
+        <p:spPr>
+          <a:xfrm>
+            <a:off x="6096000" y="3781926"/>
+            <a:ext cx="5656881" cy="2585323"/>
+          </a:xfrm>
+          <a:prstGeom prst="rect">
+            <a:avLst/>
+          </a:prstGeom>
+        </p:spPr>
+        <p:style>
+          <a:lnRef idx="3">
+            <a:schemeClr val="lt1"/>
+          </a:lnRef>
+          <a:fillRef idx="1">
+            <a:schemeClr val="accent2"/>
+          </a:fillRef>
+          <a:effectRef idx="1">
+            <a:schemeClr val="accent2"/>
+          </a:effectRef>
+          <a:fontRef idx="minor">
+            <a:schemeClr val="lt1"/>
+          </a:fontRef>
+        </p:style>
+        <p:txBody>
+          <a:bodyPr wrap="square" rtlCol="0">
+            <a:spAutoFit/>
+          </a:bodyPr>
+          <a:lstStyle/>
+          <a:p>
+            <a:r>
+              <a:rPr lang="en-US" dirty="0"/>
+              <a:t>A </a:t>
+            </a:r>
+            <a:r>
+              <a:rPr lang="en-US" dirty="0" err="1"/>
+              <a:t>jdeme</a:t>
+            </a:r>
+            <a:r>
+              <a:rPr lang="en-US" dirty="0"/>
+              <a:t> </a:t>
+            </a:r>
+            <a:r>
+              <a:rPr lang="cs-CZ" dirty="0"/>
+              <a:t>zpátky na kontroly. Dalším polem je e-mail, u kterého ale připouštíme, že jde o volitelné pole – tj. správný je jak stav, kdy uživatel nechá toto pole prázdné, tak stav, kdy vyplní platný mail.</a:t>
+            </a:r>
+          </a:p>
+          <a:p>
+            <a:r>
+              <a:rPr lang="cs-CZ" dirty="0"/>
+              <a:t>Pro kontrolu mailu používáme funkci </a:t>
+            </a:r>
+            <a:r>
+              <a:rPr lang="cs-CZ" dirty="0" err="1"/>
+              <a:t>filter_var</a:t>
+            </a:r>
+            <a:r>
+              <a:rPr lang="cs-CZ" dirty="0"/>
+              <a:t>.</a:t>
+            </a:r>
+          </a:p>
+          <a:p>
+            <a:endParaRPr lang="cs-CZ" dirty="0"/>
+          </a:p>
+          <a:p>
+            <a:r>
+              <a:rPr lang="cs-CZ" dirty="0"/>
+              <a:t>Z hlediska dalšího zpracování formuláře se pak podíváme na to, jestli je pole s chybami (</a:t>
+            </a:r>
+            <a:r>
+              <a:rPr lang="en-US" dirty="0"/>
+              <a:t>$</a:t>
+            </a:r>
+            <a:r>
+              <a:rPr lang="en-US" dirty="0" err="1"/>
+              <a:t>chyby</a:t>
+            </a:r>
+            <a:r>
+              <a:rPr lang="cs-CZ" dirty="0"/>
+              <a:t>) prázdné a pokud ano, víme, že můžeme uložit data.</a:t>
+            </a:r>
+          </a:p>
+        </p:txBody>
+      </p:sp>
     </p:spTree>
     <p:extLst>
       <p:ext uri="{BB962C8B-B14F-4D97-AF65-F5344CB8AC3E}">
-        <p14:creationId xmlns:p14="http://schemas.microsoft.com/office/powerpoint/2010/main" val="1845011060"/>
+        <p14:creationId xmlns:p14="http://schemas.microsoft.com/office/powerpoint/2010/main" val="2542707266"/>
       </p:ext>
     </p:extLst>
   </p:cSld>
@@ -8189,39 +6770,39 @@
         <a:sysClr val="window" lastClr="FFFFFF"/>
       </a:lt1>
       <a:dk2>
-        <a:srgbClr val="44546A"/>
+        <a:srgbClr val="0E2841"/>
       </a:dk2>
       <a:lt2>
-        <a:srgbClr val="E7E6E6"/>
+        <a:srgbClr val="E8E8E8"/>
       </a:lt2>
       <a:accent1>
-        <a:srgbClr val="4472C4"/>
+        <a:srgbClr val="156082"/>
       </a:accent1>
       <a:accent2>
-        <a:srgbClr val="ED7D31"/>
+        <a:srgbClr val="E97132"/>
       </a:accent2>
       <a:accent3>
-        <a:srgbClr val="A5A5A5"/>
+        <a:srgbClr val="196B24"/>
       </a:accent3>
       <a:accent4>
-        <a:srgbClr val="FFC000"/>
+        <a:srgbClr val="0F9ED5"/>
       </a:accent4>
       <a:accent5>
-        <a:srgbClr val="5B9BD5"/>
+        <a:srgbClr val="A02B93"/>
       </a:accent5>
       <a:accent6>
-        <a:srgbClr val="70AD47"/>
+        <a:srgbClr val="4EA72E"/>
       </a:accent6>
       <a:hlink>
-        <a:srgbClr val="0563C1"/>
+        <a:srgbClr val="467886"/>
       </a:hlink>
       <a:folHlink>
-        <a:srgbClr val="954F72"/>
+        <a:srgbClr val="96607D"/>
       </a:folHlink>
     </a:clrScheme>
     <a:fontScheme name="Office">
       <a:majorFont>
-        <a:latin typeface="Calibri Light" panose="020F0302020204030204"/>
+        <a:latin typeface="Aptos Display" panose="02110004020202020204"/>
         <a:ea typeface=""/>
         <a:cs typeface=""/>
         <a:font script="Jpan" typeface="游ゴシック Light"/>
@@ -8273,7 +6854,7 @@
         <a:font script="Tfng" typeface="Ebrima"/>
       </a:majorFont>
       <a:minorFont>
-        <a:latin typeface="Calibri" panose="020F0502020204030204"/>
+        <a:latin typeface="Aptos" panose="02110004020202020204"/>
         <a:ea typeface=""/>
         <a:cs typeface=""/>
         <a:font script="Jpan" typeface="游ゴシック"/>
@@ -8384,13 +6965,6 @@
         </a:gradFill>
       </a:fillStyleLst>
       <a:lnStyleLst>
-        <a:ln w="6350" cap="flat" cmpd="sng" algn="ctr">
-          <a:solidFill>
-            <a:schemeClr val="phClr"/>
-          </a:solidFill>
-          <a:prstDash val="solid"/>
-          <a:miter lim="800000"/>
-        </a:ln>
         <a:ln w="12700" cap="flat" cmpd="sng" algn="ctr">
           <a:solidFill>
             <a:schemeClr val="phClr"/>
@@ -8399,6 +6973,13 @@
           <a:miter lim="800000"/>
         </a:ln>
         <a:ln w="19050" cap="flat" cmpd="sng" algn="ctr">
+          <a:solidFill>
+            <a:schemeClr val="phClr"/>
+          </a:solidFill>
+          <a:prstDash val="solid"/>
+          <a:miter lim="800000"/>
+        </a:ln>
+        <a:ln w="25400" cap="flat" cmpd="sng" algn="ctr">
           <a:solidFill>
             <a:schemeClr val="phClr"/>
           </a:solidFill>
@@ -8463,12 +7044,235 @@
       </a:bgFillStyleLst>
     </a:fmtScheme>
   </a:themeElements>
-  <a:objectDefaults/>
+  <a:objectDefaults>
+    <a:lnDef>
+      <a:spPr/>
+      <a:bodyPr/>
+      <a:lstStyle/>
+      <a:style>
+        <a:lnRef idx="2">
+          <a:schemeClr val="accent1"/>
+        </a:lnRef>
+        <a:fillRef idx="0">
+          <a:schemeClr val="accent1"/>
+        </a:fillRef>
+        <a:effectRef idx="1">
+          <a:schemeClr val="accent1"/>
+        </a:effectRef>
+        <a:fontRef idx="minor">
+          <a:schemeClr val="tx1"/>
+        </a:fontRef>
+      </a:style>
+    </a:lnDef>
+  </a:objectDefaults>
   <a:extraClrSchemeLst/>
   <a:extLst>
     <a:ext uri="{05A4C25C-085E-4340-85A3-A5531E510DB2}">
-      <thm15:themeFamily xmlns:thm15="http://schemas.microsoft.com/office/thememl/2012/main" name="Office Theme" id="{62F939B6-93AF-4DB8-9C6B-D6C7DFDC589F}" vid="{4A3C46E8-61CC-4603-A589-7422A47A8E4A}"/>
+      <thm15:themeFamily xmlns:thm15="http://schemas.microsoft.com/office/thememl/2012/main" name="Office Theme" id="{2E142A2C-CD16-42D6-873A-C26D2A0506FA}" vid="{1BDDFF52-6CD6-40A5-AB3C-68EB2F1E4D0A}"/>
     </a:ext>
   </a:extLst>
 </a:theme>
+</file>
+
+<file path=customXml/item1.xml><?xml version="1.0" encoding="utf-8"?>
+<p:properties xmlns:p="http://schemas.microsoft.com/office/2006/metadata/properties" xmlns:xsi="http://www.w3.org/2001/XMLSchema-instance" xmlns:pc="http://schemas.microsoft.com/office/infopath/2007/PartnerControls">
+  <documentManagement>
+    <ReferenceId xmlns="e4c346bd-bcb6-4575-9470-db34b431cf35" xsi:nil="true"/>
+  </documentManagement>
+</p:properties>
+</file>
+
+<file path=customXml/item2.xml><?xml version="1.0" encoding="utf-8"?>
+<ct:contentTypeSchema xmlns:ct="http://schemas.microsoft.com/office/2006/metadata/contentType" xmlns:ma="http://schemas.microsoft.com/office/2006/metadata/properties/metaAttributes" ct:_="" ma:_="" ma:contentTypeName="Dokument" ma:contentTypeID="0x010100BCD47157240017489B18E4766951C622" ma:contentTypeVersion="4" ma:contentTypeDescription="Vytvoří nový dokument" ma:contentTypeScope="" ma:versionID="f675f4dbb66c30c235b372b759590798">
+  <xsd:schema xmlns:xsd="http://www.w3.org/2001/XMLSchema" xmlns:xs="http://www.w3.org/2001/XMLSchema" xmlns:p="http://schemas.microsoft.com/office/2006/metadata/properties" xmlns:ns2="e4c346bd-bcb6-4575-9470-db34b431cf35" targetNamespace="http://schemas.microsoft.com/office/2006/metadata/properties" ma:root="true" ma:fieldsID="60f3a33087d60b83cb5a69eb5f7b2027" ns2:_="">
+    <xsd:import namespace="e4c346bd-bcb6-4575-9470-db34b431cf35"/>
+    <xsd:element name="properties">
+      <xsd:complexType>
+        <xsd:sequence>
+          <xsd:element name="documentManagement">
+            <xsd:complexType>
+              <xsd:all>
+                <xsd:element ref="ns2:ReferenceId" minOccurs="0"/>
+                <xsd:element ref="ns2:MediaServiceMetadata" minOccurs="0"/>
+                <xsd:element ref="ns2:MediaServiceFastMetadata" minOccurs="0"/>
+                <xsd:element ref="ns2:MediaServiceSearchProperties" minOccurs="0"/>
+              </xsd:all>
+            </xsd:complexType>
+          </xsd:element>
+        </xsd:sequence>
+      </xsd:complexType>
+    </xsd:element>
+  </xsd:schema>
+  <xsd:schema xmlns:xsd="http://www.w3.org/2001/XMLSchema" xmlns:xs="http://www.w3.org/2001/XMLSchema" xmlns:dms="http://schemas.microsoft.com/office/2006/documentManagement/types" xmlns:pc="http://schemas.microsoft.com/office/infopath/2007/PartnerControls" targetNamespace="e4c346bd-bcb6-4575-9470-db34b431cf35" elementFormDefault="qualified">
+    <xsd:import namespace="http://schemas.microsoft.com/office/2006/documentManagement/types"/>
+    <xsd:import namespace="http://schemas.microsoft.com/office/infopath/2007/PartnerControls"/>
+    <xsd:element name="ReferenceId" ma:index="8" nillable="true" ma:displayName="ReferenceId" ma:indexed="true" ma:internalName="ReferenceId">
+      <xsd:simpleType>
+        <xsd:restriction base="dms:Text"/>
+      </xsd:simpleType>
+    </xsd:element>
+    <xsd:element name="MediaServiceMetadata" ma:index="9" nillable="true" ma:displayName="MediaServiceMetadata" ma:hidden="true" ma:internalName="MediaServiceMetadata" ma:readOnly="true">
+      <xsd:simpleType>
+        <xsd:restriction base="dms:Note"/>
+      </xsd:simpleType>
+    </xsd:element>
+    <xsd:element name="MediaServiceFastMetadata" ma:index="10" nillable="true" ma:displayName="MediaServiceFastMetadata" ma:hidden="true" ma:internalName="MediaServiceFastMetadata" ma:readOnly="true">
+      <xsd:simpleType>
+        <xsd:restriction base="dms:Note"/>
+      </xsd:simpleType>
+    </xsd:element>
+    <xsd:element name="MediaServiceSearchProperties" ma:index="11" nillable="true" ma:displayName="MediaServiceSearchProperties" ma:hidden="true" ma:internalName="MediaServiceSearchProperties" ma:readOnly="true">
+      <xsd:simpleType>
+        <xsd:restriction base="dms:Note"/>
+      </xsd:simpleType>
+    </xsd:element>
+  </xsd:schema>
+  <xsd:schema xmlns="http://schemas.openxmlformats.org/package/2006/metadata/core-properties" xmlns:xsd="http://www.w3.org/2001/XMLSchema" xmlns:xsi="http://www.w3.org/2001/XMLSchema-instance" xmlns:dc="http://purl.org/dc/elements/1.1/" xmlns:dcterms="http://purl.org/dc/terms/" xmlns:odoc="http://schemas.microsoft.com/internal/obd" targetNamespace="http://schemas.openxmlformats.org/package/2006/metadata/core-properties" elementFormDefault="qualified" attributeFormDefault="unqualified" blockDefault="#all">
+    <xsd:import namespace="http://purl.org/dc/elements/1.1/" schemaLocation="http://dublincore.org/schemas/xmls/qdc/2003/04/02/dc.xsd"/>
+    <xsd:import namespace="http://purl.org/dc/terms/" schemaLocation="http://dublincore.org/schemas/xmls/qdc/2003/04/02/dcterms.xsd"/>
+    <xsd:element name="coreProperties" type="CT_coreProperties"/>
+    <xsd:complexType name="CT_coreProperties">
+      <xsd:all>
+        <xsd:element ref="dc:creator" minOccurs="0" maxOccurs="1"/>
+        <xsd:element ref="dcterms:created" minOccurs="0" maxOccurs="1"/>
+        <xsd:element ref="dc:identifier" minOccurs="0" maxOccurs="1"/>
+        <xsd:element name="contentType" minOccurs="0" maxOccurs="1" type="xsd:string" ma:index="0" ma:displayName="Typ obsahu"/>
+        <xsd:element ref="dc:title" minOccurs="0" maxOccurs="1" ma:index="4" ma:displayName="Nadpis"/>
+        <xsd:element ref="dc:subject" minOccurs="0" maxOccurs="1"/>
+        <xsd:element ref="dc:description" minOccurs="0" maxOccurs="1"/>
+        <xsd:element name="keywords" minOccurs="0" maxOccurs="1" type="xsd:string"/>
+        <xsd:element ref="dc:language" minOccurs="0" maxOccurs="1"/>
+        <xsd:element name="category" minOccurs="0" maxOccurs="1" type="xsd:string"/>
+        <xsd:element name="version" minOccurs="0" maxOccurs="1" type="xsd:string"/>
+        <xsd:element name="revision" minOccurs="0" maxOccurs="1" type="xsd:string">
+          <xsd:annotation>
+            <xsd:documentation>
+                        This value indicates the number of saves or revisions. The application is responsible for updating this value after each revision.
+                    </xsd:documentation>
+          </xsd:annotation>
+        </xsd:element>
+        <xsd:element name="lastModifiedBy" minOccurs="0" maxOccurs="1" type="xsd:string"/>
+        <xsd:element ref="dcterms:modified" minOccurs="0" maxOccurs="1"/>
+        <xsd:element name="contentStatus" minOccurs="0" maxOccurs="1" type="xsd:string"/>
+      </xsd:all>
+    </xsd:complexType>
+  </xsd:schema>
+  <xs:schema xmlns:pc="http://schemas.microsoft.com/office/infopath/2007/PartnerControls" xmlns:xs="http://www.w3.org/2001/XMLSchema" targetNamespace="http://schemas.microsoft.com/office/infopath/2007/PartnerControls" elementFormDefault="qualified" attributeFormDefault="unqualified">
+    <xs:element name="Person">
+      <xs:complexType>
+        <xs:sequence>
+          <xs:element ref="pc:DisplayName" minOccurs="0"/>
+          <xs:element ref="pc:AccountId" minOccurs="0"/>
+          <xs:element ref="pc:AccountType" minOccurs="0"/>
+        </xs:sequence>
+      </xs:complexType>
+    </xs:element>
+    <xs:element name="DisplayName" type="xs:string"/>
+    <xs:element name="AccountId" type="xs:string"/>
+    <xs:element name="AccountType" type="xs:string"/>
+    <xs:element name="BDCAssociatedEntity">
+      <xs:complexType>
+        <xs:sequence>
+          <xs:element ref="pc:BDCEntity" minOccurs="0" maxOccurs="unbounded"/>
+        </xs:sequence>
+        <xs:attribute ref="pc:EntityNamespace"/>
+        <xs:attribute ref="pc:EntityName"/>
+        <xs:attribute ref="pc:SystemInstanceName"/>
+        <xs:attribute ref="pc:AssociationName"/>
+      </xs:complexType>
+    </xs:element>
+    <xs:attribute name="EntityNamespace" type="xs:string"/>
+    <xs:attribute name="EntityName" type="xs:string"/>
+    <xs:attribute name="SystemInstanceName" type="xs:string"/>
+    <xs:attribute name="AssociationName" type="xs:string"/>
+    <xs:element name="BDCEntity">
+      <xs:complexType>
+        <xs:sequence>
+          <xs:element ref="pc:EntityDisplayName" minOccurs="0"/>
+          <xs:element ref="pc:EntityInstanceReference" minOccurs="0"/>
+          <xs:element ref="pc:EntityId1" minOccurs="0"/>
+          <xs:element ref="pc:EntityId2" minOccurs="0"/>
+          <xs:element ref="pc:EntityId3" minOccurs="0"/>
+          <xs:element ref="pc:EntityId4" minOccurs="0"/>
+          <xs:element ref="pc:EntityId5" minOccurs="0"/>
+        </xs:sequence>
+      </xs:complexType>
+    </xs:element>
+    <xs:element name="EntityDisplayName" type="xs:string"/>
+    <xs:element name="EntityInstanceReference" type="xs:string"/>
+    <xs:element name="EntityId1" type="xs:string"/>
+    <xs:element name="EntityId2" type="xs:string"/>
+    <xs:element name="EntityId3" type="xs:string"/>
+    <xs:element name="EntityId4" type="xs:string"/>
+    <xs:element name="EntityId5" type="xs:string"/>
+    <xs:element name="Terms">
+      <xs:complexType>
+        <xs:sequence>
+          <xs:element ref="pc:TermInfo" minOccurs="0" maxOccurs="unbounded"/>
+        </xs:sequence>
+      </xs:complexType>
+    </xs:element>
+    <xs:element name="TermInfo">
+      <xs:complexType>
+        <xs:sequence>
+          <xs:element ref="pc:TermName" minOccurs="0"/>
+          <xs:element ref="pc:TermId" minOccurs="0"/>
+        </xs:sequence>
+      </xs:complexType>
+    </xs:element>
+    <xs:element name="TermName" type="xs:string"/>
+    <xs:element name="TermId" type="xs:string"/>
+  </xs:schema>
+</ct:contentTypeSchema>
+</file>
+
+<file path=customXml/item3.xml><?xml version="1.0" encoding="utf-8"?>
+<?mso-contentType ?>
+<FormTemplates xmlns="http://schemas.microsoft.com/sharepoint/v3/contenttype/forms">
+  <Display>DocumentLibraryForm</Display>
+  <Edit>DocumentLibraryForm</Edit>
+  <New>DocumentLibraryForm</New>
+</FormTemplates>
+</file>
+
+<file path=customXml/itemProps1.xml><?xml version="1.0" encoding="utf-8"?>
+<ds:datastoreItem xmlns:ds="http://schemas.openxmlformats.org/officeDocument/2006/customXml" ds:itemID="{9A0F6911-BF7F-40B3-97CC-77462D89C303}">
+  <ds:schemaRefs>
+    <ds:schemaRef ds:uri="http://schemas.microsoft.com/office/2006/metadata/properties"/>
+    <ds:schemaRef ds:uri="http://purl.org/dc/terms/"/>
+    <ds:schemaRef ds:uri="http://schemas.microsoft.com/office/infopath/2007/PartnerControls"/>
+    <ds:schemaRef ds:uri="http://schemas.microsoft.com/office/2006/documentManagement/types"/>
+    <ds:schemaRef ds:uri="http://purl.org/dc/dcmitype/"/>
+    <ds:schemaRef ds:uri="http://purl.org/dc/elements/1.1/"/>
+    <ds:schemaRef ds:uri="http://www.w3.org/XML/1998/namespace"/>
+    <ds:schemaRef ds:uri="http://schemas.openxmlformats.org/package/2006/metadata/core-properties"/>
+    <ds:schemaRef ds:uri="e4c346bd-bcb6-4575-9470-db34b431cf35"/>
+  </ds:schemaRefs>
+</ds:datastoreItem>
+</file>
+
+<file path=customXml/itemProps2.xml><?xml version="1.0" encoding="utf-8"?>
+<ds:datastoreItem xmlns:ds="http://schemas.openxmlformats.org/officeDocument/2006/customXml" ds:itemID="{FB610037-7596-42FD-965A-21A51A62BF96}">
+  <ds:schemaRefs>
+    <ds:schemaRef ds:uri="http://schemas.microsoft.com/office/2006/metadata/contentType"/>
+    <ds:schemaRef ds:uri="http://schemas.microsoft.com/office/2006/metadata/properties/metaAttributes"/>
+    <ds:schemaRef ds:uri="http://www.w3.org/2001/XMLSchema"/>
+    <ds:schemaRef ds:uri="http://schemas.microsoft.com/office/2006/metadata/properties"/>
+    <ds:schemaRef ds:uri="e4c346bd-bcb6-4575-9470-db34b431cf35"/>
+    <ds:schemaRef ds:uri="http://schemas.microsoft.com/office/2006/documentManagement/types"/>
+    <ds:schemaRef ds:uri="http://schemas.microsoft.com/office/infopath/2007/PartnerControls"/>
+    <ds:schemaRef ds:uri="http://schemas.openxmlformats.org/package/2006/metadata/core-properties"/>
+    <ds:schemaRef ds:uri="http://purl.org/dc/elements/1.1/"/>
+    <ds:schemaRef ds:uri="http://purl.org/dc/terms/"/>
+    <ds:schemaRef ds:uri="http://schemas.microsoft.com/internal/obd"/>
+  </ds:schemaRefs>
+</ds:datastoreItem>
+</file>
+
+<file path=customXml/itemProps3.xml><?xml version="1.0" encoding="utf-8"?>
+<ds:datastoreItem xmlns:ds="http://schemas.openxmlformats.org/officeDocument/2006/customXml" ds:itemID="{5DCE9C2C-7671-406F-8A9F-4BA3DFABB94E}">
+  <ds:schemaRefs>
+    <ds:schemaRef ds:uri="http://schemas.microsoft.com/sharepoint/v3/contenttype/forms"/>
+  </ds:schemaRefs>
+</ds:datastoreItem>
 </file>